--- a/reports/presentation/Arabic_AI_Text_Detection_Project.pptx
+++ b/reports/presentation/Arabic_AI_Text_Detection_Project.pptx
@@ -5,10 +5,10 @@
     <p:sldMasterId id="2147483648" r:id="rId1"/>
   </p:sldMasterIdLst>
   <p:notesMasterIdLst>
-    <p:notesMasterId r:id="rId38"/>
+    <p:notesMasterId r:id="rId41"/>
   </p:notesMasterIdLst>
   <p:handoutMasterIdLst>
-    <p:handoutMasterId r:id="rId39"/>
+    <p:handoutMasterId r:id="rId42"/>
   </p:handoutMasterIdLst>
   <p:sldIdLst>
     <p:sldId id="313" r:id="rId2"/>
@@ -47,6 +47,9 @@
     <p:sldId id="405" r:id="rId35"/>
     <p:sldId id="406" r:id="rId36"/>
     <p:sldId id="407" r:id="rId37"/>
+    <p:sldId id="410" r:id="rId38"/>
+    <p:sldId id="411" r:id="rId39"/>
+    <p:sldId id="365" r:id="rId40"/>
   </p:sldIdLst>
   <p:sldSz cx="12192000" cy="6858000"/>
   <p:notesSz cx="6858000" cy="9144000"/>
@@ -278,7 +281,7 @@
           <a:p>
             <a:fld id="{058ABBF3-49A8-4B3F-9773-22E67695BB12}" type="datetimeFigureOut">
               <a:rPr lang="en-US" smtClean="0"/>
-              <a:t>5/8/2026</a:t>
+              <a:t>5/20/2026</a:t>
             </a:fld>
             <a:endParaRPr lang="en-US" dirty="0"/>
           </a:p>
@@ -455,7 +458,7 @@
           <a:p>
             <a:fld id="{F44AAC2B-A50D-4386-849A-6B59FB991B4C}" type="datetimeFigureOut">
               <a:rPr lang="en-US" smtClean="0"/>
-              <a:t>5/8/2026</a:t>
+              <a:t>5/20/2026</a:t>
             </a:fld>
             <a:endParaRPr lang="en-US" dirty="0"/>
           </a:p>
@@ -3821,6 +3824,351 @@
     <p:extLst>
       <p:ext uri="{BB962C8B-B14F-4D97-AF65-F5344CB8AC3E}">
         <p14:creationId xmlns:p14="http://schemas.microsoft.com/office/powerpoint/2010/main" val="2174650949"/>
+      </p:ext>
+    </p:extLst>
+  </p:cSld>
+  <p:clrMapOvr>
+    <a:masterClrMapping/>
+  </p:clrMapOvr>
+</p:notes>
+</file>
+
+<file path=ppt/notesSlides/notesSlide36.xml><?xml version="1.0" encoding="utf-8"?>
+<p:notes xmlns:a="http://schemas.openxmlformats.org/drawingml/2006/main" xmlns:r="http://schemas.openxmlformats.org/officeDocument/2006/relationships" xmlns:p="http://schemas.openxmlformats.org/presentationml/2006/main">
+  <p:cSld>
+    <p:spTree>
+      <p:nvGrpSpPr>
+        <p:cNvPr id="1" name="">
+          <a:extLst>
+            <a:ext uri="{FF2B5EF4-FFF2-40B4-BE49-F238E27FC236}">
+              <a16:creationId xmlns:a16="http://schemas.microsoft.com/office/drawing/2014/main" id="{D748D2CA-64AA-E503-72D9-86BA33F59B33}"/>
+            </a:ext>
+          </a:extLst>
+        </p:cNvPr>
+        <p:cNvGrpSpPr/>
+        <p:nvPr/>
+      </p:nvGrpSpPr>
+      <p:grpSpPr>
+        <a:xfrm>
+          <a:off x="0" y="0"/>
+          <a:ext cx="0" cy="0"/>
+          <a:chOff x="0" y="0"/>
+          <a:chExt cx="0" cy="0"/>
+        </a:xfrm>
+      </p:grpSpPr>
+      <p:sp>
+        <p:nvSpPr>
+          <p:cNvPr id="2" name="Slide Image Placeholder 1">
+            <a:extLst>
+              <a:ext uri="{FF2B5EF4-FFF2-40B4-BE49-F238E27FC236}">
+                <a16:creationId xmlns:a16="http://schemas.microsoft.com/office/drawing/2014/main" id="{B54E123F-BCCA-889A-28C7-E7A9C6D6329B}"/>
+              </a:ext>
+            </a:extLst>
+          </p:cNvPr>
+          <p:cNvSpPr>
+            <a:spLocks noGrp="1" noRot="1" noChangeAspect="1"/>
+          </p:cNvSpPr>
+          <p:nvPr>
+            <p:ph type="sldImg"/>
+          </p:nvPr>
+        </p:nvSpPr>
+        <p:spPr/>
+        <p:txBody>
+          <a:bodyPr/>
+          <a:lstStyle/>
+          <a:p>
+            <a:endParaRPr lang="ar-SA"/>
+          </a:p>
+        </p:txBody>
+      </p:sp>
+      <p:sp>
+        <p:nvSpPr>
+          <p:cNvPr id="3" name="Notes Placeholder 2">
+            <a:extLst>
+              <a:ext uri="{FF2B5EF4-FFF2-40B4-BE49-F238E27FC236}">
+                <a16:creationId xmlns:a16="http://schemas.microsoft.com/office/drawing/2014/main" id="{841144D5-3907-2618-EC13-A068FDAA2D38}"/>
+              </a:ext>
+            </a:extLst>
+          </p:cNvPr>
+          <p:cNvSpPr>
+            <a:spLocks noGrp="1"/>
+          </p:cNvSpPr>
+          <p:nvPr>
+            <p:ph type="body" idx="1"/>
+          </p:nvPr>
+        </p:nvSpPr>
+        <p:spPr/>
+        <p:txBody>
+          <a:bodyPr/>
+          <a:lstStyle/>
+          <a:p>
+            <a:endParaRPr lang="en-US" dirty="0"/>
+          </a:p>
+        </p:txBody>
+      </p:sp>
+      <p:sp>
+        <p:nvSpPr>
+          <p:cNvPr id="4" name="Slide Number Placeholder 3">
+            <a:extLst>
+              <a:ext uri="{FF2B5EF4-FFF2-40B4-BE49-F238E27FC236}">
+                <a16:creationId xmlns:a16="http://schemas.microsoft.com/office/drawing/2014/main" id="{6E22CF6E-741B-9CCF-A0BF-BFB3F09EB5E7}"/>
+              </a:ext>
+            </a:extLst>
+          </p:cNvPr>
+          <p:cNvSpPr>
+            <a:spLocks noGrp="1"/>
+          </p:cNvSpPr>
+          <p:nvPr>
+            <p:ph type="sldNum" sz="quarter" idx="5"/>
+          </p:nvPr>
+        </p:nvSpPr>
+        <p:spPr/>
+        <p:txBody>
+          <a:bodyPr/>
+          <a:lstStyle/>
+          <a:p>
+            <a:fld id="{10895658-EA1F-4910-80AB-4DA76E167475}" type="slidenum">
+              <a:rPr lang="en-US" smtClean="0"/>
+              <a:t>37</a:t>
+            </a:fld>
+            <a:endParaRPr lang="en-US" dirty="0"/>
+          </a:p>
+        </p:txBody>
+      </p:sp>
+    </p:spTree>
+    <p:extLst>
+      <p:ext uri="{BB962C8B-B14F-4D97-AF65-F5344CB8AC3E}">
+        <p14:creationId xmlns:p14="http://schemas.microsoft.com/office/powerpoint/2010/main" val="2822112324"/>
+      </p:ext>
+    </p:extLst>
+  </p:cSld>
+  <p:clrMapOvr>
+    <a:masterClrMapping/>
+  </p:clrMapOvr>
+</p:notes>
+</file>
+
+<file path=ppt/notesSlides/notesSlide37.xml><?xml version="1.0" encoding="utf-8"?>
+<p:notes xmlns:a="http://schemas.openxmlformats.org/drawingml/2006/main" xmlns:r="http://schemas.openxmlformats.org/officeDocument/2006/relationships" xmlns:p="http://schemas.openxmlformats.org/presentationml/2006/main">
+  <p:cSld>
+    <p:spTree>
+      <p:nvGrpSpPr>
+        <p:cNvPr id="1" name="">
+          <a:extLst>
+            <a:ext uri="{FF2B5EF4-FFF2-40B4-BE49-F238E27FC236}">
+              <a16:creationId xmlns:a16="http://schemas.microsoft.com/office/drawing/2014/main" id="{AC5E75FD-447D-FC15-B8D5-DC8660C8F920}"/>
+            </a:ext>
+          </a:extLst>
+        </p:cNvPr>
+        <p:cNvGrpSpPr/>
+        <p:nvPr/>
+      </p:nvGrpSpPr>
+      <p:grpSpPr>
+        <a:xfrm>
+          <a:off x="0" y="0"/>
+          <a:ext cx="0" cy="0"/>
+          <a:chOff x="0" y="0"/>
+          <a:chExt cx="0" cy="0"/>
+        </a:xfrm>
+      </p:grpSpPr>
+      <p:sp>
+        <p:nvSpPr>
+          <p:cNvPr id="2" name="Slide Image Placeholder 1">
+            <a:extLst>
+              <a:ext uri="{FF2B5EF4-FFF2-40B4-BE49-F238E27FC236}">
+                <a16:creationId xmlns:a16="http://schemas.microsoft.com/office/drawing/2014/main" id="{33121DAA-E8FD-DD5F-8D93-8F95A2A3CDE3}"/>
+              </a:ext>
+            </a:extLst>
+          </p:cNvPr>
+          <p:cNvSpPr>
+            <a:spLocks noGrp="1" noRot="1" noChangeAspect="1"/>
+          </p:cNvSpPr>
+          <p:nvPr>
+            <p:ph type="sldImg"/>
+          </p:nvPr>
+        </p:nvSpPr>
+        <p:spPr/>
+        <p:txBody>
+          <a:bodyPr/>
+          <a:lstStyle/>
+          <a:p>
+            <a:endParaRPr lang="ar-SA"/>
+          </a:p>
+        </p:txBody>
+      </p:sp>
+      <p:sp>
+        <p:nvSpPr>
+          <p:cNvPr id="3" name="Notes Placeholder 2">
+            <a:extLst>
+              <a:ext uri="{FF2B5EF4-FFF2-40B4-BE49-F238E27FC236}">
+                <a16:creationId xmlns:a16="http://schemas.microsoft.com/office/drawing/2014/main" id="{D1010A12-C44F-2538-B732-23CF2C933C76}"/>
+              </a:ext>
+            </a:extLst>
+          </p:cNvPr>
+          <p:cNvSpPr>
+            <a:spLocks noGrp="1"/>
+          </p:cNvSpPr>
+          <p:nvPr>
+            <p:ph type="body" idx="1"/>
+          </p:nvPr>
+        </p:nvSpPr>
+        <p:spPr/>
+        <p:txBody>
+          <a:bodyPr/>
+          <a:lstStyle/>
+          <a:p>
+            <a:endParaRPr lang="en-US" dirty="0"/>
+          </a:p>
+        </p:txBody>
+      </p:sp>
+      <p:sp>
+        <p:nvSpPr>
+          <p:cNvPr id="4" name="Slide Number Placeholder 3">
+            <a:extLst>
+              <a:ext uri="{FF2B5EF4-FFF2-40B4-BE49-F238E27FC236}">
+                <a16:creationId xmlns:a16="http://schemas.microsoft.com/office/drawing/2014/main" id="{76167D49-EF78-E3C2-9265-6CC80CEEABE4}"/>
+              </a:ext>
+            </a:extLst>
+          </p:cNvPr>
+          <p:cNvSpPr>
+            <a:spLocks noGrp="1"/>
+          </p:cNvSpPr>
+          <p:nvPr>
+            <p:ph type="sldNum" sz="quarter" idx="5"/>
+          </p:nvPr>
+        </p:nvSpPr>
+        <p:spPr/>
+        <p:txBody>
+          <a:bodyPr/>
+          <a:lstStyle/>
+          <a:p>
+            <a:fld id="{10895658-EA1F-4910-80AB-4DA76E167475}" type="slidenum">
+              <a:rPr lang="en-US" smtClean="0"/>
+              <a:t>38</a:t>
+            </a:fld>
+            <a:endParaRPr lang="en-US" dirty="0"/>
+          </a:p>
+        </p:txBody>
+      </p:sp>
+    </p:spTree>
+    <p:extLst>
+      <p:ext uri="{BB962C8B-B14F-4D97-AF65-F5344CB8AC3E}">
+        <p14:creationId xmlns:p14="http://schemas.microsoft.com/office/powerpoint/2010/main" val="3922365089"/>
+      </p:ext>
+    </p:extLst>
+  </p:cSld>
+  <p:clrMapOvr>
+    <a:masterClrMapping/>
+  </p:clrMapOvr>
+</p:notes>
+</file>
+
+<file path=ppt/notesSlides/notesSlide38.xml><?xml version="1.0" encoding="utf-8"?>
+<p:notes xmlns:a="http://schemas.openxmlformats.org/drawingml/2006/main" xmlns:r="http://schemas.openxmlformats.org/officeDocument/2006/relationships" xmlns:p="http://schemas.openxmlformats.org/presentationml/2006/main">
+  <p:cSld>
+    <p:spTree>
+      <p:nvGrpSpPr>
+        <p:cNvPr id="1" name="">
+          <a:extLst>
+            <a:ext uri="{FF2B5EF4-FFF2-40B4-BE49-F238E27FC236}">
+              <a16:creationId xmlns:a16="http://schemas.microsoft.com/office/drawing/2014/main" id="{53E1E41A-4ABC-CD69-7F6F-A438664B4D96}"/>
+            </a:ext>
+          </a:extLst>
+        </p:cNvPr>
+        <p:cNvGrpSpPr/>
+        <p:nvPr/>
+      </p:nvGrpSpPr>
+      <p:grpSpPr>
+        <a:xfrm>
+          <a:off x="0" y="0"/>
+          <a:ext cx="0" cy="0"/>
+          <a:chOff x="0" y="0"/>
+          <a:chExt cx="0" cy="0"/>
+        </a:xfrm>
+      </p:grpSpPr>
+      <p:sp>
+        <p:nvSpPr>
+          <p:cNvPr id="2" name="Slide Image Placeholder 1">
+            <a:extLst>
+              <a:ext uri="{FF2B5EF4-FFF2-40B4-BE49-F238E27FC236}">
+                <a16:creationId xmlns:a16="http://schemas.microsoft.com/office/drawing/2014/main" id="{37D66D34-F002-0EFA-361C-5A7DB342E8CF}"/>
+              </a:ext>
+            </a:extLst>
+          </p:cNvPr>
+          <p:cNvSpPr>
+            <a:spLocks noGrp="1" noRot="1" noChangeAspect="1"/>
+          </p:cNvSpPr>
+          <p:nvPr>
+            <p:ph type="sldImg"/>
+          </p:nvPr>
+        </p:nvSpPr>
+        <p:spPr/>
+        <p:txBody>
+          <a:bodyPr/>
+          <a:lstStyle/>
+          <a:p>
+            <a:endParaRPr lang="ar-SA"/>
+          </a:p>
+        </p:txBody>
+      </p:sp>
+      <p:sp>
+        <p:nvSpPr>
+          <p:cNvPr id="3" name="Notes Placeholder 2">
+            <a:extLst>
+              <a:ext uri="{FF2B5EF4-FFF2-40B4-BE49-F238E27FC236}">
+                <a16:creationId xmlns:a16="http://schemas.microsoft.com/office/drawing/2014/main" id="{B18A37CF-CA6E-A9E2-C907-79CB3472F0C8}"/>
+              </a:ext>
+            </a:extLst>
+          </p:cNvPr>
+          <p:cNvSpPr>
+            <a:spLocks noGrp="1"/>
+          </p:cNvSpPr>
+          <p:nvPr>
+            <p:ph type="body" idx="1"/>
+          </p:nvPr>
+        </p:nvSpPr>
+        <p:spPr/>
+        <p:txBody>
+          <a:bodyPr/>
+          <a:lstStyle/>
+          <a:p>
+            <a:endParaRPr lang="en-US" dirty="0"/>
+          </a:p>
+        </p:txBody>
+      </p:sp>
+      <p:sp>
+        <p:nvSpPr>
+          <p:cNvPr id="4" name="Slide Number Placeholder 3">
+            <a:extLst>
+              <a:ext uri="{FF2B5EF4-FFF2-40B4-BE49-F238E27FC236}">
+                <a16:creationId xmlns:a16="http://schemas.microsoft.com/office/drawing/2014/main" id="{572405D8-FE83-EE1F-1846-B8F232469D82}"/>
+              </a:ext>
+            </a:extLst>
+          </p:cNvPr>
+          <p:cNvSpPr>
+            <a:spLocks noGrp="1"/>
+          </p:cNvSpPr>
+          <p:nvPr>
+            <p:ph type="sldNum" sz="quarter" idx="5"/>
+          </p:nvPr>
+        </p:nvSpPr>
+        <p:spPr/>
+        <p:txBody>
+          <a:bodyPr/>
+          <a:lstStyle/>
+          <a:p>
+            <a:fld id="{10895658-EA1F-4910-80AB-4DA76E167475}" type="slidenum">
+              <a:rPr lang="en-US" smtClean="0"/>
+              <a:t>39</a:t>
+            </a:fld>
+            <a:endParaRPr lang="en-US" dirty="0"/>
+          </a:p>
+        </p:txBody>
+      </p:sp>
+    </p:spTree>
+    <p:extLst>
+      <p:ext uri="{BB962C8B-B14F-4D97-AF65-F5344CB8AC3E}">
+        <p14:creationId xmlns:p14="http://schemas.microsoft.com/office/powerpoint/2010/main" val="1978593187"/>
       </p:ext>
     </p:extLst>
   </p:cSld>
@@ -23697,7 +24045,7 @@
         </p:nvSpPr>
         <p:spPr>
           <a:xfrm>
-            <a:off x="5571066" y="3085695"/>
+            <a:off x="5571066" y="2317139"/>
             <a:ext cx="6094907" cy="3316240"/>
           </a:xfrm>
         </p:spPr>
@@ -23707,7 +24055,11 @@
           </a:bodyPr>
           <a:lstStyle/>
           <a:p>
-            <a:pPr lvl="0"/>
+            <a:pPr lvl="0">
+              <a:lnSpc>
+                <a:spcPct val="100000"/>
+              </a:lnSpc>
+            </a:pPr>
             <a:r>
               <a:rPr lang="en-US" sz="2000" b="1" dirty="0">
                 <a:latin typeface="Times New Roman" panose="02020603050405020304" pitchFamily="18" charset="0"/>
@@ -23717,7 +24069,11 @@
             </a:r>
           </a:p>
           <a:p>
-            <a:pPr lvl="0"/>
+            <a:pPr lvl="0">
+              <a:lnSpc>
+                <a:spcPct val="100000"/>
+              </a:lnSpc>
+            </a:pPr>
             <a:r>
               <a:rPr lang="en-US" sz="2000" b="1" dirty="0">
                 <a:latin typeface="Times New Roman" panose="02020603050405020304" pitchFamily="18" charset="0"/>
@@ -23727,45 +24083,167 @@
             </a:r>
           </a:p>
           <a:p>
-            <a:pPr lvl="0"/>
+            <a:pPr lvl="0">
+              <a:lnSpc>
+                <a:spcPct val="100000"/>
+              </a:lnSpc>
+            </a:pPr>
             <a:r>
               <a:rPr lang="en-US" sz="2000" b="1" dirty="0">
                 <a:latin typeface="Times New Roman" panose="02020603050405020304" pitchFamily="18" charset="0"/>
                 <a:cs typeface="Times New Roman" panose="02020603050405020304" pitchFamily="18" charset="0"/>
               </a:rPr>
-              <a:t>Technologies: </a:t>
+              <a:t>Technologies: PySpark, Spark MLlib, Structured Streaming </a:t>
             </a:r>
+          </a:p>
+        </p:txBody>
+      </p:sp>
+      <p:sp>
+        <p:nvSpPr>
+          <p:cNvPr id="4" name="Shape 6">
+            <a:extLst>
+              <a:ext uri="{FF2B5EF4-FFF2-40B4-BE49-F238E27FC236}">
+                <a16:creationId xmlns:a16="http://schemas.microsoft.com/office/drawing/2014/main" id="{0B784B38-C335-9122-2004-673D27B0749D}"/>
+              </a:ext>
+            </a:extLst>
+          </p:cNvPr>
+          <p:cNvSpPr/>
+          <p:nvPr/>
+        </p:nvSpPr>
+        <p:spPr>
+          <a:xfrm>
+            <a:off x="6566054" y="4232297"/>
+            <a:ext cx="5464366" cy="2317610"/>
+          </a:xfrm>
+          <a:prstGeom prst="rect">
+            <a:avLst/>
+          </a:prstGeom>
+          <a:solidFill>
+            <a:schemeClr val="accent1">
+              <a:lumMod val="60000"/>
+              <a:lumOff val="40000"/>
+              <a:alpha val="40000"/>
+            </a:schemeClr>
+          </a:solidFill>
+          <a:ln w="12700">
+            <a:solidFill>
+              <a:schemeClr val="accent1">
+                <a:lumMod val="50000"/>
+              </a:schemeClr>
+            </a:solidFill>
+            <a:prstDash val="solid"/>
+          </a:ln>
+        </p:spPr>
+        <p:txBody>
+          <a:bodyPr/>
+          <a:lstStyle/>
+          <a:p>
             <a:r>
-              <a:rPr lang="en-US" sz="2000" b="1" dirty="0" err="1">
+              <a:rPr lang="en-US" sz="2400" dirty="0">
+                <a:solidFill>
+                  <a:schemeClr val="accent1">
+                    <a:lumMod val="50000"/>
+                  </a:schemeClr>
+                </a:solidFill>
+                <a:effectLst>
+                  <a:outerShdw blurRad="38100" dist="38100" dir="2700000" algn="tl">
+                    <a:srgbClr val="000000">
+                      <a:alpha val="43137"/>
+                    </a:srgbClr>
+                  </a:outerShdw>
+                </a:effectLst>
                 <a:latin typeface="Times New Roman" panose="02020603050405020304" pitchFamily="18" charset="0"/>
                 <a:cs typeface="Times New Roman" panose="02020603050405020304" pitchFamily="18" charset="0"/>
               </a:rPr>
-              <a:t>PySpark</a:t>
+              <a:t>Presented By:</a:t>
             </a:r>
+          </a:p>
+          <a:p>
+            <a:pPr algn="ctr" rtl="1">
+              <a:lnSpc>
+                <a:spcPct val="150000"/>
+              </a:lnSpc>
+              <a:spcBef>
+                <a:spcPts val="300"/>
+              </a:spcBef>
+            </a:pPr>
             <a:r>
-              <a:rPr lang="en-US" sz="2000" b="1" dirty="0">
+              <a:rPr lang="en-US" b="1" dirty="0">
+                <a:solidFill>
+                  <a:schemeClr val="accent1">
+                    <a:lumMod val="50000"/>
+                  </a:schemeClr>
+                </a:solidFill>
                 <a:latin typeface="Times New Roman" panose="02020603050405020304" pitchFamily="18" charset="0"/>
                 <a:cs typeface="Times New Roman" panose="02020603050405020304" pitchFamily="18" charset="0"/>
               </a:rPr>
-              <a:t>, Spark </a:t>
+              <a:t>Sami Ruzeq M. Almoadawi</a:t>
             </a:r>
+          </a:p>
+          <a:p>
+            <a:pPr algn="ctr" rtl="1">
+              <a:lnSpc>
+                <a:spcPct val="150000"/>
+              </a:lnSpc>
+              <a:spcBef>
+                <a:spcPts val="300"/>
+              </a:spcBef>
+            </a:pPr>
             <a:r>
-              <a:rPr lang="en-US" sz="2000" b="1" dirty="0" err="1">
+              <a:rPr lang="en-US" b="1" dirty="0">
+                <a:solidFill>
+                  <a:schemeClr val="accent1">
+                    <a:lumMod val="50000"/>
+                  </a:schemeClr>
+                </a:solidFill>
                 <a:latin typeface="Times New Roman" panose="02020603050405020304" pitchFamily="18" charset="0"/>
                 <a:cs typeface="Times New Roman" panose="02020603050405020304" pitchFamily="18" charset="0"/>
               </a:rPr>
-              <a:t>MLlib</a:t>
+              <a:t>4714252 </a:t>
             </a:r>
+          </a:p>
+          <a:p>
+            <a:pPr rtl="1"/>
             <a:r>
-              <a:rPr lang="en-US" sz="2000" b="1" dirty="0">
+              <a:rPr lang="en-US" sz="2400" dirty="0">
+                <a:solidFill>
+                  <a:schemeClr val="accent1">
+                    <a:lumMod val="50000"/>
+                  </a:schemeClr>
+                </a:solidFill>
+                <a:effectLst>
+                  <a:outerShdw blurRad="38100" dist="38100" dir="2700000" algn="tl">
+                    <a:srgbClr val="000000">
+                      <a:alpha val="43137"/>
+                    </a:srgbClr>
+                  </a:outerShdw>
+                </a:effectLst>
                 <a:latin typeface="Times New Roman" panose="02020603050405020304" pitchFamily="18" charset="0"/>
                 <a:cs typeface="Times New Roman" panose="02020603050405020304" pitchFamily="18" charset="0"/>
               </a:rPr>
-              <a:t>, Structured Streaming </a:t>
+              <a:t>Supervisor:</a:t>
             </a:r>
           </a:p>
           <a:p>
-            <a:endParaRPr lang="en-US" sz="2000" b="1" dirty="0">
+            <a:pPr algn="ctr" rtl="1"/>
+            <a:r>
+              <a:rPr lang="en-US" b="1" dirty="0">
+                <a:solidFill>
+                  <a:schemeClr val="accent1">
+                    <a:lumMod val="50000"/>
+                  </a:schemeClr>
+                </a:solidFill>
+                <a:latin typeface="Times New Roman" panose="02020603050405020304" pitchFamily="18" charset="0"/>
+                <a:cs typeface="Times New Roman" panose="02020603050405020304" pitchFamily="18" charset="0"/>
+              </a:rPr>
+              <a:t>DR. Mohammed Al-sarem</a:t>
+            </a:r>
+            <a:endParaRPr lang="en-US" dirty="0">
+              <a:solidFill>
+                <a:schemeClr val="accent1">
+                  <a:lumMod val="50000"/>
+                </a:schemeClr>
+              </a:solidFill>
               <a:latin typeface="Times New Roman" panose="02020603050405020304" pitchFamily="18" charset="0"/>
               <a:cs typeface="Times New Roman" panose="02020603050405020304" pitchFamily="18" charset="0"/>
             </a:endParaRPr>
@@ -23878,19 +24356,17 @@
       </p:sp>
       <p:pic>
         <p:nvPicPr>
-          <p:cNvPr id="5" name="Content Placeholder 4">
+          <p:cNvPr id="7" name="Picture 6">
             <a:extLst>
               <a:ext uri="{FF2B5EF4-FFF2-40B4-BE49-F238E27FC236}">
-                <a16:creationId xmlns:a16="http://schemas.microsoft.com/office/drawing/2014/main" id="{2BB7E756-0F71-3E8D-DEC4-23DA254154EA}"/>
+                <a16:creationId xmlns:a16="http://schemas.microsoft.com/office/drawing/2014/main" id="{1B5F7F45-D129-E87A-CFCE-B265476C32D1}"/>
               </a:ext>
             </a:extLst>
           </p:cNvPr>
           <p:cNvPicPr>
-            <a:picLocks noGrp="1" noChangeAspect="1"/>
+            <a:picLocks noChangeAspect="1"/>
           </p:cNvPicPr>
-          <p:nvPr>
-            <p:ph sz="half" idx="14"/>
-          </p:nvPr>
+          <p:nvPr/>
         </p:nvPicPr>
         <p:blipFill>
           <a:blip r:embed="rId3"/>
@@ -23898,47 +24374,656 @@
             <a:fillRect/>
           </a:stretch>
         </p:blipFill>
-        <p:spPr bwMode="auto">
+        <p:spPr>
           <a:xfrm>
-            <a:off x="2286001" y="1314632"/>
-            <a:ext cx="3598984" cy="5058033"/>
+            <a:off x="1101686" y="1283244"/>
+            <a:ext cx="5618603" cy="5436961"/>
           </a:xfrm>
-          <a:prstGeom prst="rect">
+          <a:custGeom>
             <a:avLst/>
-          </a:prstGeom>
-          <a:noFill/>
-          <a:ln>
-            <a:noFill/>
+            <a:gdLst>
+              <a:gd name="csX0" fmla="*/ 0 w 5618603"/>
+              <a:gd name="csY0" fmla="*/ 0 h 5436961"/>
+              <a:gd name="csX1" fmla="*/ 618046 w 5618603"/>
+              <a:gd name="csY1" fmla="*/ 0 h 5436961"/>
+              <a:gd name="csX2" fmla="*/ 1011349 w 5618603"/>
+              <a:gd name="csY2" fmla="*/ 0 h 5436961"/>
+              <a:gd name="csX3" fmla="*/ 1685581 w 5618603"/>
+              <a:gd name="csY3" fmla="*/ 0 h 5436961"/>
+              <a:gd name="csX4" fmla="*/ 2247441 w 5618603"/>
+              <a:gd name="csY4" fmla="*/ 0 h 5436961"/>
+              <a:gd name="csX5" fmla="*/ 2640743 w 5618603"/>
+              <a:gd name="csY5" fmla="*/ 0 h 5436961"/>
+              <a:gd name="csX6" fmla="*/ 3202604 w 5618603"/>
+              <a:gd name="csY6" fmla="*/ 0 h 5436961"/>
+              <a:gd name="csX7" fmla="*/ 3876836 w 5618603"/>
+              <a:gd name="csY7" fmla="*/ 0 h 5436961"/>
+              <a:gd name="csX8" fmla="*/ 4382510 w 5618603"/>
+              <a:gd name="csY8" fmla="*/ 0 h 5436961"/>
+              <a:gd name="csX9" fmla="*/ 4888185 w 5618603"/>
+              <a:gd name="csY9" fmla="*/ 0 h 5436961"/>
+              <a:gd name="csX10" fmla="*/ 5618603 w 5618603"/>
+              <a:gd name="csY10" fmla="*/ 0 h 5436961"/>
+              <a:gd name="csX11" fmla="*/ 5618603 w 5618603"/>
+              <a:gd name="csY11" fmla="*/ 598066 h 5436961"/>
+              <a:gd name="csX12" fmla="*/ 5618603 w 5618603"/>
+              <a:gd name="csY12" fmla="*/ 1141762 h 5436961"/>
+              <a:gd name="csX13" fmla="*/ 5618603 w 5618603"/>
+              <a:gd name="csY13" fmla="*/ 1794197 h 5436961"/>
+              <a:gd name="csX14" fmla="*/ 5618603 w 5618603"/>
+              <a:gd name="csY14" fmla="*/ 2283524 h 5436961"/>
+              <a:gd name="csX15" fmla="*/ 5618603 w 5618603"/>
+              <a:gd name="csY15" fmla="*/ 2718481 h 5436961"/>
+              <a:gd name="csX16" fmla="*/ 5618603 w 5618603"/>
+              <a:gd name="csY16" fmla="*/ 3262177 h 5436961"/>
+              <a:gd name="csX17" fmla="*/ 5618603 w 5618603"/>
+              <a:gd name="csY17" fmla="*/ 3860242 h 5436961"/>
+              <a:gd name="csX18" fmla="*/ 5618603 w 5618603"/>
+              <a:gd name="csY18" fmla="*/ 4512678 h 5436961"/>
+              <a:gd name="csX19" fmla="*/ 5618603 w 5618603"/>
+              <a:gd name="csY19" fmla="*/ 5436961 h 5436961"/>
+              <a:gd name="csX20" fmla="*/ 4944371 w 5618603"/>
+              <a:gd name="csY20" fmla="*/ 5436961 h 5436961"/>
+              <a:gd name="csX21" fmla="*/ 4438696 w 5618603"/>
+              <a:gd name="csY21" fmla="*/ 5436961 h 5436961"/>
+              <a:gd name="csX22" fmla="*/ 3933022 w 5618603"/>
+              <a:gd name="csY22" fmla="*/ 5436961 h 5436961"/>
+              <a:gd name="csX23" fmla="*/ 3427348 w 5618603"/>
+              <a:gd name="csY23" fmla="*/ 5436961 h 5436961"/>
+              <a:gd name="csX24" fmla="*/ 2809301 w 5618603"/>
+              <a:gd name="csY24" fmla="*/ 5436961 h 5436961"/>
+              <a:gd name="csX25" fmla="*/ 2247441 w 5618603"/>
+              <a:gd name="csY25" fmla="*/ 5436961 h 5436961"/>
+              <a:gd name="csX26" fmla="*/ 1854139 w 5618603"/>
+              <a:gd name="csY26" fmla="*/ 5436961 h 5436961"/>
+              <a:gd name="csX27" fmla="*/ 1348465 w 5618603"/>
+              <a:gd name="csY27" fmla="*/ 5436961 h 5436961"/>
+              <a:gd name="csX28" fmla="*/ 730418 w 5618603"/>
+              <a:gd name="csY28" fmla="*/ 5436961 h 5436961"/>
+              <a:gd name="csX29" fmla="*/ 0 w 5618603"/>
+              <a:gd name="csY29" fmla="*/ 5436961 h 5436961"/>
+              <a:gd name="csX30" fmla="*/ 0 w 5618603"/>
+              <a:gd name="csY30" fmla="*/ 4784526 h 5436961"/>
+              <a:gd name="csX31" fmla="*/ 0 w 5618603"/>
+              <a:gd name="csY31" fmla="*/ 4403938 h 5436961"/>
+              <a:gd name="csX32" fmla="*/ 0 w 5618603"/>
+              <a:gd name="csY32" fmla="*/ 3751503 h 5436961"/>
+              <a:gd name="csX33" fmla="*/ 0 w 5618603"/>
+              <a:gd name="csY33" fmla="*/ 3370916 h 5436961"/>
+              <a:gd name="csX34" fmla="*/ 0 w 5618603"/>
+              <a:gd name="csY34" fmla="*/ 2827220 h 5436961"/>
+              <a:gd name="csX35" fmla="*/ 0 w 5618603"/>
+              <a:gd name="csY35" fmla="*/ 2392263 h 5436961"/>
+              <a:gd name="csX36" fmla="*/ 0 w 5618603"/>
+              <a:gd name="csY36" fmla="*/ 1957306 h 5436961"/>
+              <a:gd name="csX37" fmla="*/ 0 w 5618603"/>
+              <a:gd name="csY37" fmla="*/ 1522349 h 5436961"/>
+              <a:gd name="csX38" fmla="*/ 0 w 5618603"/>
+              <a:gd name="csY38" fmla="*/ 1087392 h 5436961"/>
+              <a:gd name="csX39" fmla="*/ 0 w 5618603"/>
+              <a:gd name="csY39" fmla="*/ 598066 h 5436961"/>
+              <a:gd name="csX40" fmla="*/ 0 w 5618603"/>
+              <a:gd name="csY40" fmla="*/ 0 h 5436961"/>
+            </a:gdLst>
+            <a:ahLst/>
+            <a:cxnLst>
+              <a:cxn ang="0">
+                <a:pos x="csX0" y="csY0"/>
+              </a:cxn>
+              <a:cxn ang="0">
+                <a:pos x="csX1" y="csY1"/>
+              </a:cxn>
+              <a:cxn ang="0">
+                <a:pos x="csX2" y="csY2"/>
+              </a:cxn>
+              <a:cxn ang="0">
+                <a:pos x="csX3" y="csY3"/>
+              </a:cxn>
+              <a:cxn ang="0">
+                <a:pos x="csX4" y="csY4"/>
+              </a:cxn>
+              <a:cxn ang="0">
+                <a:pos x="csX5" y="csY5"/>
+              </a:cxn>
+              <a:cxn ang="0">
+                <a:pos x="csX6" y="csY6"/>
+              </a:cxn>
+              <a:cxn ang="0">
+                <a:pos x="csX7" y="csY7"/>
+              </a:cxn>
+              <a:cxn ang="0">
+                <a:pos x="csX8" y="csY8"/>
+              </a:cxn>
+              <a:cxn ang="0">
+                <a:pos x="csX9" y="csY9"/>
+              </a:cxn>
+              <a:cxn ang="0">
+                <a:pos x="csX10" y="csY10"/>
+              </a:cxn>
+              <a:cxn ang="0">
+                <a:pos x="csX11" y="csY11"/>
+              </a:cxn>
+              <a:cxn ang="0">
+                <a:pos x="csX12" y="csY12"/>
+              </a:cxn>
+              <a:cxn ang="0">
+                <a:pos x="csX13" y="csY13"/>
+              </a:cxn>
+              <a:cxn ang="0">
+                <a:pos x="csX14" y="csY14"/>
+              </a:cxn>
+              <a:cxn ang="0">
+                <a:pos x="csX15" y="csY15"/>
+              </a:cxn>
+              <a:cxn ang="0">
+                <a:pos x="csX16" y="csY16"/>
+              </a:cxn>
+              <a:cxn ang="0">
+                <a:pos x="csX17" y="csY17"/>
+              </a:cxn>
+              <a:cxn ang="0">
+                <a:pos x="csX18" y="csY18"/>
+              </a:cxn>
+              <a:cxn ang="0">
+                <a:pos x="csX19" y="csY19"/>
+              </a:cxn>
+              <a:cxn ang="0">
+                <a:pos x="csX20" y="csY20"/>
+              </a:cxn>
+              <a:cxn ang="0">
+                <a:pos x="csX21" y="csY21"/>
+              </a:cxn>
+              <a:cxn ang="0">
+                <a:pos x="csX22" y="csY22"/>
+              </a:cxn>
+              <a:cxn ang="0">
+                <a:pos x="csX23" y="csY23"/>
+              </a:cxn>
+              <a:cxn ang="0">
+                <a:pos x="csX24" y="csY24"/>
+              </a:cxn>
+              <a:cxn ang="0">
+                <a:pos x="csX25" y="csY25"/>
+              </a:cxn>
+              <a:cxn ang="0">
+                <a:pos x="csX26" y="csY26"/>
+              </a:cxn>
+              <a:cxn ang="0">
+                <a:pos x="csX27" y="csY27"/>
+              </a:cxn>
+              <a:cxn ang="0">
+                <a:pos x="csX28" y="csY28"/>
+              </a:cxn>
+              <a:cxn ang="0">
+                <a:pos x="csX29" y="csY29"/>
+              </a:cxn>
+              <a:cxn ang="0">
+                <a:pos x="csX30" y="csY30"/>
+              </a:cxn>
+              <a:cxn ang="0">
+                <a:pos x="csX31" y="csY31"/>
+              </a:cxn>
+              <a:cxn ang="0">
+                <a:pos x="csX32" y="csY32"/>
+              </a:cxn>
+              <a:cxn ang="0">
+                <a:pos x="csX33" y="csY33"/>
+              </a:cxn>
+              <a:cxn ang="0">
+                <a:pos x="csX34" y="csY34"/>
+              </a:cxn>
+              <a:cxn ang="0">
+                <a:pos x="csX35" y="csY35"/>
+              </a:cxn>
+              <a:cxn ang="0">
+                <a:pos x="csX36" y="csY36"/>
+              </a:cxn>
+              <a:cxn ang="0">
+                <a:pos x="csX37" y="csY37"/>
+              </a:cxn>
+              <a:cxn ang="0">
+                <a:pos x="csX38" y="csY38"/>
+              </a:cxn>
+              <a:cxn ang="0">
+                <a:pos x="csX39" y="csY39"/>
+              </a:cxn>
+              <a:cxn ang="0">
+                <a:pos x="csX40" y="csY40"/>
+              </a:cxn>
+            </a:cxnLst>
+            <a:rect l="l" t="t" r="r" b="b"/>
+            <a:pathLst>
+              <a:path w="5618603" h="5436961" fill="none" extrusionOk="0">
+                <a:moveTo>
+                  <a:pt x="0" y="0"/>
+                </a:moveTo>
+                <a:cubicBezTo>
+                  <a:pt x="215213" y="-3787"/>
+                  <a:pt x="464738" y="68516"/>
+                  <a:pt x="618046" y="0"/>
+                </a:cubicBezTo>
+                <a:cubicBezTo>
+                  <a:pt x="771354" y="-68516"/>
+                  <a:pt x="866959" y="43419"/>
+                  <a:pt x="1011349" y="0"/>
+                </a:cubicBezTo>
+                <a:cubicBezTo>
+                  <a:pt x="1155739" y="-43419"/>
+                  <a:pt x="1514950" y="39207"/>
+                  <a:pt x="1685581" y="0"/>
+                </a:cubicBezTo>
+                <a:cubicBezTo>
+                  <a:pt x="1856212" y="-39207"/>
+                  <a:pt x="2031608" y="47407"/>
+                  <a:pt x="2247441" y="0"/>
+                </a:cubicBezTo>
+                <a:cubicBezTo>
+                  <a:pt x="2463274" y="-47407"/>
+                  <a:pt x="2517096" y="33010"/>
+                  <a:pt x="2640743" y="0"/>
+                </a:cubicBezTo>
+                <a:cubicBezTo>
+                  <a:pt x="2764390" y="-33010"/>
+                  <a:pt x="2967994" y="62585"/>
+                  <a:pt x="3202604" y="0"/>
+                </a:cubicBezTo>
+                <a:cubicBezTo>
+                  <a:pt x="3437214" y="-62585"/>
+                  <a:pt x="3726830" y="34400"/>
+                  <a:pt x="3876836" y="0"/>
+                </a:cubicBezTo>
+                <a:cubicBezTo>
+                  <a:pt x="4026842" y="-34400"/>
+                  <a:pt x="4208071" y="13247"/>
+                  <a:pt x="4382510" y="0"/>
+                </a:cubicBezTo>
+                <a:cubicBezTo>
+                  <a:pt x="4556949" y="-13247"/>
+                  <a:pt x="4661737" y="1632"/>
+                  <a:pt x="4888185" y="0"/>
+                </a:cubicBezTo>
+                <a:cubicBezTo>
+                  <a:pt x="5114634" y="-1632"/>
+                  <a:pt x="5273718" y="63347"/>
+                  <a:pt x="5618603" y="0"/>
+                </a:cubicBezTo>
+                <a:cubicBezTo>
+                  <a:pt x="5639754" y="253671"/>
+                  <a:pt x="5560712" y="371054"/>
+                  <a:pt x="5618603" y="598066"/>
+                </a:cubicBezTo>
+                <a:cubicBezTo>
+                  <a:pt x="5676494" y="825078"/>
+                  <a:pt x="5596710" y="877392"/>
+                  <a:pt x="5618603" y="1141762"/>
+                </a:cubicBezTo>
+                <a:cubicBezTo>
+                  <a:pt x="5640496" y="1406132"/>
+                  <a:pt x="5616458" y="1524391"/>
+                  <a:pt x="5618603" y="1794197"/>
+                </a:cubicBezTo>
+                <a:cubicBezTo>
+                  <a:pt x="5620748" y="2064004"/>
+                  <a:pt x="5563871" y="2179183"/>
+                  <a:pt x="5618603" y="2283524"/>
+                </a:cubicBezTo>
+                <a:cubicBezTo>
+                  <a:pt x="5673335" y="2387865"/>
+                  <a:pt x="5593918" y="2560368"/>
+                  <a:pt x="5618603" y="2718481"/>
+                </a:cubicBezTo>
+                <a:cubicBezTo>
+                  <a:pt x="5643288" y="2876594"/>
+                  <a:pt x="5573296" y="3105482"/>
+                  <a:pt x="5618603" y="3262177"/>
+                </a:cubicBezTo>
+                <a:cubicBezTo>
+                  <a:pt x="5663910" y="3418872"/>
+                  <a:pt x="5547019" y="3597643"/>
+                  <a:pt x="5618603" y="3860242"/>
+                </a:cubicBezTo>
+                <a:cubicBezTo>
+                  <a:pt x="5690187" y="4122841"/>
+                  <a:pt x="5604494" y="4291236"/>
+                  <a:pt x="5618603" y="4512678"/>
+                </a:cubicBezTo>
+                <a:cubicBezTo>
+                  <a:pt x="5632712" y="4734120"/>
+                  <a:pt x="5594358" y="5107855"/>
+                  <a:pt x="5618603" y="5436961"/>
+                </a:cubicBezTo>
+                <a:cubicBezTo>
+                  <a:pt x="5355551" y="5463662"/>
+                  <a:pt x="5272029" y="5360580"/>
+                  <a:pt x="4944371" y="5436961"/>
+                </a:cubicBezTo>
+                <a:cubicBezTo>
+                  <a:pt x="4616713" y="5513342"/>
+                  <a:pt x="4666915" y="5387458"/>
+                  <a:pt x="4438696" y="5436961"/>
+                </a:cubicBezTo>
+                <a:cubicBezTo>
+                  <a:pt x="4210477" y="5486464"/>
+                  <a:pt x="4041623" y="5385553"/>
+                  <a:pt x="3933022" y="5436961"/>
+                </a:cubicBezTo>
+                <a:cubicBezTo>
+                  <a:pt x="3824421" y="5488369"/>
+                  <a:pt x="3630949" y="5382415"/>
+                  <a:pt x="3427348" y="5436961"/>
+                </a:cubicBezTo>
+                <a:cubicBezTo>
+                  <a:pt x="3223747" y="5491507"/>
+                  <a:pt x="3005024" y="5381245"/>
+                  <a:pt x="2809301" y="5436961"/>
+                </a:cubicBezTo>
+                <a:cubicBezTo>
+                  <a:pt x="2613578" y="5492677"/>
+                  <a:pt x="2512642" y="5383655"/>
+                  <a:pt x="2247441" y="5436961"/>
+                </a:cubicBezTo>
+                <a:cubicBezTo>
+                  <a:pt x="1982240" y="5490267"/>
+                  <a:pt x="2002294" y="5420931"/>
+                  <a:pt x="1854139" y="5436961"/>
+                </a:cubicBezTo>
+                <a:cubicBezTo>
+                  <a:pt x="1705984" y="5452991"/>
+                  <a:pt x="1526793" y="5380324"/>
+                  <a:pt x="1348465" y="5436961"/>
+                </a:cubicBezTo>
+                <a:cubicBezTo>
+                  <a:pt x="1170137" y="5493598"/>
+                  <a:pt x="866488" y="5387296"/>
+                  <a:pt x="730418" y="5436961"/>
+                </a:cubicBezTo>
+                <a:cubicBezTo>
+                  <a:pt x="594348" y="5486626"/>
+                  <a:pt x="192228" y="5411646"/>
+                  <a:pt x="0" y="5436961"/>
+                </a:cubicBezTo>
+                <a:cubicBezTo>
+                  <a:pt x="-69311" y="5172164"/>
+                  <a:pt x="27580" y="5009097"/>
+                  <a:pt x="0" y="4784526"/>
+                </a:cubicBezTo>
+                <a:cubicBezTo>
+                  <a:pt x="-27580" y="4559955"/>
+                  <a:pt x="23812" y="4490193"/>
+                  <a:pt x="0" y="4403938"/>
+                </a:cubicBezTo>
+                <a:cubicBezTo>
+                  <a:pt x="-23812" y="4317683"/>
+                  <a:pt x="58160" y="4021532"/>
+                  <a:pt x="0" y="3751503"/>
+                </a:cubicBezTo>
+                <a:cubicBezTo>
+                  <a:pt x="-58160" y="3481474"/>
+                  <a:pt x="12506" y="3497663"/>
+                  <a:pt x="0" y="3370916"/>
+                </a:cubicBezTo>
+                <a:cubicBezTo>
+                  <a:pt x="-12506" y="3244169"/>
+                  <a:pt x="19902" y="3092298"/>
+                  <a:pt x="0" y="2827220"/>
+                </a:cubicBezTo>
+                <a:cubicBezTo>
+                  <a:pt x="-19902" y="2562142"/>
+                  <a:pt x="43873" y="2522975"/>
+                  <a:pt x="0" y="2392263"/>
+                </a:cubicBezTo>
+                <a:cubicBezTo>
+                  <a:pt x="-43873" y="2261551"/>
+                  <a:pt x="5692" y="2162010"/>
+                  <a:pt x="0" y="1957306"/>
+                </a:cubicBezTo>
+                <a:cubicBezTo>
+                  <a:pt x="-5692" y="1752602"/>
+                  <a:pt x="39418" y="1666738"/>
+                  <a:pt x="0" y="1522349"/>
+                </a:cubicBezTo>
+                <a:cubicBezTo>
+                  <a:pt x="-39418" y="1377960"/>
+                  <a:pt x="27267" y="1198294"/>
+                  <a:pt x="0" y="1087392"/>
+                </a:cubicBezTo>
+                <a:cubicBezTo>
+                  <a:pt x="-27267" y="976490"/>
+                  <a:pt x="56514" y="779897"/>
+                  <a:pt x="0" y="598066"/>
+                </a:cubicBezTo>
+                <a:cubicBezTo>
+                  <a:pt x="-56514" y="416235"/>
+                  <a:pt x="14399" y="244604"/>
+                  <a:pt x="0" y="0"/>
+                </a:cubicBezTo>
+                <a:close/>
+              </a:path>
+              <a:path w="5618603" h="5436961" stroke="0" extrusionOk="0">
+                <a:moveTo>
+                  <a:pt x="0" y="0"/>
+                </a:moveTo>
+                <a:cubicBezTo>
+                  <a:pt x="242663" y="-45220"/>
+                  <a:pt x="380815" y="9512"/>
+                  <a:pt x="505674" y="0"/>
+                </a:cubicBezTo>
+                <a:cubicBezTo>
+                  <a:pt x="630533" y="-9512"/>
+                  <a:pt x="807735" y="3767"/>
+                  <a:pt x="898976" y="0"/>
+                </a:cubicBezTo>
+                <a:cubicBezTo>
+                  <a:pt x="990217" y="-3767"/>
+                  <a:pt x="1367592" y="62419"/>
+                  <a:pt x="1573209" y="0"/>
+                </a:cubicBezTo>
+                <a:cubicBezTo>
+                  <a:pt x="1778826" y="-62419"/>
+                  <a:pt x="1941665" y="9978"/>
+                  <a:pt x="2078883" y="0"/>
+                </a:cubicBezTo>
+                <a:cubicBezTo>
+                  <a:pt x="2216101" y="-9978"/>
+                  <a:pt x="2443298" y="40240"/>
+                  <a:pt x="2584557" y="0"/>
+                </a:cubicBezTo>
+                <a:cubicBezTo>
+                  <a:pt x="2725816" y="-40240"/>
+                  <a:pt x="2991670" y="62474"/>
+                  <a:pt x="3258790" y="0"/>
+                </a:cubicBezTo>
+                <a:cubicBezTo>
+                  <a:pt x="3525910" y="-62474"/>
+                  <a:pt x="3549286" y="15763"/>
+                  <a:pt x="3708278" y="0"/>
+                </a:cubicBezTo>
+                <a:cubicBezTo>
+                  <a:pt x="3867270" y="-15763"/>
+                  <a:pt x="4205316" y="60625"/>
+                  <a:pt x="4382510" y="0"/>
+                </a:cubicBezTo>
+                <a:cubicBezTo>
+                  <a:pt x="4559704" y="-60625"/>
+                  <a:pt x="4897509" y="79720"/>
+                  <a:pt x="5056743" y="0"/>
+                </a:cubicBezTo>
+                <a:cubicBezTo>
+                  <a:pt x="5215977" y="-79720"/>
+                  <a:pt x="5365084" y="43873"/>
+                  <a:pt x="5618603" y="0"/>
+                </a:cubicBezTo>
+                <a:cubicBezTo>
+                  <a:pt x="5629386" y="305279"/>
+                  <a:pt x="5564605" y="375239"/>
+                  <a:pt x="5618603" y="652435"/>
+                </a:cubicBezTo>
+                <a:cubicBezTo>
+                  <a:pt x="5672601" y="929632"/>
+                  <a:pt x="5601934" y="972590"/>
+                  <a:pt x="5618603" y="1250501"/>
+                </a:cubicBezTo>
+                <a:cubicBezTo>
+                  <a:pt x="5635272" y="1528412"/>
+                  <a:pt x="5606155" y="1549779"/>
+                  <a:pt x="5618603" y="1631088"/>
+                </a:cubicBezTo>
+                <a:cubicBezTo>
+                  <a:pt x="5631051" y="1712397"/>
+                  <a:pt x="5604587" y="1920494"/>
+                  <a:pt x="5618603" y="2174784"/>
+                </a:cubicBezTo>
+                <a:cubicBezTo>
+                  <a:pt x="5632619" y="2429074"/>
+                  <a:pt x="5603427" y="2537458"/>
+                  <a:pt x="5618603" y="2718481"/>
+                </a:cubicBezTo>
+                <a:cubicBezTo>
+                  <a:pt x="5633779" y="2899504"/>
+                  <a:pt x="5602162" y="3031780"/>
+                  <a:pt x="5618603" y="3262177"/>
+                </a:cubicBezTo>
+                <a:cubicBezTo>
+                  <a:pt x="5635044" y="3492574"/>
+                  <a:pt x="5595465" y="3576378"/>
+                  <a:pt x="5618603" y="3860242"/>
+                </a:cubicBezTo>
+                <a:cubicBezTo>
+                  <a:pt x="5641741" y="4144106"/>
+                  <a:pt x="5612465" y="4269694"/>
+                  <a:pt x="5618603" y="4458308"/>
+                </a:cubicBezTo>
+                <a:cubicBezTo>
+                  <a:pt x="5624741" y="4646922"/>
+                  <a:pt x="5564158" y="5069930"/>
+                  <a:pt x="5618603" y="5436961"/>
+                </a:cubicBezTo>
+                <a:cubicBezTo>
+                  <a:pt x="5471093" y="5460262"/>
+                  <a:pt x="5410548" y="5405936"/>
+                  <a:pt x="5225301" y="5436961"/>
+                </a:cubicBezTo>
+                <a:cubicBezTo>
+                  <a:pt x="5040054" y="5467986"/>
+                  <a:pt x="4855115" y="5382734"/>
+                  <a:pt x="4551068" y="5436961"/>
+                </a:cubicBezTo>
+                <a:cubicBezTo>
+                  <a:pt x="4247021" y="5491188"/>
+                  <a:pt x="4168189" y="5376528"/>
+                  <a:pt x="3989208" y="5436961"/>
+                </a:cubicBezTo>
+                <a:cubicBezTo>
+                  <a:pt x="3810227" y="5497394"/>
+                  <a:pt x="3643629" y="5411804"/>
+                  <a:pt x="3539720" y="5436961"/>
+                </a:cubicBezTo>
+                <a:cubicBezTo>
+                  <a:pt x="3435811" y="5462118"/>
+                  <a:pt x="3246225" y="5373085"/>
+                  <a:pt x="2977860" y="5436961"/>
+                </a:cubicBezTo>
+                <a:cubicBezTo>
+                  <a:pt x="2709495" y="5500837"/>
+                  <a:pt x="2684045" y="5407492"/>
+                  <a:pt x="2584557" y="5436961"/>
+                </a:cubicBezTo>
+                <a:cubicBezTo>
+                  <a:pt x="2485069" y="5466430"/>
+                  <a:pt x="2332483" y="5395866"/>
+                  <a:pt x="2191255" y="5436961"/>
+                </a:cubicBezTo>
+                <a:cubicBezTo>
+                  <a:pt x="2050027" y="5478056"/>
+                  <a:pt x="1875859" y="5380720"/>
+                  <a:pt x="1629395" y="5436961"/>
+                </a:cubicBezTo>
+                <a:cubicBezTo>
+                  <a:pt x="1382931" y="5493202"/>
+                  <a:pt x="1317219" y="5405642"/>
+                  <a:pt x="1179907" y="5436961"/>
+                </a:cubicBezTo>
+                <a:cubicBezTo>
+                  <a:pt x="1042595" y="5468280"/>
+                  <a:pt x="710490" y="5433899"/>
+                  <a:pt x="561860" y="5436961"/>
+                </a:cubicBezTo>
+                <a:cubicBezTo>
+                  <a:pt x="413230" y="5440023"/>
+                  <a:pt x="136875" y="5375851"/>
+                  <a:pt x="0" y="5436961"/>
+                </a:cubicBezTo>
+                <a:cubicBezTo>
+                  <a:pt x="-49789" y="5169053"/>
+                  <a:pt x="62997" y="5039268"/>
+                  <a:pt x="0" y="4838895"/>
+                </a:cubicBezTo>
+                <a:cubicBezTo>
+                  <a:pt x="-62997" y="4638522"/>
+                  <a:pt x="19450" y="4477343"/>
+                  <a:pt x="0" y="4240830"/>
+                </a:cubicBezTo>
+                <a:cubicBezTo>
+                  <a:pt x="-19450" y="4004318"/>
+                  <a:pt x="46879" y="4022754"/>
+                  <a:pt x="0" y="3805873"/>
+                </a:cubicBezTo>
+                <a:cubicBezTo>
+                  <a:pt x="-46879" y="3588992"/>
+                  <a:pt x="20187" y="3424494"/>
+                  <a:pt x="0" y="3207807"/>
+                </a:cubicBezTo>
+                <a:cubicBezTo>
+                  <a:pt x="-20187" y="2991120"/>
+                  <a:pt x="39294" y="2832984"/>
+                  <a:pt x="0" y="2555372"/>
+                </a:cubicBezTo>
+                <a:cubicBezTo>
+                  <a:pt x="-39294" y="2277761"/>
+                  <a:pt x="45273" y="2253256"/>
+                  <a:pt x="0" y="2066045"/>
+                </a:cubicBezTo>
+                <a:cubicBezTo>
+                  <a:pt x="-45273" y="1878834"/>
+                  <a:pt x="67063" y="1679015"/>
+                  <a:pt x="0" y="1413610"/>
+                </a:cubicBezTo>
+                <a:cubicBezTo>
+                  <a:pt x="-67063" y="1148205"/>
+                  <a:pt x="45958" y="1069736"/>
+                  <a:pt x="0" y="978653"/>
+                </a:cubicBezTo>
+                <a:cubicBezTo>
+                  <a:pt x="-45958" y="887570"/>
+                  <a:pt x="2898" y="783105"/>
+                  <a:pt x="0" y="598066"/>
+                </a:cubicBezTo>
+                <a:cubicBezTo>
+                  <a:pt x="-2898" y="413027"/>
+                  <a:pt x="52903" y="247503"/>
+                  <a:pt x="0" y="0"/>
+                </a:cubicBezTo>
+                <a:close/>
+              </a:path>
+            </a:pathLst>
+          </a:custGeom>
+          <a:ln w="34925">
+            <a:solidFill>
+              <a:schemeClr val="accent3"/>
+            </a:solidFill>
+            <a:extLst>
+              <a:ext uri="{C807C97D-BFC1-408E-A445-0C87EB9F89A2}">
+                <ask:lineSketchStyleProps xmlns:ask="http://schemas.microsoft.com/office/drawing/2018/sketchyshapes" sd="1219033472">
+                  <a:prstGeom prst="rect">
+                    <a:avLst/>
+                  </a:prstGeom>
+                  <ask:type>
+                    <ask:lineSketchScribble/>
+                  </ask:type>
+                </ask:lineSketchStyleProps>
+              </a:ext>
+            </a:extLst>
           </a:ln>
-          <a:effectLst/>
-          <a:extLst>
-            <a:ext uri="{909E8E84-426E-40DD-AFC4-6F175D3DCCD1}">
-              <a14:hiddenFill xmlns:a14="http://schemas.microsoft.com/office/drawing/2010/main">
-                <a:solidFill>
-                  <a:schemeClr val="accent1"/>
-                </a:solidFill>
-              </a14:hiddenFill>
-            </a:ext>
-            <a:ext uri="{91240B29-F687-4F45-9708-019B960494DF}">
-              <a14:hiddenLine xmlns:a14="http://schemas.microsoft.com/office/drawing/2010/main" w="9525">
-                <a:solidFill>
-                  <a:schemeClr val="tx1"/>
-                </a:solidFill>
-                <a:miter lim="800000"/>
-                <a:headEnd/>
-                <a:tailEnd/>
-              </a14:hiddenLine>
-            </a:ext>
-            <a:ext uri="{AF507438-7753-43E0-B8FC-AC1667EBCBE1}">
-              <a14:hiddenEffects xmlns:a14="http://schemas.microsoft.com/office/drawing/2010/main">
-                <a:effectLst>
-                  <a:outerShdw dist="35921" dir="2700000" algn="ctr" rotWithShape="0">
-                    <a:schemeClr val="bg2"/>
-                  </a:outerShdw>
-                </a:effectLst>
-              </a14:hiddenEffects>
-            </a:ext>
-          </a:extLst>
         </p:spPr>
       </p:pic>
     </p:spTree>
@@ -24188,18 +25273,11 @@
               <a:buChar char="•"/>
             </a:pPr>
             <a:r>
-              <a:rPr lang="en-US" sz="2000" dirty="0" err="1">
-                <a:latin typeface="Times New Roman" panose="02020603050405020304" pitchFamily="18" charset="0"/>
-                <a:cs typeface="Times New Roman" panose="02020603050405020304" pitchFamily="18" charset="0"/>
-              </a:rPr>
-              <a:t>Stopword</a:t>
-            </a:r>
-            <a:r>
               <a:rPr lang="en-US" sz="2000" dirty="0">
                 <a:latin typeface="Times New Roman" panose="02020603050405020304" pitchFamily="18" charset="0"/>
                 <a:cs typeface="Times New Roman" panose="02020603050405020304" pitchFamily="18" charset="0"/>
               </a:rPr>
-              <a:t> removal </a:t>
+              <a:t>Stopword removal </a:t>
             </a:r>
           </a:p>
           <a:p>
@@ -24454,21 +25532,7 @@
                 <a:latin typeface="Times New Roman" panose="02020603050405020304" pitchFamily="18" charset="0"/>
                 <a:cs typeface="Times New Roman" panose="02020603050405020304" pitchFamily="18" charset="0"/>
               </a:rPr>
-              <a:t>Implemented using Spark </a:t>
-            </a:r>
-            <a:r>
-              <a:rPr lang="en-US" sz="2000" dirty="0" err="1">
-                <a:latin typeface="Times New Roman" panose="02020603050405020304" pitchFamily="18" charset="0"/>
-                <a:cs typeface="Times New Roman" panose="02020603050405020304" pitchFamily="18" charset="0"/>
-              </a:rPr>
-              <a:t>DataFrames</a:t>
-            </a:r>
-            <a:r>
-              <a:rPr lang="en-US" sz="2000" dirty="0">
-                <a:latin typeface="Times New Roman" panose="02020603050405020304" pitchFamily="18" charset="0"/>
-                <a:cs typeface="Times New Roman" panose="02020603050405020304" pitchFamily="18" charset="0"/>
-              </a:rPr>
-              <a:t> and UDFs.</a:t>
+              <a:t>Implemented using Spark DataFrames and UDFs.</a:t>
             </a:r>
           </a:p>
           <a:p>
@@ -25434,6 +26498,12 @@
           <a:prstGeom prst="rect">
             <a:avLst/>
           </a:prstGeom>
+          <a:ln>
+            <a:noFill/>
+          </a:ln>
+          <a:effectLst>
+            <a:softEdge rad="112500"/>
+          </a:effectLst>
         </p:spPr>
       </p:pic>
     </p:spTree>
@@ -26861,14 +27931,7 @@
                 <a:latin typeface="Times New Roman" panose="02020603050405020304" pitchFamily="18" charset="0"/>
                 <a:cs typeface="Times New Roman" panose="02020603050405020304" pitchFamily="18" charset="0"/>
               </a:rPr>
-              <a:t>Spark </a:t>
-            </a:r>
-            <a:r>
-              <a:rPr lang="en-US" sz="2000" b="1" dirty="0" err="1">
-                <a:latin typeface="Times New Roman" panose="02020603050405020304" pitchFamily="18" charset="0"/>
-                <a:cs typeface="Times New Roman" panose="02020603050405020304" pitchFamily="18" charset="0"/>
-              </a:rPr>
-              <a:t>MLlib</a:t>
+              <a:t>Spark MLlib</a:t>
             </a:r>
             <a:endParaRPr lang="en-US" sz="2000" dirty="0">
               <a:latin typeface="Times New Roman" panose="02020603050405020304" pitchFamily="18" charset="0"/>
@@ -26888,21 +27951,7 @@
                 <a:latin typeface="Times New Roman" panose="02020603050405020304" pitchFamily="18" charset="0"/>
                 <a:cs typeface="Times New Roman" panose="02020603050405020304" pitchFamily="18" charset="0"/>
               </a:rPr>
-              <a:t>Models implemented using Spark </a:t>
-            </a:r>
-            <a:r>
-              <a:rPr lang="en-US" sz="2000" dirty="0" err="1">
-                <a:latin typeface="Times New Roman" panose="02020603050405020304" pitchFamily="18" charset="0"/>
-                <a:cs typeface="Times New Roman" panose="02020603050405020304" pitchFamily="18" charset="0"/>
-              </a:rPr>
-              <a:t>MLlib</a:t>
-            </a:r>
-            <a:r>
-              <a:rPr lang="en-US" sz="2000" dirty="0">
-                <a:latin typeface="Times New Roman" panose="02020603050405020304" pitchFamily="18" charset="0"/>
-                <a:cs typeface="Times New Roman" panose="02020603050405020304" pitchFamily="18" charset="0"/>
-              </a:rPr>
-              <a:t> distributed framework.</a:t>
+              <a:t>Models implemented using Spark MLlib distributed framework.</a:t>
             </a:r>
             <a:endParaRPr kumimoji="0" lang="en-US" altLang="en-US" sz="2000" b="0" i="0" u="none" strike="noStrike" cap="none" normalizeH="0" baseline="0" dirty="0">
               <a:ln>
@@ -27135,14 +28184,14 @@
           <p:nvPr>
             <p:extLst>
               <p:ext uri="{D42A27DB-BD31-4B8C-83A1-F6EECF244321}">
-                <p14:modId xmlns:p14="http://schemas.microsoft.com/office/powerpoint/2010/main" val="1338048817"/>
+                <p14:modId xmlns:p14="http://schemas.microsoft.com/office/powerpoint/2010/main" val="472367823"/>
               </p:ext>
             </p:extLst>
           </p:nvPr>
         </p:nvGraphicFramePr>
         <p:xfrm>
-          <a:off x="682458" y="2778369"/>
-          <a:ext cx="6370072" cy="2795954"/>
+          <a:off x="682459" y="2816763"/>
+          <a:ext cx="6601597" cy="2963326"/>
         </p:xfrm>
         <a:graphic>
           <a:graphicData uri="http://schemas.openxmlformats.org/drawingml/2006/table">
@@ -27151,28 +28200,28 @@
                 <a:tableStyleId>{C4B1156A-380E-4F78-BDF5-A606A8083BF9}</a:tableStyleId>
               </a:tblPr>
               <a:tblGrid>
-                <a:gridCol w="2012557">
+                <a:gridCol w="2085706">
                   <a:extLst>
                     <a:ext uri="{9D8B030D-6E8A-4147-A177-3AD203B41FA5}">
                       <a16:colId xmlns:a16="http://schemas.microsoft.com/office/drawing/2014/main" val="3590475269"/>
                     </a:ext>
                   </a:extLst>
                 </a:gridCol>
-                <a:gridCol w="1452505">
+                <a:gridCol w="1505297">
                   <a:extLst>
                     <a:ext uri="{9D8B030D-6E8A-4147-A177-3AD203B41FA5}">
                       <a16:colId xmlns:a16="http://schemas.microsoft.com/office/drawing/2014/main" val="3511791885"/>
                     </a:ext>
                   </a:extLst>
                 </a:gridCol>
-                <a:gridCol w="1452505">
+                <a:gridCol w="1505297">
                   <a:extLst>
                     <a:ext uri="{9D8B030D-6E8A-4147-A177-3AD203B41FA5}">
                       <a16:colId xmlns:a16="http://schemas.microsoft.com/office/drawing/2014/main" val="204424172"/>
                     </a:ext>
                   </a:extLst>
                 </a:gridCol>
-                <a:gridCol w="1452505">
+                <a:gridCol w="1505297">
                   <a:extLst>
                     <a:ext uri="{9D8B030D-6E8A-4147-A177-3AD203B41FA5}">
                       <a16:colId xmlns:a16="http://schemas.microsoft.com/office/drawing/2014/main" val="2789293755"/>
@@ -27180,13 +28229,13 @@
                   </a:extLst>
                 </a:gridCol>
               </a:tblGrid>
-              <a:tr h="595146">
+              <a:tr h="630773">
                 <a:tc>
                   <a:txBody>
                     <a:bodyPr/>
                     <a:lstStyle/>
                     <a:p>
-                      <a:pPr marL="0" marR="0">
+                      <a:pPr marL="0" marR="0" algn="ctr">
                         <a:lnSpc>
                           <a:spcPct val="107000"/>
                         </a:lnSpc>
@@ -27196,7 +28245,7 @@
                         <a:buNone/>
                       </a:pPr>
                       <a:r>
-                        <a:rPr lang="en-US" sz="1200" b="1" kern="100">
+                        <a:rPr lang="en-US" sz="1400" b="1" kern="100">
                           <a:effectLst/>
                           <a:latin typeface="Times New Roman" panose="02020603050405020304" pitchFamily="18" charset="0"/>
                           <a:ea typeface="Aptos" panose="020B0004020202020204" pitchFamily="34" charset="0"/>
@@ -27204,7 +28253,7 @@
                         </a:rPr>
                         <a:t>Model</a:t>
                       </a:r>
-                      <a:endParaRPr lang="en-US" sz="1200" b="1" kern="100">
+                      <a:endParaRPr lang="en-US" sz="1400" b="1" kern="100">
                         <a:effectLst/>
                         <a:latin typeface="Aptos" panose="020B0004020202020204" pitchFamily="34" charset="0"/>
                         <a:ea typeface="Aptos" panose="020B0004020202020204" pitchFamily="34" charset="0"/>
@@ -27219,7 +28268,7 @@
                     <a:bodyPr/>
                     <a:lstStyle/>
                     <a:p>
-                      <a:pPr marL="0" marR="0">
+                      <a:pPr marL="0" marR="0" algn="ctr">
                         <a:lnSpc>
                           <a:spcPct val="107000"/>
                         </a:lnSpc>
@@ -27229,7 +28278,7 @@
                         <a:buNone/>
                       </a:pPr>
                       <a:r>
-                        <a:rPr lang="en-US" sz="1200" b="1" kern="100">
+                        <a:rPr lang="en-US" sz="1400" b="1" kern="100">
                           <a:effectLst/>
                           <a:latin typeface="Times New Roman" panose="02020603050405020304" pitchFamily="18" charset="0"/>
                           <a:ea typeface="Aptos" panose="020B0004020202020204" pitchFamily="34" charset="0"/>
@@ -27237,7 +28286,7 @@
                         </a:rPr>
                         <a:t>Accuracy</a:t>
                       </a:r>
-                      <a:endParaRPr lang="en-US" sz="1200" b="1" kern="100">
+                      <a:endParaRPr lang="en-US" sz="1400" b="1" kern="100">
                         <a:effectLst/>
                         <a:latin typeface="Aptos" panose="020B0004020202020204" pitchFamily="34" charset="0"/>
                         <a:ea typeface="Aptos" panose="020B0004020202020204" pitchFamily="34" charset="0"/>
@@ -27252,7 +28301,7 @@
                     <a:bodyPr/>
                     <a:lstStyle/>
                     <a:p>
-                      <a:pPr marL="0" marR="0">
+                      <a:pPr marL="0" marR="0" algn="ctr">
                         <a:lnSpc>
                           <a:spcPct val="107000"/>
                         </a:lnSpc>
@@ -27262,7 +28311,7 @@
                         <a:buNone/>
                       </a:pPr>
                       <a:r>
-                        <a:rPr lang="en-US" sz="1200" b="1" kern="100">
+                        <a:rPr lang="en-US" sz="1400" b="1" kern="100">
                           <a:effectLst/>
                           <a:latin typeface="Times New Roman" panose="02020603050405020304" pitchFamily="18" charset="0"/>
                           <a:ea typeface="Aptos" panose="020B0004020202020204" pitchFamily="34" charset="0"/>
@@ -27270,7 +28319,7 @@
                         </a:rPr>
                         <a:t>F1-score</a:t>
                       </a:r>
-                      <a:endParaRPr lang="en-US" sz="1200" b="1" kern="100">
+                      <a:endParaRPr lang="en-US" sz="1400" b="1" kern="100">
                         <a:effectLst/>
                         <a:latin typeface="Aptos" panose="020B0004020202020204" pitchFamily="34" charset="0"/>
                         <a:ea typeface="Aptos" panose="020B0004020202020204" pitchFamily="34" charset="0"/>
@@ -27285,7 +28334,7 @@
                     <a:bodyPr/>
                     <a:lstStyle/>
                     <a:p>
-                      <a:pPr marL="0" marR="0">
+                      <a:pPr marL="0" marR="0" algn="ctr">
                         <a:lnSpc>
                           <a:spcPct val="107000"/>
                         </a:lnSpc>
@@ -27295,7 +28344,7 @@
                         <a:buNone/>
                       </a:pPr>
                       <a:r>
-                        <a:rPr lang="en-US" sz="1200" b="1" kern="100" dirty="0">
+                        <a:rPr lang="en-US" sz="1400" b="1" kern="100" dirty="0">
                           <a:effectLst/>
                           <a:latin typeface="Times New Roman" panose="02020603050405020304" pitchFamily="18" charset="0"/>
                           <a:ea typeface="Aptos" panose="020B0004020202020204" pitchFamily="34" charset="0"/>
@@ -27303,7 +28352,7 @@
                         </a:rPr>
                         <a:t>ROC-AUC</a:t>
                       </a:r>
-                      <a:endParaRPr lang="en-US" sz="1200" b="1" kern="100" dirty="0">
+                      <a:endParaRPr lang="en-US" sz="1400" b="1" kern="100" dirty="0">
                         <a:effectLst/>
                         <a:latin typeface="Aptos" panose="020B0004020202020204" pitchFamily="34" charset="0"/>
                         <a:ea typeface="Aptos" panose="020B0004020202020204" pitchFamily="34" charset="0"/>
@@ -27319,13 +28368,13 @@
                   </a:ext>
                 </a:extLst>
               </a:tr>
-              <a:tr h="595146">
+              <a:tr h="630773">
                 <a:tc>
                   <a:txBody>
                     <a:bodyPr/>
                     <a:lstStyle/>
                     <a:p>
-                      <a:pPr marL="0" marR="0">
+                      <a:pPr marL="0" marR="0" algn="ctr">
                         <a:lnSpc>
                           <a:spcPct val="107000"/>
                         </a:lnSpc>
@@ -27335,7 +28384,7 @@
                         <a:buNone/>
                       </a:pPr>
                       <a:r>
-                        <a:rPr lang="en-US" sz="1200" b="1" kern="100">
+                        <a:rPr lang="en-US" sz="1400" b="1" kern="100">
                           <a:effectLst/>
                           <a:latin typeface="Times New Roman" panose="02020603050405020304" pitchFamily="18" charset="0"/>
                           <a:ea typeface="Aptos" panose="020B0004020202020204" pitchFamily="34" charset="0"/>
@@ -27343,7 +28392,7 @@
                         </a:rPr>
                         <a:t>Logistic Regression</a:t>
                       </a:r>
-                      <a:endParaRPr lang="en-US" sz="1200" b="1" kern="100">
+                      <a:endParaRPr lang="en-US" sz="1400" b="1" kern="100">
                         <a:effectLst/>
                         <a:latin typeface="Aptos" panose="020B0004020202020204" pitchFamily="34" charset="0"/>
                         <a:ea typeface="Aptos" panose="020B0004020202020204" pitchFamily="34" charset="0"/>
@@ -27358,7 +28407,7 @@
                     <a:bodyPr/>
                     <a:lstStyle/>
                     <a:p>
-                      <a:pPr marL="0" marR="0">
+                      <a:pPr marL="0" marR="0" algn="ctr">
                         <a:lnSpc>
                           <a:spcPct val="107000"/>
                         </a:lnSpc>
@@ -27368,7 +28417,7 @@
                         <a:buNone/>
                       </a:pPr>
                       <a:r>
-                        <a:rPr lang="en-US" sz="1200" b="0" kern="100">
+                        <a:rPr lang="en-US" sz="1400" b="0" kern="100">
                           <a:effectLst/>
                           <a:latin typeface="Times New Roman" panose="02020603050405020304" pitchFamily="18" charset="0"/>
                           <a:ea typeface="Aptos" panose="020B0004020202020204" pitchFamily="34" charset="0"/>
@@ -27376,7 +28425,7 @@
                         </a:rPr>
                         <a:t>0.965</a:t>
                       </a:r>
-                      <a:endParaRPr lang="en-US" sz="1200" b="0" kern="100">
+                      <a:endParaRPr lang="en-US" sz="1400" b="0" kern="100">
                         <a:effectLst/>
                         <a:latin typeface="Aptos" panose="020B0004020202020204" pitchFamily="34" charset="0"/>
                         <a:ea typeface="Aptos" panose="020B0004020202020204" pitchFamily="34" charset="0"/>
@@ -27391,7 +28440,7 @@
                     <a:bodyPr/>
                     <a:lstStyle/>
                     <a:p>
-                      <a:pPr marL="0" marR="0">
+                      <a:pPr marL="0" marR="0" algn="ctr">
                         <a:lnSpc>
                           <a:spcPct val="107000"/>
                         </a:lnSpc>
@@ -27401,7 +28450,7 @@
                         <a:buNone/>
                       </a:pPr>
                       <a:r>
-                        <a:rPr lang="en-US" sz="1200" b="0" kern="100">
+                        <a:rPr lang="en-US" sz="1400" b="0" kern="100">
                           <a:effectLst/>
                           <a:latin typeface="Times New Roman" panose="02020603050405020304" pitchFamily="18" charset="0"/>
                           <a:ea typeface="Aptos" panose="020B0004020202020204" pitchFamily="34" charset="0"/>
@@ -27409,7 +28458,7 @@
                         </a:rPr>
                         <a:t>0.966</a:t>
                       </a:r>
-                      <a:endParaRPr lang="en-US" sz="1200" b="0" kern="100">
+                      <a:endParaRPr lang="en-US" sz="1400" b="0" kern="100">
                         <a:effectLst/>
                         <a:latin typeface="Aptos" panose="020B0004020202020204" pitchFamily="34" charset="0"/>
                         <a:ea typeface="Aptos" panose="020B0004020202020204" pitchFamily="34" charset="0"/>
@@ -27424,7 +28473,7 @@
                     <a:bodyPr/>
                     <a:lstStyle/>
                     <a:p>
-                      <a:pPr marL="0" marR="0">
+                      <a:pPr marL="0" marR="0" algn="ctr">
                         <a:lnSpc>
                           <a:spcPct val="107000"/>
                         </a:lnSpc>
@@ -27434,7 +28483,7 @@
                         <a:buNone/>
                       </a:pPr>
                       <a:r>
-                        <a:rPr lang="en-US" sz="1200" b="0" kern="100">
+                        <a:rPr lang="en-US" sz="1400" b="0" kern="100">
                           <a:effectLst/>
                           <a:latin typeface="Times New Roman" panose="02020603050405020304" pitchFamily="18" charset="0"/>
                           <a:ea typeface="Aptos" panose="020B0004020202020204" pitchFamily="34" charset="0"/>
@@ -27442,7 +28491,7 @@
                         </a:rPr>
                         <a:t>0.982</a:t>
                       </a:r>
-                      <a:endParaRPr lang="en-US" sz="1200" b="0" kern="100">
+                      <a:endParaRPr lang="en-US" sz="1400" b="0" kern="100">
                         <a:effectLst/>
                         <a:latin typeface="Aptos" panose="020B0004020202020204" pitchFamily="34" charset="0"/>
                         <a:ea typeface="Aptos" panose="020B0004020202020204" pitchFamily="34" charset="0"/>
@@ -27458,13 +28507,13 @@
                   </a:ext>
                 </a:extLst>
               </a:tr>
-              <a:tr h="595146">
+              <a:tr h="630773">
                 <a:tc>
                   <a:txBody>
                     <a:bodyPr/>
                     <a:lstStyle/>
                     <a:p>
-                      <a:pPr marL="0" marR="0">
+                      <a:pPr marL="0" marR="0" algn="ctr">
                         <a:lnSpc>
                           <a:spcPct val="107000"/>
                         </a:lnSpc>
@@ -27474,7 +28523,7 @@
                         <a:buNone/>
                       </a:pPr>
                       <a:r>
-                        <a:rPr lang="en-US" sz="1200" b="1" kern="100">
+                        <a:rPr lang="en-US" sz="1400" b="1" kern="100" dirty="0">
                           <a:effectLst/>
                           <a:latin typeface="Times New Roman" panose="02020603050405020304" pitchFamily="18" charset="0"/>
                           <a:ea typeface="Aptos" panose="020B0004020202020204" pitchFamily="34" charset="0"/>
@@ -27482,7 +28531,7 @@
                         </a:rPr>
                         <a:t>Random Forest</a:t>
                       </a:r>
-                      <a:endParaRPr lang="en-US" sz="1200" b="1" kern="100">
+                      <a:endParaRPr lang="en-US" sz="1400" b="1" kern="100" dirty="0">
                         <a:effectLst/>
                         <a:latin typeface="Aptos" panose="020B0004020202020204" pitchFamily="34" charset="0"/>
                         <a:ea typeface="Aptos" panose="020B0004020202020204" pitchFamily="34" charset="0"/>
@@ -27497,7 +28546,7 @@
                     <a:bodyPr/>
                     <a:lstStyle/>
                     <a:p>
-                      <a:pPr marL="0" marR="0">
+                      <a:pPr marL="0" marR="0" algn="ctr">
                         <a:lnSpc>
                           <a:spcPct val="107000"/>
                         </a:lnSpc>
@@ -27507,7 +28556,7 @@
                         <a:buNone/>
                       </a:pPr>
                       <a:r>
-                        <a:rPr lang="en-US" sz="1200" b="0" kern="100">
+                        <a:rPr lang="en-US" sz="1400" b="0" kern="100">
                           <a:effectLst/>
                           <a:latin typeface="Times New Roman" panose="02020603050405020304" pitchFamily="18" charset="0"/>
                           <a:ea typeface="Aptos" panose="020B0004020202020204" pitchFamily="34" charset="0"/>
@@ -27515,7 +28564,7 @@
                         </a:rPr>
                         <a:t>0.801</a:t>
                       </a:r>
-                      <a:endParaRPr lang="en-US" sz="1200" b="0" kern="100">
+                      <a:endParaRPr lang="en-US" sz="1400" b="0" kern="100">
                         <a:effectLst/>
                         <a:latin typeface="Aptos" panose="020B0004020202020204" pitchFamily="34" charset="0"/>
                         <a:ea typeface="Aptos" panose="020B0004020202020204" pitchFamily="34" charset="0"/>
@@ -27530,7 +28579,7 @@
                     <a:bodyPr/>
                     <a:lstStyle/>
                     <a:p>
-                      <a:pPr marL="0" marR="0">
+                      <a:pPr marL="0" marR="0" algn="ctr">
                         <a:lnSpc>
                           <a:spcPct val="107000"/>
                         </a:lnSpc>
@@ -27540,7 +28589,7 @@
                         <a:buNone/>
                       </a:pPr>
                       <a:r>
-                        <a:rPr lang="en-US" sz="1200" b="0" kern="100">
+                        <a:rPr lang="en-US" sz="1400" b="0" kern="100">
                           <a:effectLst/>
                           <a:latin typeface="Times New Roman" panose="02020603050405020304" pitchFamily="18" charset="0"/>
                           <a:ea typeface="Aptos" panose="020B0004020202020204" pitchFamily="34" charset="0"/>
@@ -27548,7 +28597,7 @@
                         </a:rPr>
                         <a:t>0.714</a:t>
                       </a:r>
-                      <a:endParaRPr lang="en-US" sz="1200" b="0" kern="100">
+                      <a:endParaRPr lang="en-US" sz="1400" b="0" kern="100">
                         <a:effectLst/>
                         <a:latin typeface="Aptos" panose="020B0004020202020204" pitchFamily="34" charset="0"/>
                         <a:ea typeface="Aptos" panose="020B0004020202020204" pitchFamily="34" charset="0"/>
@@ -27563,7 +28612,7 @@
                     <a:bodyPr/>
                     <a:lstStyle/>
                     <a:p>
-                      <a:pPr marL="0" marR="0">
+                      <a:pPr marL="0" marR="0" algn="ctr">
                         <a:lnSpc>
                           <a:spcPct val="107000"/>
                         </a:lnSpc>
@@ -27573,7 +28622,7 @@
                         <a:buNone/>
                       </a:pPr>
                       <a:r>
-                        <a:rPr lang="en-US" sz="1200" b="0" kern="100">
+                        <a:rPr lang="en-US" sz="1400" b="0" kern="100">
                           <a:effectLst/>
                           <a:latin typeface="Times New Roman" panose="02020603050405020304" pitchFamily="18" charset="0"/>
                           <a:ea typeface="Aptos" panose="020B0004020202020204" pitchFamily="34" charset="0"/>
@@ -27581,7 +28630,7 @@
                         </a:rPr>
                         <a:t>0.946</a:t>
                       </a:r>
-                      <a:endParaRPr lang="en-US" sz="1200" b="0" kern="100">
+                      <a:endParaRPr lang="en-US" sz="1400" b="0" kern="100">
                         <a:effectLst/>
                         <a:latin typeface="Aptos" panose="020B0004020202020204" pitchFamily="34" charset="0"/>
                         <a:ea typeface="Aptos" panose="020B0004020202020204" pitchFamily="34" charset="0"/>
@@ -27597,13 +28646,13 @@
                   </a:ext>
                 </a:extLst>
               </a:tr>
-              <a:tr h="1010516">
+              <a:tr h="1071007">
                 <a:tc>
                   <a:txBody>
                     <a:bodyPr/>
                     <a:lstStyle/>
                     <a:p>
-                      <a:pPr marL="0" marR="0">
+                      <a:pPr marL="0" marR="0" algn="ctr">
                         <a:lnSpc>
                           <a:spcPct val="107000"/>
                         </a:lnSpc>
@@ -27613,7 +28662,7 @@
                         <a:buNone/>
                       </a:pPr>
                       <a:r>
-                        <a:rPr lang="en-US" sz="1200" b="1" kern="100" dirty="0">
+                        <a:rPr lang="en-US" sz="1400" b="1" kern="100" dirty="0">
                           <a:effectLst/>
                           <a:latin typeface="Times New Roman" panose="02020603050405020304" pitchFamily="18" charset="0"/>
                           <a:ea typeface="Aptos" panose="020B0004020202020204" pitchFamily="34" charset="0"/>
@@ -27621,7 +28670,7 @@
                         </a:rPr>
                         <a:t>SVM</a:t>
                       </a:r>
-                      <a:endParaRPr lang="en-US" sz="1200" b="1" kern="100" dirty="0">
+                      <a:endParaRPr lang="en-US" sz="1400" b="1" kern="100" dirty="0">
                         <a:effectLst/>
                         <a:latin typeface="Aptos" panose="020B0004020202020204" pitchFamily="34" charset="0"/>
                         <a:ea typeface="Aptos" panose="020B0004020202020204" pitchFamily="34" charset="0"/>
@@ -27636,7 +28685,7 @@
                     <a:bodyPr/>
                     <a:lstStyle/>
                     <a:p>
-                      <a:pPr marL="0" marR="0">
+                      <a:pPr marL="0" marR="0" algn="ctr">
                         <a:lnSpc>
                           <a:spcPct val="107000"/>
                         </a:lnSpc>
@@ -27646,7 +28695,7 @@
                         <a:buNone/>
                       </a:pPr>
                       <a:r>
-                        <a:rPr lang="en-US" sz="1200" b="0" kern="100">
+                        <a:rPr lang="en-US" sz="1400" b="0" kern="100">
                           <a:effectLst/>
                           <a:latin typeface="Times New Roman" panose="02020603050405020304" pitchFamily="18" charset="0"/>
                           <a:ea typeface="Aptos" panose="020B0004020202020204" pitchFamily="34" charset="0"/>
@@ -27654,7 +28703,7 @@
                         </a:rPr>
                         <a:t>0.973</a:t>
                       </a:r>
-                      <a:endParaRPr lang="en-US" sz="1200" b="0" kern="100">
+                      <a:endParaRPr lang="en-US" sz="1400" b="0" kern="100">
                         <a:effectLst/>
                         <a:latin typeface="Aptos" panose="020B0004020202020204" pitchFamily="34" charset="0"/>
                         <a:ea typeface="Aptos" panose="020B0004020202020204" pitchFamily="34" charset="0"/>
@@ -27669,7 +28718,7 @@
                     <a:bodyPr/>
                     <a:lstStyle/>
                     <a:p>
-                      <a:pPr marL="0" marR="0">
+                      <a:pPr marL="0" marR="0" algn="ctr">
                         <a:lnSpc>
                           <a:spcPct val="107000"/>
                         </a:lnSpc>
@@ -27679,7 +28728,7 @@
                         <a:buNone/>
                       </a:pPr>
                       <a:r>
-                        <a:rPr lang="en-US" sz="1200" b="0" kern="100">
+                        <a:rPr lang="en-US" sz="1400" b="0" kern="100" dirty="0">
                           <a:effectLst/>
                           <a:latin typeface="Times New Roman" panose="02020603050405020304" pitchFamily="18" charset="0"/>
                           <a:ea typeface="Aptos" panose="020B0004020202020204" pitchFamily="34" charset="0"/>
@@ -27687,7 +28736,7 @@
                         </a:rPr>
                         <a:t>0.973</a:t>
                       </a:r>
-                      <a:endParaRPr lang="en-US" sz="1200" b="0" kern="100">
+                      <a:endParaRPr lang="en-US" sz="1400" b="0" kern="100" dirty="0">
                         <a:effectLst/>
                         <a:latin typeface="Aptos" panose="020B0004020202020204" pitchFamily="34" charset="0"/>
                         <a:ea typeface="Aptos" panose="020B0004020202020204" pitchFamily="34" charset="0"/>
@@ -27702,7 +28751,7 @@
                     <a:bodyPr/>
                     <a:lstStyle/>
                     <a:p>
-                      <a:pPr marL="0" marR="0">
+                      <a:pPr marL="0" marR="0" algn="ctr">
                         <a:lnSpc>
                           <a:spcPct val="107000"/>
                         </a:lnSpc>
@@ -27712,7 +28761,7 @@
                         <a:buNone/>
                       </a:pPr>
                       <a:r>
-                        <a:rPr lang="en-US" sz="1200" b="0" kern="100" dirty="0">
+                        <a:rPr lang="en-US" sz="1400" b="0" kern="100" dirty="0">
                           <a:effectLst/>
                           <a:latin typeface="Times New Roman" panose="02020603050405020304" pitchFamily="18" charset="0"/>
                           <a:ea typeface="Aptos" panose="020B0004020202020204" pitchFamily="34" charset="0"/>
@@ -27720,7 +28769,7 @@
                         </a:rPr>
                         <a:t>0.991</a:t>
                       </a:r>
-                      <a:endParaRPr lang="en-US" sz="1200" b="0" kern="100" dirty="0">
+                      <a:endParaRPr lang="en-US" sz="1400" b="0" kern="100" dirty="0">
                         <a:effectLst/>
                         <a:latin typeface="Aptos" panose="020B0004020202020204" pitchFamily="34" charset="0"/>
                         <a:ea typeface="Aptos" panose="020B0004020202020204" pitchFamily="34" charset="0"/>
@@ -28447,6 +29496,12 @@
           <a:prstGeom prst="rect">
             <a:avLst/>
           </a:prstGeom>
+          <a:ln>
+            <a:noFill/>
+          </a:ln>
+          <a:effectLst>
+            <a:softEdge rad="112500"/>
+          </a:effectLst>
         </p:spPr>
       </p:pic>
     </p:spTree>
@@ -28664,6 +29719,12 @@
           <a:prstGeom prst="rect">
             <a:avLst/>
           </a:prstGeom>
+          <a:ln>
+            <a:noFill/>
+          </a:ln>
+          <a:effectLst>
+            <a:softEdge rad="112500"/>
+          </a:effectLst>
         </p:spPr>
       </p:pic>
     </p:spTree>
@@ -28881,6 +29942,12 @@
           <a:prstGeom prst="rect">
             <a:avLst/>
           </a:prstGeom>
+          <a:ln>
+            <a:noFill/>
+          </a:ln>
+          <a:effectLst>
+            <a:softEdge rad="112500"/>
+          </a:effectLst>
         </p:spPr>
       </p:pic>
     </p:spTree>
@@ -29721,14 +30788,14 @@
           <p:nvPr>
             <p:extLst>
               <p:ext uri="{D42A27DB-BD31-4B8C-83A1-F6EECF244321}">
-                <p14:modId xmlns:p14="http://schemas.microsoft.com/office/powerpoint/2010/main" val="3181186138"/>
+                <p14:modId xmlns:p14="http://schemas.microsoft.com/office/powerpoint/2010/main" val="64365205"/>
               </p:ext>
             </p:extLst>
           </p:nvPr>
         </p:nvGraphicFramePr>
         <p:xfrm>
-          <a:off x="559366" y="3006968"/>
-          <a:ext cx="6370072" cy="3059724"/>
+          <a:off x="559366" y="2930486"/>
+          <a:ext cx="6656682" cy="3424592"/>
         </p:xfrm>
         <a:graphic>
           <a:graphicData uri="http://schemas.openxmlformats.org/drawingml/2006/table">
@@ -29737,14 +30804,14 @@
                 <a:tableStyleId>{C4B1156A-380E-4F78-BDF5-A606A8083BF9}</a:tableStyleId>
               </a:tblPr>
               <a:tblGrid>
-                <a:gridCol w="3185036">
+                <a:gridCol w="3328341">
                   <a:extLst>
                     <a:ext uri="{9D8B030D-6E8A-4147-A177-3AD203B41FA5}">
                       <a16:colId xmlns:a16="http://schemas.microsoft.com/office/drawing/2014/main" val="3286955579"/>
                     </a:ext>
                   </a:extLst>
                 </a:gridCol>
-                <a:gridCol w="3185036">
+                <a:gridCol w="3328341">
                   <a:extLst>
                     <a:ext uri="{9D8B030D-6E8A-4147-A177-3AD203B41FA5}">
                       <a16:colId xmlns:a16="http://schemas.microsoft.com/office/drawing/2014/main" val="3656418573"/>
@@ -29752,13 +30819,13 @@
                   </a:extLst>
                 </a:gridCol>
               </a:tblGrid>
-              <a:tr h="764931">
+              <a:tr h="856148">
                 <a:tc>
                   <a:txBody>
                     <a:bodyPr/>
                     <a:lstStyle/>
                     <a:p>
-                      <a:pPr marL="0" marR="0">
+                      <a:pPr marL="0" marR="0" algn="ctr">
                         <a:lnSpc>
                           <a:spcPct val="107000"/>
                         </a:lnSpc>
@@ -29768,7 +30835,7 @@
                         <a:buNone/>
                       </a:pPr>
                       <a:r>
-                        <a:rPr lang="en-US" sz="1400" b="1" kern="100">
+                        <a:rPr lang="en-US" sz="1400" b="1" kern="100" dirty="0">
                           <a:effectLst/>
                           <a:latin typeface="Times New Roman" panose="02020603050405020304" pitchFamily="18" charset="0"/>
                           <a:ea typeface="Aptos" panose="020B0004020202020204" pitchFamily="34" charset="0"/>
@@ -29776,7 +30843,7 @@
                         </a:rPr>
                         <a:t>Batch Processing</a:t>
                       </a:r>
-                      <a:endParaRPr lang="en-US" sz="1400" kern="100">
+                      <a:endParaRPr lang="en-US" sz="1400" kern="100" dirty="0">
                         <a:effectLst/>
                         <a:latin typeface="Aptos" panose="020B0004020202020204" pitchFamily="34" charset="0"/>
                         <a:ea typeface="Aptos" panose="020B0004020202020204" pitchFamily="34" charset="0"/>
@@ -29791,7 +30858,7 @@
                     <a:bodyPr/>
                     <a:lstStyle/>
                     <a:p>
-                      <a:pPr marL="0" marR="0">
+                      <a:pPr marL="0" marR="0" algn="ctr">
                         <a:lnSpc>
                           <a:spcPct val="107000"/>
                         </a:lnSpc>
@@ -29801,7 +30868,7 @@
                         <a:buNone/>
                       </a:pPr>
                       <a:r>
-                        <a:rPr lang="en-US" sz="1400" b="1" kern="100">
+                        <a:rPr lang="en-US" sz="1400" b="1" kern="100" dirty="0">
                           <a:effectLst/>
                           <a:latin typeface="Times New Roman" panose="02020603050405020304" pitchFamily="18" charset="0"/>
                           <a:ea typeface="Aptos" panose="020B0004020202020204" pitchFamily="34" charset="0"/>
@@ -29809,7 +30876,7 @@
                         </a:rPr>
                         <a:t>Stream Processing</a:t>
                       </a:r>
-                      <a:endParaRPr lang="en-US" sz="1400" kern="100">
+                      <a:endParaRPr lang="en-US" sz="1400" kern="100" dirty="0">
                         <a:effectLst/>
                         <a:latin typeface="Aptos" panose="020B0004020202020204" pitchFamily="34" charset="0"/>
                         <a:ea typeface="Aptos" panose="020B0004020202020204" pitchFamily="34" charset="0"/>
@@ -29825,13 +30892,13 @@
                   </a:ext>
                 </a:extLst>
               </a:tr>
-              <a:tr h="764931">
+              <a:tr h="856148">
                 <a:tc>
                   <a:txBody>
                     <a:bodyPr/>
                     <a:lstStyle/>
                     <a:p>
-                      <a:pPr marL="0" marR="0">
+                      <a:pPr marL="0" marR="0" algn="ctr">
                         <a:lnSpc>
                           <a:spcPct val="107000"/>
                         </a:lnSpc>
@@ -29864,7 +30931,7 @@
                     <a:bodyPr/>
                     <a:lstStyle/>
                     <a:p>
-                      <a:pPr marL="0" marR="0">
+                      <a:pPr marL="0" marR="0" algn="ctr">
                         <a:lnSpc>
                           <a:spcPct val="107000"/>
                         </a:lnSpc>
@@ -29874,7 +30941,7 @@
                         <a:buNone/>
                       </a:pPr>
                       <a:r>
-                        <a:rPr lang="en-US" sz="1400" kern="100">
+                        <a:rPr lang="en-US" sz="1400" kern="100" dirty="0">
                           <a:effectLst/>
                           <a:latin typeface="Times New Roman" panose="02020603050405020304" pitchFamily="18" charset="0"/>
                           <a:ea typeface="Aptos" panose="020B0004020202020204" pitchFamily="34" charset="0"/>
@@ -29882,7 +30949,7 @@
                         </a:rPr>
                         <a:t>Real-time analytics</a:t>
                       </a:r>
-                      <a:endParaRPr lang="en-US" sz="1400" kern="100">
+                      <a:endParaRPr lang="en-US" sz="1400" kern="100" dirty="0">
                         <a:effectLst/>
                         <a:latin typeface="Aptos" panose="020B0004020202020204" pitchFamily="34" charset="0"/>
                         <a:ea typeface="Aptos" panose="020B0004020202020204" pitchFamily="34" charset="0"/>
@@ -29898,13 +30965,13 @@
                   </a:ext>
                 </a:extLst>
               </a:tr>
-              <a:tr h="764931">
+              <a:tr h="856148">
                 <a:tc>
                   <a:txBody>
                     <a:bodyPr/>
                     <a:lstStyle/>
                     <a:p>
-                      <a:pPr marL="0" marR="0">
+                      <a:pPr marL="0" marR="0" algn="ctr">
                         <a:lnSpc>
                           <a:spcPct val="107000"/>
                         </a:lnSpc>
@@ -29914,7 +30981,7 @@
                         <a:buNone/>
                       </a:pPr>
                       <a:r>
-                        <a:rPr lang="en-US" sz="1400" kern="100">
+                        <a:rPr lang="en-US" sz="1400" kern="100" dirty="0">
                           <a:effectLst/>
                           <a:latin typeface="Times New Roman" panose="02020603050405020304" pitchFamily="18" charset="0"/>
                           <a:ea typeface="Aptos" panose="020B0004020202020204" pitchFamily="34" charset="0"/>
@@ -29922,7 +30989,7 @@
                         </a:rPr>
                         <a:t>Higher throughput</a:t>
                       </a:r>
-                      <a:endParaRPr lang="en-US" sz="1400" kern="100">
+                      <a:endParaRPr lang="en-US" sz="1400" kern="100" dirty="0">
                         <a:effectLst/>
                         <a:latin typeface="Aptos" panose="020B0004020202020204" pitchFamily="34" charset="0"/>
                         <a:ea typeface="Aptos" panose="020B0004020202020204" pitchFamily="34" charset="0"/>
@@ -29937,7 +31004,7 @@
                     <a:bodyPr/>
                     <a:lstStyle/>
                     <a:p>
-                      <a:pPr marL="0" marR="0">
+                      <a:pPr marL="0" marR="0" algn="ctr">
                         <a:lnSpc>
                           <a:spcPct val="107000"/>
                         </a:lnSpc>
@@ -29947,7 +31014,7 @@
                         <a:buNone/>
                       </a:pPr>
                       <a:r>
-                        <a:rPr lang="en-US" sz="1400" kern="100">
+                        <a:rPr lang="en-US" sz="1400" kern="100" dirty="0">
                           <a:effectLst/>
                           <a:latin typeface="Times New Roman" panose="02020603050405020304" pitchFamily="18" charset="0"/>
                           <a:ea typeface="Aptos" panose="020B0004020202020204" pitchFamily="34" charset="0"/>
@@ -29955,7 +31022,7 @@
                         </a:rPr>
                         <a:t>Lower latency</a:t>
                       </a:r>
-                      <a:endParaRPr lang="en-US" sz="1400" kern="100">
+                      <a:endParaRPr lang="en-US" sz="1400" kern="100" dirty="0">
                         <a:effectLst/>
                         <a:latin typeface="Aptos" panose="020B0004020202020204" pitchFamily="34" charset="0"/>
                         <a:ea typeface="Aptos" panose="020B0004020202020204" pitchFamily="34" charset="0"/>
@@ -29971,13 +31038,13 @@
                   </a:ext>
                 </a:extLst>
               </a:tr>
-              <a:tr h="764931">
+              <a:tr h="856148">
                 <a:tc>
                   <a:txBody>
                     <a:bodyPr/>
                     <a:lstStyle/>
                     <a:p>
-                      <a:pPr marL="0" marR="0">
+                      <a:pPr marL="0" marR="0" algn="ctr">
                         <a:lnSpc>
                           <a:spcPct val="107000"/>
                         </a:lnSpc>
@@ -30010,7 +31077,7 @@
                     <a:bodyPr/>
                     <a:lstStyle/>
                     <a:p>
-                      <a:pPr marL="0" marR="0">
+                      <a:pPr marL="0" marR="0" algn="ctr">
                         <a:lnSpc>
                           <a:spcPct val="107000"/>
                         </a:lnSpc>
@@ -32070,6 +33137,1296 @@
 </p:sld>
 </file>
 
+<file path=ppt/slides/slide37.xml><?xml version="1.0" encoding="utf-8"?>
+<p:sld xmlns:a="http://schemas.openxmlformats.org/drawingml/2006/main" xmlns:r="http://schemas.openxmlformats.org/officeDocument/2006/relationships" xmlns:p="http://schemas.openxmlformats.org/presentationml/2006/main">
+  <p:cSld>
+    <p:spTree>
+      <p:nvGrpSpPr>
+        <p:cNvPr id="1" name="">
+          <a:extLst>
+            <a:ext uri="{FF2B5EF4-FFF2-40B4-BE49-F238E27FC236}">
+              <a16:creationId xmlns:a16="http://schemas.microsoft.com/office/drawing/2014/main" id="{DCC02F2E-9E02-7A5A-1523-3304874023C1}"/>
+            </a:ext>
+          </a:extLst>
+        </p:cNvPr>
+        <p:cNvGrpSpPr/>
+        <p:nvPr/>
+      </p:nvGrpSpPr>
+      <p:grpSpPr>
+        <a:xfrm>
+          <a:off x="0" y="0"/>
+          <a:ext cx="0" cy="0"/>
+          <a:chOff x="0" y="0"/>
+          <a:chExt cx="0" cy="0"/>
+        </a:xfrm>
+      </p:grpSpPr>
+      <p:sp>
+        <p:nvSpPr>
+          <p:cNvPr id="2" name="Title 1">
+            <a:extLst>
+              <a:ext uri="{FF2B5EF4-FFF2-40B4-BE49-F238E27FC236}">
+                <a16:creationId xmlns:a16="http://schemas.microsoft.com/office/drawing/2014/main" id="{A3D217D1-AB7C-C1D3-0A82-87161235542E}"/>
+              </a:ext>
+            </a:extLst>
+          </p:cNvPr>
+          <p:cNvSpPr>
+            <a:spLocks noGrp="1"/>
+          </p:cNvSpPr>
+          <p:nvPr>
+            <p:ph type="title"/>
+          </p:nvPr>
+        </p:nvSpPr>
+        <p:spPr>
+          <a:xfrm>
+            <a:off x="787400" y="508882"/>
+            <a:ext cx="9784348" cy="1275898"/>
+          </a:xfrm>
+        </p:spPr>
+        <p:txBody>
+          <a:bodyPr>
+            <a:normAutofit/>
+          </a:bodyPr>
+          <a:lstStyle/>
+          <a:p>
+            <a:r>
+              <a:rPr lang="en-US" sz="3600" dirty="0">
+                <a:latin typeface="Times New Roman" panose="02020603050405020304" pitchFamily="18" charset="0"/>
+                <a:cs typeface="Times New Roman" panose="02020603050405020304" pitchFamily="18" charset="0"/>
+              </a:rPr>
+              <a:t>References</a:t>
+            </a:r>
+          </a:p>
+        </p:txBody>
+      </p:sp>
+      <p:sp>
+        <p:nvSpPr>
+          <p:cNvPr id="6" name="Slide Number Placeholder 5">
+            <a:extLst>
+              <a:ext uri="{FF2B5EF4-FFF2-40B4-BE49-F238E27FC236}">
+                <a16:creationId xmlns:a16="http://schemas.microsoft.com/office/drawing/2014/main" id="{85A0BB4B-6882-8792-0112-98298F35C7A2}"/>
+              </a:ext>
+            </a:extLst>
+          </p:cNvPr>
+          <p:cNvSpPr>
+            <a:spLocks noGrp="1"/>
+          </p:cNvSpPr>
+          <p:nvPr>
+            <p:ph type="sldNum" sz="quarter" idx="12"/>
+          </p:nvPr>
+        </p:nvSpPr>
+        <p:spPr/>
+        <p:txBody>
+          <a:bodyPr/>
+          <a:lstStyle/>
+          <a:p>
+            <a:fld id="{B5CEABB6-07DC-46E8-9B57-56EC44A396E5}" type="slidenum">
+              <a:rPr lang="en-US" smtClean="0"/>
+              <a:pPr/>
+              <a:t>37</a:t>
+            </a:fld>
+            <a:endParaRPr lang="en-US" dirty="0"/>
+          </a:p>
+        </p:txBody>
+      </p:sp>
+      <p:sp>
+        <p:nvSpPr>
+          <p:cNvPr id="7" name="Rectangle 1">
+            <a:extLst>
+              <a:ext uri="{FF2B5EF4-FFF2-40B4-BE49-F238E27FC236}">
+                <a16:creationId xmlns:a16="http://schemas.microsoft.com/office/drawing/2014/main" id="{A53EF115-A532-C5F9-F070-CB7A08ECF585}"/>
+              </a:ext>
+            </a:extLst>
+          </p:cNvPr>
+          <p:cNvSpPr txBox="1">
+            <a:spLocks noChangeArrowheads="1"/>
+          </p:cNvSpPr>
+          <p:nvPr/>
+        </p:nvSpPr>
+        <p:spPr bwMode="auto">
+          <a:xfrm>
+            <a:off x="77119" y="1378740"/>
+            <a:ext cx="7987228" cy="5155257"/>
+          </a:xfrm>
+          <a:prstGeom prst="rect">
+            <a:avLst/>
+          </a:prstGeom>
+          <a:noFill/>
+          <a:ln>
+            <a:noFill/>
+          </a:ln>
+          <a:effectLst/>
+          <a:extLst>
+            <a:ext uri="{909E8E84-426E-40DD-AFC4-6F175D3DCCD1}">
+              <a14:hiddenFill xmlns:a14="http://schemas.microsoft.com/office/drawing/2010/main">
+                <a:solidFill>
+                  <a:schemeClr val="accent1"/>
+                </a:solidFill>
+              </a14:hiddenFill>
+            </a:ext>
+            <a:ext uri="{91240B29-F687-4F45-9708-019B960494DF}">
+              <a14:hiddenLine xmlns:a14="http://schemas.microsoft.com/office/drawing/2010/main" w="9525">
+                <a:solidFill>
+                  <a:schemeClr val="tx1"/>
+                </a:solidFill>
+                <a:miter lim="800000"/>
+                <a:headEnd/>
+                <a:tailEnd/>
+              </a14:hiddenLine>
+            </a:ext>
+            <a:ext uri="{AF507438-7753-43E0-B8FC-AC1667EBCBE1}">
+              <a14:hiddenEffects xmlns:a14="http://schemas.microsoft.com/office/drawing/2010/main">
+                <a:effectLst>
+                  <a:outerShdw dist="35921" dir="2700000" algn="ctr" rotWithShape="0">
+                    <a:schemeClr val="bg2"/>
+                  </a:outerShdw>
+                </a:effectLst>
+              </a14:hiddenEffects>
+            </a:ext>
+          </a:extLst>
+        </p:spPr>
+        <p:txBody>
+          <a:bodyPr vert="horz" wrap="square" lIns="91440" tIns="45720" rIns="91440" bIns="45720" numCol="1" rtlCol="0" anchor="ctr" anchorCtr="0" compatLnSpc="1">
+            <a:prstTxWarp prst="textNoShape">
+              <a:avLst/>
+            </a:prstTxWarp>
+            <a:spAutoFit/>
+          </a:bodyPr>
+          <a:lstStyle>
+            <a:lvl1pPr marL="0" indent="0" algn="l" defTabSz="914400" rtl="0" eaLnBrk="1" latinLnBrk="0" hangingPunct="1">
+              <a:lnSpc>
+                <a:spcPts val="2000"/>
+              </a:lnSpc>
+              <a:spcBef>
+                <a:spcPts val="0"/>
+              </a:spcBef>
+              <a:spcAft>
+                <a:spcPts val="1200"/>
+              </a:spcAft>
+              <a:buFont typeface="Arial" panose="020B0604020202020204" pitchFamily="34" charset="0"/>
+              <a:buNone/>
+              <a:defRPr sz="1800" kern="1200">
+                <a:solidFill>
+                  <a:schemeClr val="bg1"/>
+                </a:solidFill>
+                <a:latin typeface="+mn-lt"/>
+                <a:ea typeface="+mn-ea"/>
+                <a:cs typeface="+mn-cs"/>
+              </a:defRPr>
+            </a:lvl1pPr>
+            <a:lvl2pPr marL="457200" indent="-228600" algn="l" defTabSz="914400" rtl="0" eaLnBrk="1" latinLnBrk="0" hangingPunct="1">
+              <a:lnSpc>
+                <a:spcPts val="2000"/>
+              </a:lnSpc>
+              <a:spcBef>
+                <a:spcPts val="0"/>
+              </a:spcBef>
+              <a:spcAft>
+                <a:spcPts val="1200"/>
+              </a:spcAft>
+              <a:buFont typeface="Arial" panose="020B0604020202020204" pitchFamily="34" charset="0"/>
+              <a:buChar char="•"/>
+              <a:defRPr sz="1800" kern="1200">
+                <a:solidFill>
+                  <a:schemeClr val="bg1"/>
+                </a:solidFill>
+                <a:latin typeface="+mn-lt"/>
+                <a:ea typeface="+mn-ea"/>
+                <a:cs typeface="+mn-cs"/>
+              </a:defRPr>
+            </a:lvl2pPr>
+            <a:lvl3pPr marL="914400" indent="-228600" algn="l" defTabSz="914400" rtl="0" eaLnBrk="1" latinLnBrk="0" hangingPunct="1">
+              <a:lnSpc>
+                <a:spcPts val="2000"/>
+              </a:lnSpc>
+              <a:spcBef>
+                <a:spcPts val="0"/>
+              </a:spcBef>
+              <a:spcAft>
+                <a:spcPts val="1200"/>
+              </a:spcAft>
+              <a:buFont typeface="Arial" panose="020B0604020202020204" pitchFamily="34" charset="0"/>
+              <a:buChar char="•"/>
+              <a:defRPr sz="1800" kern="1200">
+                <a:solidFill>
+                  <a:schemeClr val="bg1"/>
+                </a:solidFill>
+                <a:latin typeface="+mn-lt"/>
+                <a:ea typeface="+mn-ea"/>
+                <a:cs typeface="+mn-cs"/>
+              </a:defRPr>
+            </a:lvl3pPr>
+            <a:lvl4pPr marL="1371600" indent="-228600" algn="l" defTabSz="914400" rtl="0" eaLnBrk="1" latinLnBrk="0" hangingPunct="1">
+              <a:lnSpc>
+                <a:spcPts val="2000"/>
+              </a:lnSpc>
+              <a:spcBef>
+                <a:spcPts val="0"/>
+              </a:spcBef>
+              <a:spcAft>
+                <a:spcPts val="1200"/>
+              </a:spcAft>
+              <a:buFont typeface="Arial" panose="020B0604020202020204" pitchFamily="34" charset="0"/>
+              <a:buChar char="•"/>
+              <a:defRPr sz="1800" kern="1200">
+                <a:solidFill>
+                  <a:schemeClr val="bg1"/>
+                </a:solidFill>
+                <a:latin typeface="+mn-lt"/>
+                <a:ea typeface="+mn-ea"/>
+                <a:cs typeface="+mn-cs"/>
+              </a:defRPr>
+            </a:lvl4pPr>
+            <a:lvl5pPr marL="1828800" indent="-228600" algn="l" defTabSz="914400" rtl="0" eaLnBrk="1" latinLnBrk="0" hangingPunct="1">
+              <a:lnSpc>
+                <a:spcPts val="2000"/>
+              </a:lnSpc>
+              <a:spcBef>
+                <a:spcPts val="0"/>
+              </a:spcBef>
+              <a:spcAft>
+                <a:spcPts val="1200"/>
+              </a:spcAft>
+              <a:buFont typeface="Arial" panose="020B0604020202020204" pitchFamily="34" charset="0"/>
+              <a:buChar char="•"/>
+              <a:defRPr sz="1800" kern="1200">
+                <a:solidFill>
+                  <a:schemeClr val="bg1"/>
+                </a:solidFill>
+                <a:latin typeface="+mn-lt"/>
+                <a:ea typeface="+mn-ea"/>
+                <a:cs typeface="+mn-cs"/>
+              </a:defRPr>
+            </a:lvl5pPr>
+            <a:lvl6pPr marL="2514600" indent="-228600" algn="l" defTabSz="914400" rtl="0" eaLnBrk="1" latinLnBrk="0" hangingPunct="1">
+              <a:lnSpc>
+                <a:spcPct val="90000"/>
+              </a:lnSpc>
+              <a:spcBef>
+                <a:spcPts val="500"/>
+              </a:spcBef>
+              <a:buFont typeface="Arial" panose="020B0604020202020204" pitchFamily="34" charset="0"/>
+              <a:buChar char="•"/>
+              <a:defRPr sz="1800" kern="1200">
+                <a:solidFill>
+                  <a:schemeClr val="tx1"/>
+                </a:solidFill>
+                <a:latin typeface="+mn-lt"/>
+                <a:ea typeface="+mn-ea"/>
+                <a:cs typeface="+mn-cs"/>
+              </a:defRPr>
+            </a:lvl6pPr>
+            <a:lvl7pPr marL="2971800" indent="-228600" algn="l" defTabSz="914400" rtl="0" eaLnBrk="1" latinLnBrk="0" hangingPunct="1">
+              <a:lnSpc>
+                <a:spcPct val="90000"/>
+              </a:lnSpc>
+              <a:spcBef>
+                <a:spcPts val="500"/>
+              </a:spcBef>
+              <a:buFont typeface="Arial" panose="020B0604020202020204" pitchFamily="34" charset="0"/>
+              <a:buChar char="•"/>
+              <a:defRPr sz="1800" kern="1200">
+                <a:solidFill>
+                  <a:schemeClr val="tx1"/>
+                </a:solidFill>
+                <a:latin typeface="+mn-lt"/>
+                <a:ea typeface="+mn-ea"/>
+                <a:cs typeface="+mn-cs"/>
+              </a:defRPr>
+            </a:lvl7pPr>
+            <a:lvl8pPr marL="3429000" indent="-228600" algn="l" defTabSz="914400" rtl="0" eaLnBrk="1" latinLnBrk="0" hangingPunct="1">
+              <a:lnSpc>
+                <a:spcPct val="90000"/>
+              </a:lnSpc>
+              <a:spcBef>
+                <a:spcPts val="500"/>
+              </a:spcBef>
+              <a:buFont typeface="Arial" panose="020B0604020202020204" pitchFamily="34" charset="0"/>
+              <a:buChar char="•"/>
+              <a:defRPr sz="1800" kern="1200">
+                <a:solidFill>
+                  <a:schemeClr val="tx1"/>
+                </a:solidFill>
+                <a:latin typeface="+mn-lt"/>
+                <a:ea typeface="+mn-ea"/>
+                <a:cs typeface="+mn-cs"/>
+              </a:defRPr>
+            </a:lvl8pPr>
+            <a:lvl9pPr marL="3886200" indent="-228600" algn="l" defTabSz="914400" rtl="0" eaLnBrk="1" latinLnBrk="0" hangingPunct="1">
+              <a:lnSpc>
+                <a:spcPct val="90000"/>
+              </a:lnSpc>
+              <a:spcBef>
+                <a:spcPts val="500"/>
+              </a:spcBef>
+              <a:buFont typeface="Arial" panose="020B0604020202020204" pitchFamily="34" charset="0"/>
+              <a:buChar char="•"/>
+              <a:defRPr sz="1800" kern="1200">
+                <a:solidFill>
+                  <a:schemeClr val="tx1"/>
+                </a:solidFill>
+                <a:latin typeface="+mn-lt"/>
+                <a:ea typeface="+mn-ea"/>
+                <a:cs typeface="+mn-cs"/>
+              </a:defRPr>
+            </a:lvl9pPr>
+          </a:lstStyle>
+          <a:p>
+            <a:pPr marL="342900" indent="-342900">
+              <a:lnSpc>
+                <a:spcPct val="100000"/>
+              </a:lnSpc>
+              <a:spcBef>
+                <a:spcPts val="600"/>
+              </a:spcBef>
+              <a:buFont typeface="Arial" panose="020B0604020202020204" pitchFamily="34" charset="0"/>
+              <a:buChar char="•"/>
+            </a:pPr>
+            <a:r>
+              <a:rPr lang="en-US" sz="1600" dirty="0">
+                <a:latin typeface="Times New Roman" panose="02020603050405020304" pitchFamily="18" charset="0"/>
+                <a:cs typeface="Times New Roman" panose="02020603050405020304" pitchFamily="18" charset="0"/>
+              </a:rPr>
+              <a:t>Apache Spark Documentation. https://spark.apache.org/docs/latest/</a:t>
+            </a:r>
+          </a:p>
+          <a:p>
+            <a:pPr marL="342900" indent="-342900">
+              <a:lnSpc>
+                <a:spcPct val="100000"/>
+              </a:lnSpc>
+              <a:spcBef>
+                <a:spcPts val="600"/>
+              </a:spcBef>
+              <a:buFont typeface="Arial" panose="020B0604020202020204" pitchFamily="34" charset="0"/>
+              <a:buChar char="•"/>
+            </a:pPr>
+            <a:r>
+              <a:rPr lang="en-US" sz="1600" dirty="0">
+                <a:latin typeface="Times New Roman" panose="02020603050405020304" pitchFamily="18" charset="0"/>
+                <a:cs typeface="Times New Roman" panose="02020603050405020304" pitchFamily="18" charset="0"/>
+              </a:rPr>
+              <a:t>Bird, S., Klein, E., &amp; Loper, E. (2009). </a:t>
+            </a:r>
+            <a:r>
+              <a:rPr lang="en-US" sz="1600" i="1" dirty="0">
+                <a:latin typeface="Times New Roman" panose="02020603050405020304" pitchFamily="18" charset="0"/>
+                <a:cs typeface="Times New Roman" panose="02020603050405020304" pitchFamily="18" charset="0"/>
+              </a:rPr>
+              <a:t>Natural language processing with Python: analyzing text with the natural language toolkit. " O'Reilly Media, Inc</a:t>
+            </a:r>
+            <a:r>
+              <a:rPr lang="en-US" sz="1600" dirty="0">
+                <a:latin typeface="Times New Roman" panose="02020603050405020304" pitchFamily="18" charset="0"/>
+                <a:cs typeface="Times New Roman" panose="02020603050405020304" pitchFamily="18" charset="0"/>
+              </a:rPr>
+              <a:t>.".</a:t>
+            </a:r>
+          </a:p>
+          <a:p>
+            <a:pPr marL="342900" indent="-342900">
+              <a:lnSpc>
+                <a:spcPct val="100000"/>
+              </a:lnSpc>
+              <a:spcBef>
+                <a:spcPts val="600"/>
+              </a:spcBef>
+              <a:buFont typeface="Arial" panose="020B0604020202020204" pitchFamily="34" charset="0"/>
+              <a:buChar char="•"/>
+            </a:pPr>
+            <a:r>
+              <a:rPr lang="en-US" sz="1600" dirty="0">
+                <a:latin typeface="Times New Roman" panose="02020603050405020304" pitchFamily="18" charset="0"/>
+                <a:cs typeface="Times New Roman" panose="02020603050405020304" pitchFamily="18" charset="0"/>
+              </a:rPr>
+              <a:t>Breiman, L. (2001). Random forests</a:t>
+            </a:r>
+            <a:r>
+              <a:rPr lang="en-US" sz="1600" i="1" dirty="0">
+                <a:latin typeface="Times New Roman" panose="02020603050405020304" pitchFamily="18" charset="0"/>
+                <a:cs typeface="Times New Roman" panose="02020603050405020304" pitchFamily="18" charset="0"/>
+              </a:rPr>
+              <a:t>. Machine learning, 45</a:t>
+            </a:r>
+            <a:r>
+              <a:rPr lang="en-US" sz="1600" dirty="0">
+                <a:latin typeface="Times New Roman" panose="02020603050405020304" pitchFamily="18" charset="0"/>
+                <a:cs typeface="Times New Roman" panose="02020603050405020304" pitchFamily="18" charset="0"/>
+              </a:rPr>
+              <a:t>(1), 5-32.</a:t>
+            </a:r>
+          </a:p>
+          <a:p>
+            <a:pPr marL="342900" indent="-342900">
+              <a:lnSpc>
+                <a:spcPct val="100000"/>
+              </a:lnSpc>
+              <a:spcBef>
+                <a:spcPts val="600"/>
+              </a:spcBef>
+              <a:buFont typeface="Arial" panose="020B0604020202020204" pitchFamily="34" charset="0"/>
+              <a:buChar char="•"/>
+            </a:pPr>
+            <a:r>
+              <a:rPr lang="en-US" sz="1600" dirty="0">
+                <a:latin typeface="Times New Roman" panose="02020603050405020304" pitchFamily="18" charset="0"/>
+                <a:cs typeface="Times New Roman" panose="02020603050405020304" pitchFamily="18" charset="0"/>
+              </a:rPr>
+              <a:t>Cortes, C., &amp; Vapnik, V. (1995). Support-vector networks. </a:t>
+            </a:r>
+            <a:r>
+              <a:rPr lang="en-US" sz="1600" i="1" dirty="0">
+                <a:latin typeface="Times New Roman" panose="02020603050405020304" pitchFamily="18" charset="0"/>
+                <a:cs typeface="Times New Roman" panose="02020603050405020304" pitchFamily="18" charset="0"/>
+              </a:rPr>
+              <a:t>Machine learning, 20</a:t>
+            </a:r>
+            <a:r>
+              <a:rPr lang="en-US" sz="1600" dirty="0">
+                <a:latin typeface="Times New Roman" panose="02020603050405020304" pitchFamily="18" charset="0"/>
+                <a:cs typeface="Times New Roman" panose="02020603050405020304" pitchFamily="18" charset="0"/>
+              </a:rPr>
+              <a:t>(3), 273-297.</a:t>
+            </a:r>
+          </a:p>
+          <a:p>
+            <a:pPr marL="342900" indent="-342900">
+              <a:lnSpc>
+                <a:spcPct val="100000"/>
+              </a:lnSpc>
+              <a:spcBef>
+                <a:spcPts val="600"/>
+              </a:spcBef>
+              <a:buFont typeface="Arial" panose="020B0604020202020204" pitchFamily="34" charset="0"/>
+              <a:buChar char="•"/>
+            </a:pPr>
+            <a:r>
+              <a:rPr lang="en-US" sz="1600" dirty="0">
+                <a:latin typeface="Times New Roman" panose="02020603050405020304" pitchFamily="18" charset="0"/>
+                <a:cs typeface="Times New Roman" panose="02020603050405020304" pitchFamily="18" charset="0"/>
+              </a:rPr>
+              <a:t>Dean, J., &amp; Ghemawat, S. (2008). MapReduce: simplified data processing on large clusters. </a:t>
+            </a:r>
+            <a:r>
+              <a:rPr lang="en-US" sz="1600" i="1" dirty="0">
+                <a:latin typeface="Times New Roman" panose="02020603050405020304" pitchFamily="18" charset="0"/>
+                <a:cs typeface="Times New Roman" panose="02020603050405020304" pitchFamily="18" charset="0"/>
+              </a:rPr>
+              <a:t>Communications of the ACM, 51</a:t>
+            </a:r>
+            <a:r>
+              <a:rPr lang="en-US" sz="1600" dirty="0">
+                <a:latin typeface="Times New Roman" panose="02020603050405020304" pitchFamily="18" charset="0"/>
+                <a:cs typeface="Times New Roman" panose="02020603050405020304" pitchFamily="18" charset="0"/>
+              </a:rPr>
+              <a:t>(1), 107-113.</a:t>
+            </a:r>
+          </a:p>
+          <a:p>
+            <a:pPr marL="342900" indent="-342900">
+              <a:lnSpc>
+                <a:spcPct val="100000"/>
+              </a:lnSpc>
+              <a:spcBef>
+                <a:spcPts val="600"/>
+              </a:spcBef>
+              <a:buFont typeface="Arial" panose="020B0604020202020204" pitchFamily="34" charset="0"/>
+              <a:buChar char="•"/>
+            </a:pPr>
+            <a:r>
+              <a:rPr lang="en-US" sz="1600" dirty="0">
+                <a:latin typeface="Times New Roman" panose="02020603050405020304" pitchFamily="18" charset="0"/>
+                <a:cs typeface="Times New Roman" panose="02020603050405020304" pitchFamily="18" charset="0"/>
+              </a:rPr>
+              <a:t>Devlin, J., Chang, M. W., Lee, K., &amp; Toutanova, K. (2019, June). </a:t>
+            </a:r>
+            <a:r>
+              <a:rPr lang="en-US" sz="1600" i="1" dirty="0">
+                <a:latin typeface="Times New Roman" panose="02020603050405020304" pitchFamily="18" charset="0"/>
+                <a:cs typeface="Times New Roman" panose="02020603050405020304" pitchFamily="18" charset="0"/>
+              </a:rPr>
+              <a:t>Bert: Pre-training of deep bidirectional transformers for language understanding</a:t>
+            </a:r>
+            <a:r>
+              <a:rPr lang="en-US" sz="1600" dirty="0">
+                <a:latin typeface="Times New Roman" panose="02020603050405020304" pitchFamily="18" charset="0"/>
+                <a:cs typeface="Times New Roman" panose="02020603050405020304" pitchFamily="18" charset="0"/>
+              </a:rPr>
+              <a:t>. In Proceedings of the 2019 conference of the North American chapter of the association for computational linguistics: human language technologies, volume 1 (long and short papers) (pp. 4171-4186).</a:t>
+            </a:r>
+          </a:p>
+          <a:p>
+            <a:pPr marL="342900" indent="-342900">
+              <a:lnSpc>
+                <a:spcPct val="100000"/>
+              </a:lnSpc>
+              <a:spcBef>
+                <a:spcPts val="600"/>
+              </a:spcBef>
+              <a:buFont typeface="Arial" panose="020B0604020202020204" pitchFamily="34" charset="0"/>
+              <a:buChar char="•"/>
+            </a:pPr>
+            <a:r>
+              <a:rPr lang="en-US" sz="1600" dirty="0">
+                <a:latin typeface="Times New Roman" panose="02020603050405020304" pitchFamily="18" charset="0"/>
+                <a:cs typeface="Times New Roman" panose="02020603050405020304" pitchFamily="18" charset="0"/>
+              </a:rPr>
+              <a:t>Hugging Face Datasets Documentation. https://huggingface.co/docs/datasets/</a:t>
+            </a:r>
+          </a:p>
+          <a:p>
+            <a:pPr marL="342900" indent="-342900">
+              <a:lnSpc>
+                <a:spcPct val="100000"/>
+              </a:lnSpc>
+              <a:spcBef>
+                <a:spcPts val="600"/>
+              </a:spcBef>
+              <a:buFont typeface="Arial" panose="020B0604020202020204" pitchFamily="34" charset="0"/>
+              <a:buChar char="•"/>
+            </a:pPr>
+            <a:r>
+              <a:rPr lang="en-US" sz="1600" dirty="0">
+                <a:latin typeface="Times New Roman" panose="02020603050405020304" pitchFamily="18" charset="0"/>
+                <a:cs typeface="Times New Roman" panose="02020603050405020304" pitchFamily="18" charset="0"/>
+              </a:rPr>
+              <a:t>Jurafsky, D., &amp; Martin, J. H. (2023). </a:t>
+            </a:r>
+            <a:r>
+              <a:rPr lang="en-US" sz="1600" i="1" dirty="0">
+                <a:latin typeface="Times New Roman" panose="02020603050405020304" pitchFamily="18" charset="0"/>
+                <a:cs typeface="Times New Roman" panose="02020603050405020304" pitchFamily="18" charset="0"/>
+              </a:rPr>
+              <a:t>Speech and language processing</a:t>
+            </a:r>
+            <a:r>
+              <a:rPr lang="en-US" sz="1600" dirty="0">
+                <a:latin typeface="Times New Roman" panose="02020603050405020304" pitchFamily="18" charset="0"/>
+                <a:cs typeface="Times New Roman" panose="02020603050405020304" pitchFamily="18" charset="0"/>
+              </a:rPr>
+              <a:t>. 3rd edn. draft.</a:t>
+            </a:r>
+          </a:p>
+        </p:txBody>
+      </p:sp>
+    </p:spTree>
+    <p:extLst>
+      <p:ext uri="{BB962C8B-B14F-4D97-AF65-F5344CB8AC3E}">
+        <p14:creationId xmlns:p14="http://schemas.microsoft.com/office/powerpoint/2010/main" val="1336491949"/>
+      </p:ext>
+    </p:extLst>
+  </p:cSld>
+  <p:clrMapOvr>
+    <a:masterClrMapping/>
+  </p:clrMapOvr>
+</p:sld>
+</file>
+
+<file path=ppt/slides/slide38.xml><?xml version="1.0" encoding="utf-8"?>
+<p:sld xmlns:a="http://schemas.openxmlformats.org/drawingml/2006/main" xmlns:r="http://schemas.openxmlformats.org/officeDocument/2006/relationships" xmlns:p="http://schemas.openxmlformats.org/presentationml/2006/main">
+  <p:cSld>
+    <p:spTree>
+      <p:nvGrpSpPr>
+        <p:cNvPr id="1" name="">
+          <a:extLst>
+            <a:ext uri="{FF2B5EF4-FFF2-40B4-BE49-F238E27FC236}">
+              <a16:creationId xmlns:a16="http://schemas.microsoft.com/office/drawing/2014/main" id="{B9A81284-A19A-FE3D-CD2B-3698D886EC7D}"/>
+            </a:ext>
+          </a:extLst>
+        </p:cNvPr>
+        <p:cNvGrpSpPr/>
+        <p:nvPr/>
+      </p:nvGrpSpPr>
+      <p:grpSpPr>
+        <a:xfrm>
+          <a:off x="0" y="0"/>
+          <a:ext cx="0" cy="0"/>
+          <a:chOff x="0" y="0"/>
+          <a:chExt cx="0" cy="0"/>
+        </a:xfrm>
+      </p:grpSpPr>
+      <p:sp>
+        <p:nvSpPr>
+          <p:cNvPr id="2" name="Title 1">
+            <a:extLst>
+              <a:ext uri="{FF2B5EF4-FFF2-40B4-BE49-F238E27FC236}">
+                <a16:creationId xmlns:a16="http://schemas.microsoft.com/office/drawing/2014/main" id="{53C6DB4B-AA48-6B38-DDEF-99AAC12B4A36}"/>
+              </a:ext>
+            </a:extLst>
+          </p:cNvPr>
+          <p:cNvSpPr>
+            <a:spLocks noGrp="1"/>
+          </p:cNvSpPr>
+          <p:nvPr>
+            <p:ph type="title"/>
+          </p:nvPr>
+        </p:nvSpPr>
+        <p:spPr>
+          <a:xfrm>
+            <a:off x="787400" y="508882"/>
+            <a:ext cx="9784348" cy="1275898"/>
+          </a:xfrm>
+        </p:spPr>
+        <p:txBody>
+          <a:bodyPr>
+            <a:normAutofit/>
+          </a:bodyPr>
+          <a:lstStyle/>
+          <a:p>
+            <a:r>
+              <a:rPr lang="en-US" sz="3600" dirty="0">
+                <a:latin typeface="Times New Roman" panose="02020603050405020304" pitchFamily="18" charset="0"/>
+                <a:cs typeface="Times New Roman" panose="02020603050405020304" pitchFamily="18" charset="0"/>
+              </a:rPr>
+              <a:t>References</a:t>
+            </a:r>
+          </a:p>
+        </p:txBody>
+      </p:sp>
+      <p:sp>
+        <p:nvSpPr>
+          <p:cNvPr id="6" name="Slide Number Placeholder 5">
+            <a:extLst>
+              <a:ext uri="{FF2B5EF4-FFF2-40B4-BE49-F238E27FC236}">
+                <a16:creationId xmlns:a16="http://schemas.microsoft.com/office/drawing/2014/main" id="{3E2985EA-42E6-49D5-B156-7464AD13CB15}"/>
+              </a:ext>
+            </a:extLst>
+          </p:cNvPr>
+          <p:cNvSpPr>
+            <a:spLocks noGrp="1"/>
+          </p:cNvSpPr>
+          <p:nvPr>
+            <p:ph type="sldNum" sz="quarter" idx="12"/>
+          </p:nvPr>
+        </p:nvSpPr>
+        <p:spPr/>
+        <p:txBody>
+          <a:bodyPr/>
+          <a:lstStyle/>
+          <a:p>
+            <a:fld id="{B5CEABB6-07DC-46E8-9B57-56EC44A396E5}" type="slidenum">
+              <a:rPr lang="en-US" smtClean="0"/>
+              <a:pPr/>
+              <a:t>38</a:t>
+            </a:fld>
+            <a:endParaRPr lang="en-US" dirty="0"/>
+          </a:p>
+        </p:txBody>
+      </p:sp>
+      <p:sp>
+        <p:nvSpPr>
+          <p:cNvPr id="7" name="Rectangle 1">
+            <a:extLst>
+              <a:ext uri="{FF2B5EF4-FFF2-40B4-BE49-F238E27FC236}">
+                <a16:creationId xmlns:a16="http://schemas.microsoft.com/office/drawing/2014/main" id="{D16D9C69-4DF0-5B3E-8E2A-31C0A800B977}"/>
+              </a:ext>
+            </a:extLst>
+          </p:cNvPr>
+          <p:cNvSpPr txBox="1">
+            <a:spLocks noChangeArrowheads="1"/>
+          </p:cNvSpPr>
+          <p:nvPr/>
+        </p:nvSpPr>
+        <p:spPr bwMode="auto">
+          <a:xfrm>
+            <a:off x="77119" y="1371045"/>
+            <a:ext cx="7987228" cy="5170646"/>
+          </a:xfrm>
+          <a:prstGeom prst="rect">
+            <a:avLst/>
+          </a:prstGeom>
+          <a:noFill/>
+          <a:ln>
+            <a:noFill/>
+          </a:ln>
+          <a:effectLst/>
+          <a:extLst>
+            <a:ext uri="{909E8E84-426E-40DD-AFC4-6F175D3DCCD1}">
+              <a14:hiddenFill xmlns:a14="http://schemas.microsoft.com/office/drawing/2010/main">
+                <a:solidFill>
+                  <a:schemeClr val="accent1"/>
+                </a:solidFill>
+              </a14:hiddenFill>
+            </a:ext>
+            <a:ext uri="{91240B29-F687-4F45-9708-019B960494DF}">
+              <a14:hiddenLine xmlns:a14="http://schemas.microsoft.com/office/drawing/2010/main" w="9525">
+                <a:solidFill>
+                  <a:schemeClr val="tx1"/>
+                </a:solidFill>
+                <a:miter lim="800000"/>
+                <a:headEnd/>
+                <a:tailEnd/>
+              </a14:hiddenLine>
+            </a:ext>
+            <a:ext uri="{AF507438-7753-43E0-B8FC-AC1667EBCBE1}">
+              <a14:hiddenEffects xmlns:a14="http://schemas.microsoft.com/office/drawing/2010/main">
+                <a:effectLst>
+                  <a:outerShdw dist="35921" dir="2700000" algn="ctr" rotWithShape="0">
+                    <a:schemeClr val="bg2"/>
+                  </a:outerShdw>
+                </a:effectLst>
+              </a14:hiddenEffects>
+            </a:ext>
+          </a:extLst>
+        </p:spPr>
+        <p:txBody>
+          <a:bodyPr vert="horz" wrap="square" lIns="91440" tIns="45720" rIns="91440" bIns="45720" numCol="1" rtlCol="0" anchor="ctr" anchorCtr="0" compatLnSpc="1">
+            <a:prstTxWarp prst="textNoShape">
+              <a:avLst/>
+            </a:prstTxWarp>
+            <a:spAutoFit/>
+          </a:bodyPr>
+          <a:lstStyle>
+            <a:lvl1pPr marL="0" indent="0" algn="l" defTabSz="914400" rtl="0" eaLnBrk="1" latinLnBrk="0" hangingPunct="1">
+              <a:lnSpc>
+                <a:spcPts val="2000"/>
+              </a:lnSpc>
+              <a:spcBef>
+                <a:spcPts val="0"/>
+              </a:spcBef>
+              <a:spcAft>
+                <a:spcPts val="1200"/>
+              </a:spcAft>
+              <a:buFont typeface="Arial" panose="020B0604020202020204" pitchFamily="34" charset="0"/>
+              <a:buNone/>
+              <a:defRPr sz="1800" kern="1200">
+                <a:solidFill>
+                  <a:schemeClr val="bg1"/>
+                </a:solidFill>
+                <a:latin typeface="+mn-lt"/>
+                <a:ea typeface="+mn-ea"/>
+                <a:cs typeface="+mn-cs"/>
+              </a:defRPr>
+            </a:lvl1pPr>
+            <a:lvl2pPr marL="457200" indent="-228600" algn="l" defTabSz="914400" rtl="0" eaLnBrk="1" latinLnBrk="0" hangingPunct="1">
+              <a:lnSpc>
+                <a:spcPts val="2000"/>
+              </a:lnSpc>
+              <a:spcBef>
+                <a:spcPts val="0"/>
+              </a:spcBef>
+              <a:spcAft>
+                <a:spcPts val="1200"/>
+              </a:spcAft>
+              <a:buFont typeface="Arial" panose="020B0604020202020204" pitchFamily="34" charset="0"/>
+              <a:buChar char="•"/>
+              <a:defRPr sz="1800" kern="1200">
+                <a:solidFill>
+                  <a:schemeClr val="bg1"/>
+                </a:solidFill>
+                <a:latin typeface="+mn-lt"/>
+                <a:ea typeface="+mn-ea"/>
+                <a:cs typeface="+mn-cs"/>
+              </a:defRPr>
+            </a:lvl2pPr>
+            <a:lvl3pPr marL="914400" indent="-228600" algn="l" defTabSz="914400" rtl="0" eaLnBrk="1" latinLnBrk="0" hangingPunct="1">
+              <a:lnSpc>
+                <a:spcPts val="2000"/>
+              </a:lnSpc>
+              <a:spcBef>
+                <a:spcPts val="0"/>
+              </a:spcBef>
+              <a:spcAft>
+                <a:spcPts val="1200"/>
+              </a:spcAft>
+              <a:buFont typeface="Arial" panose="020B0604020202020204" pitchFamily="34" charset="0"/>
+              <a:buChar char="•"/>
+              <a:defRPr sz="1800" kern="1200">
+                <a:solidFill>
+                  <a:schemeClr val="bg1"/>
+                </a:solidFill>
+                <a:latin typeface="+mn-lt"/>
+                <a:ea typeface="+mn-ea"/>
+                <a:cs typeface="+mn-cs"/>
+              </a:defRPr>
+            </a:lvl3pPr>
+            <a:lvl4pPr marL="1371600" indent="-228600" algn="l" defTabSz="914400" rtl="0" eaLnBrk="1" latinLnBrk="0" hangingPunct="1">
+              <a:lnSpc>
+                <a:spcPts val="2000"/>
+              </a:lnSpc>
+              <a:spcBef>
+                <a:spcPts val="0"/>
+              </a:spcBef>
+              <a:spcAft>
+                <a:spcPts val="1200"/>
+              </a:spcAft>
+              <a:buFont typeface="Arial" panose="020B0604020202020204" pitchFamily="34" charset="0"/>
+              <a:buChar char="•"/>
+              <a:defRPr sz="1800" kern="1200">
+                <a:solidFill>
+                  <a:schemeClr val="bg1"/>
+                </a:solidFill>
+                <a:latin typeface="+mn-lt"/>
+                <a:ea typeface="+mn-ea"/>
+                <a:cs typeface="+mn-cs"/>
+              </a:defRPr>
+            </a:lvl4pPr>
+            <a:lvl5pPr marL="1828800" indent="-228600" algn="l" defTabSz="914400" rtl="0" eaLnBrk="1" latinLnBrk="0" hangingPunct="1">
+              <a:lnSpc>
+                <a:spcPts val="2000"/>
+              </a:lnSpc>
+              <a:spcBef>
+                <a:spcPts val="0"/>
+              </a:spcBef>
+              <a:spcAft>
+                <a:spcPts val="1200"/>
+              </a:spcAft>
+              <a:buFont typeface="Arial" panose="020B0604020202020204" pitchFamily="34" charset="0"/>
+              <a:buChar char="•"/>
+              <a:defRPr sz="1800" kern="1200">
+                <a:solidFill>
+                  <a:schemeClr val="bg1"/>
+                </a:solidFill>
+                <a:latin typeface="+mn-lt"/>
+                <a:ea typeface="+mn-ea"/>
+                <a:cs typeface="+mn-cs"/>
+              </a:defRPr>
+            </a:lvl5pPr>
+            <a:lvl6pPr marL="2514600" indent="-228600" algn="l" defTabSz="914400" rtl="0" eaLnBrk="1" latinLnBrk="0" hangingPunct="1">
+              <a:lnSpc>
+                <a:spcPct val="90000"/>
+              </a:lnSpc>
+              <a:spcBef>
+                <a:spcPts val="500"/>
+              </a:spcBef>
+              <a:buFont typeface="Arial" panose="020B0604020202020204" pitchFamily="34" charset="0"/>
+              <a:buChar char="•"/>
+              <a:defRPr sz="1800" kern="1200">
+                <a:solidFill>
+                  <a:schemeClr val="tx1"/>
+                </a:solidFill>
+                <a:latin typeface="+mn-lt"/>
+                <a:ea typeface="+mn-ea"/>
+                <a:cs typeface="+mn-cs"/>
+              </a:defRPr>
+            </a:lvl6pPr>
+            <a:lvl7pPr marL="2971800" indent="-228600" algn="l" defTabSz="914400" rtl="0" eaLnBrk="1" latinLnBrk="0" hangingPunct="1">
+              <a:lnSpc>
+                <a:spcPct val="90000"/>
+              </a:lnSpc>
+              <a:spcBef>
+                <a:spcPts val="500"/>
+              </a:spcBef>
+              <a:buFont typeface="Arial" panose="020B0604020202020204" pitchFamily="34" charset="0"/>
+              <a:buChar char="•"/>
+              <a:defRPr sz="1800" kern="1200">
+                <a:solidFill>
+                  <a:schemeClr val="tx1"/>
+                </a:solidFill>
+                <a:latin typeface="+mn-lt"/>
+                <a:ea typeface="+mn-ea"/>
+                <a:cs typeface="+mn-cs"/>
+              </a:defRPr>
+            </a:lvl7pPr>
+            <a:lvl8pPr marL="3429000" indent="-228600" algn="l" defTabSz="914400" rtl="0" eaLnBrk="1" latinLnBrk="0" hangingPunct="1">
+              <a:lnSpc>
+                <a:spcPct val="90000"/>
+              </a:lnSpc>
+              <a:spcBef>
+                <a:spcPts val="500"/>
+              </a:spcBef>
+              <a:buFont typeface="Arial" panose="020B0604020202020204" pitchFamily="34" charset="0"/>
+              <a:buChar char="•"/>
+              <a:defRPr sz="1800" kern="1200">
+                <a:solidFill>
+                  <a:schemeClr val="tx1"/>
+                </a:solidFill>
+                <a:latin typeface="+mn-lt"/>
+                <a:ea typeface="+mn-ea"/>
+                <a:cs typeface="+mn-cs"/>
+              </a:defRPr>
+            </a:lvl8pPr>
+            <a:lvl9pPr marL="3886200" indent="-228600" algn="l" defTabSz="914400" rtl="0" eaLnBrk="1" latinLnBrk="0" hangingPunct="1">
+              <a:lnSpc>
+                <a:spcPct val="90000"/>
+              </a:lnSpc>
+              <a:spcBef>
+                <a:spcPts val="500"/>
+              </a:spcBef>
+              <a:buFont typeface="Arial" panose="020B0604020202020204" pitchFamily="34" charset="0"/>
+              <a:buChar char="•"/>
+              <a:defRPr sz="1800" kern="1200">
+                <a:solidFill>
+                  <a:schemeClr val="tx1"/>
+                </a:solidFill>
+                <a:latin typeface="+mn-lt"/>
+                <a:ea typeface="+mn-ea"/>
+                <a:cs typeface="+mn-cs"/>
+              </a:defRPr>
+            </a:lvl9pPr>
+          </a:lstStyle>
+          <a:p>
+            <a:pPr marL="342900" indent="-342900">
+              <a:lnSpc>
+                <a:spcPct val="100000"/>
+              </a:lnSpc>
+              <a:spcBef>
+                <a:spcPts val="600"/>
+              </a:spcBef>
+              <a:buFont typeface="Arial" panose="020B0604020202020204" pitchFamily="34" charset="0"/>
+              <a:buChar char="•"/>
+            </a:pPr>
+            <a:r>
+              <a:rPr lang="en-US" sz="1600" dirty="0">
+                <a:latin typeface="Times New Roman" panose="02020603050405020304" pitchFamily="18" charset="0"/>
+                <a:cs typeface="Times New Roman" panose="02020603050405020304" pitchFamily="18" charset="0"/>
+              </a:rPr>
+              <a:t>KFUPM-JRCAI Arabic Generated Abstracts Dataset. https://huggingface.co/datasets/KFUPM-JRCAI/arabic-generated-abstracts</a:t>
+            </a:r>
+          </a:p>
+          <a:p>
+            <a:pPr marL="342900" indent="-342900">
+              <a:lnSpc>
+                <a:spcPct val="100000"/>
+              </a:lnSpc>
+              <a:spcBef>
+                <a:spcPts val="600"/>
+              </a:spcBef>
+              <a:buFont typeface="Arial" panose="020B0604020202020204" pitchFamily="34" charset="0"/>
+              <a:buChar char="•"/>
+            </a:pPr>
+            <a:r>
+              <a:rPr lang="en-US" sz="1600" dirty="0">
+                <a:latin typeface="Times New Roman" panose="02020603050405020304" pitchFamily="18" charset="0"/>
+                <a:cs typeface="Times New Roman" panose="02020603050405020304" pitchFamily="18" charset="0"/>
+              </a:rPr>
+              <a:t>Manning, C. D. (2008). </a:t>
+            </a:r>
+            <a:r>
+              <a:rPr lang="en-US" sz="1600" i="1" dirty="0">
+                <a:latin typeface="Times New Roman" panose="02020603050405020304" pitchFamily="18" charset="0"/>
+                <a:cs typeface="Times New Roman" panose="02020603050405020304" pitchFamily="18" charset="0"/>
+              </a:rPr>
+              <a:t>Introduction to information retrieval</a:t>
+            </a:r>
+            <a:r>
+              <a:rPr lang="en-US" sz="1600" dirty="0">
+                <a:latin typeface="Times New Roman" panose="02020603050405020304" pitchFamily="18" charset="0"/>
+                <a:cs typeface="Times New Roman" panose="02020603050405020304" pitchFamily="18" charset="0"/>
+              </a:rPr>
+              <a:t>. Syngress Publishing.</a:t>
+            </a:r>
+          </a:p>
+          <a:p>
+            <a:pPr marL="342900" indent="-342900">
+              <a:lnSpc>
+                <a:spcPct val="100000"/>
+              </a:lnSpc>
+              <a:spcBef>
+                <a:spcPts val="600"/>
+              </a:spcBef>
+              <a:buFont typeface="Arial" panose="020B0604020202020204" pitchFamily="34" charset="0"/>
+              <a:buChar char="•"/>
+            </a:pPr>
+            <a:r>
+              <a:rPr lang="en-US" sz="1600" dirty="0">
+                <a:latin typeface="Times New Roman" panose="02020603050405020304" pitchFamily="18" charset="0"/>
+                <a:cs typeface="Times New Roman" panose="02020603050405020304" pitchFamily="18" charset="0"/>
+              </a:rPr>
+              <a:t>Mikolov, T., Chen, K., Corrado, G., &amp; Dean, J. (2013). Efficient estimation of word representations in vector space. </a:t>
+            </a:r>
+            <a:r>
+              <a:rPr lang="en-US" sz="1600" i="1" dirty="0">
+                <a:latin typeface="Times New Roman" panose="02020603050405020304" pitchFamily="18" charset="0"/>
+                <a:cs typeface="Times New Roman" panose="02020603050405020304" pitchFamily="18" charset="0"/>
+              </a:rPr>
+              <a:t>arXiv preprint arXiv:1301.3781</a:t>
+            </a:r>
+            <a:r>
+              <a:rPr lang="en-US" sz="1600" dirty="0">
+                <a:latin typeface="Times New Roman" panose="02020603050405020304" pitchFamily="18" charset="0"/>
+                <a:cs typeface="Times New Roman" panose="02020603050405020304" pitchFamily="18" charset="0"/>
+              </a:rPr>
+              <a:t>.</a:t>
+            </a:r>
+          </a:p>
+          <a:p>
+            <a:pPr marL="342900" indent="-342900">
+              <a:lnSpc>
+                <a:spcPct val="100000"/>
+              </a:lnSpc>
+              <a:spcBef>
+                <a:spcPts val="600"/>
+              </a:spcBef>
+              <a:buFont typeface="Arial" panose="020B0604020202020204" pitchFamily="34" charset="0"/>
+              <a:buChar char="•"/>
+            </a:pPr>
+            <a:r>
+              <a:rPr lang="en-US" sz="1600" dirty="0">
+                <a:latin typeface="Times New Roman" panose="02020603050405020304" pitchFamily="18" charset="0"/>
+                <a:cs typeface="Times New Roman" panose="02020603050405020304" pitchFamily="18" charset="0"/>
+              </a:rPr>
+              <a:t>Pedregosa, F., Varoquaux, G., Gramfort, A., Michel, V., Thirion, B., Grisel, O., ... &amp; Duchesnay, É. (2011). Scikit-learn: Machine learning in Python. </a:t>
+            </a:r>
+            <a:r>
+              <a:rPr lang="en-US" sz="1600" i="1" dirty="0">
+                <a:latin typeface="Times New Roman" panose="02020603050405020304" pitchFamily="18" charset="0"/>
+                <a:cs typeface="Times New Roman" panose="02020603050405020304" pitchFamily="18" charset="0"/>
+              </a:rPr>
+              <a:t>the Journal of machine Learning research, 12</a:t>
+            </a:r>
+            <a:r>
+              <a:rPr lang="en-US" sz="1600" dirty="0">
+                <a:latin typeface="Times New Roman" panose="02020603050405020304" pitchFamily="18" charset="0"/>
+                <a:cs typeface="Times New Roman" panose="02020603050405020304" pitchFamily="18" charset="0"/>
+              </a:rPr>
+              <a:t>, 2825-2830.</a:t>
+            </a:r>
+          </a:p>
+          <a:p>
+            <a:pPr marL="342900" indent="-342900">
+              <a:lnSpc>
+                <a:spcPct val="100000"/>
+              </a:lnSpc>
+              <a:spcBef>
+                <a:spcPts val="600"/>
+              </a:spcBef>
+              <a:buFont typeface="Arial" panose="020B0604020202020204" pitchFamily="34" charset="0"/>
+              <a:buChar char="•"/>
+            </a:pPr>
+            <a:r>
+              <a:rPr lang="en-US" sz="1600" dirty="0">
+                <a:latin typeface="Times New Roman" panose="02020603050405020304" pitchFamily="18" charset="0"/>
+                <a:cs typeface="Times New Roman" panose="02020603050405020304" pitchFamily="18" charset="0"/>
+              </a:rPr>
+              <a:t>Salloum, S., Dautov, R., Chen, X., Peng, P. X., &amp; Huang, J. Z. (2016). Big data analytics on Apache Spark. </a:t>
+            </a:r>
+            <a:r>
+              <a:rPr lang="en-US" sz="1600" i="1" dirty="0">
+                <a:latin typeface="Times New Roman" panose="02020603050405020304" pitchFamily="18" charset="0"/>
+                <a:cs typeface="Times New Roman" panose="02020603050405020304" pitchFamily="18" charset="0"/>
+              </a:rPr>
+              <a:t>International Journal of Data Science and Analytics, 1</a:t>
+            </a:r>
+            <a:r>
+              <a:rPr lang="en-US" sz="1600" dirty="0">
+                <a:latin typeface="Times New Roman" panose="02020603050405020304" pitchFamily="18" charset="0"/>
+                <a:cs typeface="Times New Roman" panose="02020603050405020304" pitchFamily="18" charset="0"/>
+              </a:rPr>
+              <a:t>(3), 145-164.</a:t>
+            </a:r>
+          </a:p>
+          <a:p>
+            <a:pPr marL="342900" indent="-342900">
+              <a:lnSpc>
+                <a:spcPct val="100000"/>
+              </a:lnSpc>
+              <a:spcBef>
+                <a:spcPts val="600"/>
+              </a:spcBef>
+              <a:buFont typeface="Arial" panose="020B0604020202020204" pitchFamily="34" charset="0"/>
+              <a:buChar char="•"/>
+            </a:pPr>
+            <a:r>
+              <a:rPr lang="en-US" sz="1600" dirty="0">
+                <a:latin typeface="Times New Roman" panose="02020603050405020304" pitchFamily="18" charset="0"/>
+                <a:cs typeface="Times New Roman" panose="02020603050405020304" pitchFamily="18" charset="0"/>
+              </a:rPr>
+              <a:t>Salton, G., &amp; Buckley, C. (1988). Term-weighting approaches in automatic text retrieval. </a:t>
+            </a:r>
+            <a:r>
+              <a:rPr lang="en-US" sz="1600" i="1" dirty="0">
+                <a:latin typeface="Times New Roman" panose="02020603050405020304" pitchFamily="18" charset="0"/>
+                <a:cs typeface="Times New Roman" panose="02020603050405020304" pitchFamily="18" charset="0"/>
+              </a:rPr>
+              <a:t>Information processing &amp; management, 24</a:t>
+            </a:r>
+            <a:r>
+              <a:rPr lang="en-US" sz="1600" dirty="0">
+                <a:latin typeface="Times New Roman" panose="02020603050405020304" pitchFamily="18" charset="0"/>
+                <a:cs typeface="Times New Roman" panose="02020603050405020304" pitchFamily="18" charset="0"/>
+              </a:rPr>
+              <a:t>(5), 513-523.</a:t>
+            </a:r>
+          </a:p>
+          <a:p>
+            <a:pPr marL="342900" indent="-342900">
+              <a:lnSpc>
+                <a:spcPct val="100000"/>
+              </a:lnSpc>
+              <a:spcBef>
+                <a:spcPts val="600"/>
+              </a:spcBef>
+              <a:buFont typeface="Arial" panose="020B0604020202020204" pitchFamily="34" charset="0"/>
+              <a:buChar char="•"/>
+            </a:pPr>
+            <a:r>
+              <a:rPr lang="en-US" sz="1600" dirty="0">
+                <a:latin typeface="Times New Roman" panose="02020603050405020304" pitchFamily="18" charset="0"/>
+                <a:cs typeface="Times New Roman" panose="02020603050405020304" pitchFamily="18" charset="0"/>
+              </a:rPr>
+              <a:t>Zaharia, M., Chowdhury, M., Franklin, M. J., Shenker, S., &amp; Stoica, I. (2010). Spark: Cluster computing with working sets. In </a:t>
+            </a:r>
+            <a:r>
+              <a:rPr lang="en-US" sz="1600" i="1" dirty="0">
+                <a:latin typeface="Times New Roman" panose="02020603050405020304" pitchFamily="18" charset="0"/>
+                <a:cs typeface="Times New Roman" panose="02020603050405020304" pitchFamily="18" charset="0"/>
+              </a:rPr>
+              <a:t>2nd USENIX workshop on hot topics in cloud computing (HotCloud 10).</a:t>
+            </a:r>
+          </a:p>
+        </p:txBody>
+      </p:sp>
+    </p:spTree>
+    <p:extLst>
+      <p:ext uri="{BB962C8B-B14F-4D97-AF65-F5344CB8AC3E}">
+        <p14:creationId xmlns:p14="http://schemas.microsoft.com/office/powerpoint/2010/main" val="1528485994"/>
+      </p:ext>
+    </p:extLst>
+  </p:cSld>
+  <p:clrMapOvr>
+    <a:masterClrMapping/>
+  </p:clrMapOvr>
+</p:sld>
+</file>
+
+<file path=ppt/slides/slide39.xml><?xml version="1.0" encoding="utf-8"?>
+<p:sld xmlns:a="http://schemas.openxmlformats.org/drawingml/2006/main" xmlns:r="http://schemas.openxmlformats.org/officeDocument/2006/relationships" xmlns:p="http://schemas.openxmlformats.org/presentationml/2006/main">
+  <p:cSld>
+    <p:spTree>
+      <p:nvGrpSpPr>
+        <p:cNvPr id="1" name="">
+          <a:extLst>
+            <a:ext uri="{FF2B5EF4-FFF2-40B4-BE49-F238E27FC236}">
+              <a16:creationId xmlns:a16="http://schemas.microsoft.com/office/drawing/2014/main" id="{766ADD25-4AF5-2C11-35F4-420BD63DFA08}"/>
+            </a:ext>
+          </a:extLst>
+        </p:cNvPr>
+        <p:cNvGrpSpPr/>
+        <p:nvPr/>
+      </p:nvGrpSpPr>
+      <p:grpSpPr>
+        <a:xfrm>
+          <a:off x="0" y="0"/>
+          <a:ext cx="0" cy="0"/>
+          <a:chOff x="0" y="0"/>
+          <a:chExt cx="0" cy="0"/>
+        </a:xfrm>
+      </p:grpSpPr>
+      <p:sp>
+        <p:nvSpPr>
+          <p:cNvPr id="6" name="Slide Number Placeholder 5">
+            <a:extLst>
+              <a:ext uri="{FF2B5EF4-FFF2-40B4-BE49-F238E27FC236}">
+                <a16:creationId xmlns:a16="http://schemas.microsoft.com/office/drawing/2014/main" id="{942D928B-D8DD-4019-6D78-8B2C7C247646}"/>
+              </a:ext>
+            </a:extLst>
+          </p:cNvPr>
+          <p:cNvSpPr>
+            <a:spLocks noGrp="1"/>
+          </p:cNvSpPr>
+          <p:nvPr>
+            <p:ph type="sldNum" sz="quarter" idx="12"/>
+          </p:nvPr>
+        </p:nvSpPr>
+        <p:spPr/>
+        <p:txBody>
+          <a:bodyPr/>
+          <a:lstStyle/>
+          <a:p>
+            <a:fld id="{B5CEABB6-07DC-46E8-9B57-56EC44A396E5}" type="slidenum">
+              <a:rPr lang="en-US" smtClean="0"/>
+              <a:pPr/>
+              <a:t>39</a:t>
+            </a:fld>
+            <a:endParaRPr lang="en-US" dirty="0"/>
+          </a:p>
+        </p:txBody>
+      </p:sp>
+      <p:sp>
+        <p:nvSpPr>
+          <p:cNvPr id="5" name="TextBox 4">
+            <a:extLst>
+              <a:ext uri="{FF2B5EF4-FFF2-40B4-BE49-F238E27FC236}">
+                <a16:creationId xmlns:a16="http://schemas.microsoft.com/office/drawing/2014/main" id="{F79E4432-72BF-5A6E-022F-86BB04770448}"/>
+              </a:ext>
+            </a:extLst>
+          </p:cNvPr>
+          <p:cNvSpPr txBox="1"/>
+          <p:nvPr/>
+        </p:nvSpPr>
+        <p:spPr>
+          <a:xfrm>
+            <a:off x="765109" y="2470746"/>
+            <a:ext cx="5505061" cy="1077218"/>
+          </a:xfrm>
+          <a:prstGeom prst="rect">
+            <a:avLst/>
+          </a:prstGeom>
+          <a:noFill/>
+        </p:spPr>
+        <p:txBody>
+          <a:bodyPr wrap="square">
+            <a:spAutoFit/>
+          </a:bodyPr>
+          <a:lstStyle/>
+          <a:p>
+            <a:pPr algn="ctr"/>
+            <a:r>
+              <a:rPr sz="6400" b="1" dirty="0">
+                <a:solidFill>
+                  <a:srgbClr val="FFFFFF"/>
+                </a:solidFill>
+                <a:latin typeface="Calibri"/>
+              </a:rPr>
+              <a:t>Thank You</a:t>
+            </a:r>
+          </a:p>
+        </p:txBody>
+      </p:sp>
+      <p:sp>
+        <p:nvSpPr>
+          <p:cNvPr id="9" name="TextBox 8">
+            <a:extLst>
+              <a:ext uri="{FF2B5EF4-FFF2-40B4-BE49-F238E27FC236}">
+                <a16:creationId xmlns:a16="http://schemas.microsoft.com/office/drawing/2014/main" id="{381CAB59-54C3-CFDE-025F-9696EA90A977}"/>
+              </a:ext>
+            </a:extLst>
+          </p:cNvPr>
+          <p:cNvSpPr txBox="1"/>
+          <p:nvPr/>
+        </p:nvSpPr>
+        <p:spPr>
+          <a:xfrm>
+            <a:off x="1219200" y="3779521"/>
+            <a:ext cx="4621763" cy="543675"/>
+          </a:xfrm>
+          <a:prstGeom prst="rect">
+            <a:avLst/>
+          </a:prstGeom>
+          <a:noFill/>
+        </p:spPr>
+        <p:txBody>
+          <a:bodyPr wrap="square">
+            <a:spAutoFit/>
+          </a:bodyPr>
+          <a:lstStyle/>
+          <a:p>
+            <a:pPr algn="ctr"/>
+            <a:r>
+              <a:rPr sz="2933">
+                <a:solidFill>
+                  <a:srgbClr val="FFFFFF"/>
+                </a:solidFill>
+                <a:latin typeface="Calibri"/>
+              </a:rPr>
+              <a:t>Questions &amp; Discussion</a:t>
+            </a:r>
+          </a:p>
+        </p:txBody>
+      </p:sp>
+    </p:spTree>
+    <p:extLst>
+      <p:ext uri="{BB962C8B-B14F-4D97-AF65-F5344CB8AC3E}">
+        <p14:creationId xmlns:p14="http://schemas.microsoft.com/office/powerpoint/2010/main" val="1390334377"/>
+      </p:ext>
+    </p:extLst>
+  </p:cSld>
+  <p:clrMapOvr>
+    <a:masterClrMapping/>
+  </p:clrMapOvr>
+</p:sld>
+</file>
+
 <file path=ppt/slides/slide4.xml><?xml version="1.0" encoding="utf-8"?>
 <p:sld xmlns:a="http://schemas.openxmlformats.org/drawingml/2006/main" xmlns:r="http://schemas.openxmlformats.org/officeDocument/2006/relationships" xmlns:p="http://schemas.openxmlformats.org/presentationml/2006/main">
   <p:cSld>
@@ -32941,18 +35298,11 @@
               <a:buChar char="•"/>
             </a:pPr>
             <a:r>
-              <a:rPr lang="en-US" sz="2000" dirty="0" err="1">
-                <a:latin typeface="Times New Roman" panose="02020603050405020304" pitchFamily="18" charset="0"/>
-                <a:cs typeface="Times New Roman" panose="02020603050405020304" pitchFamily="18" charset="0"/>
-              </a:rPr>
-              <a:t>LLaMA</a:t>
-            </a:r>
-            <a:r>
               <a:rPr lang="en-US" sz="2000" dirty="0">
                 <a:latin typeface="Times New Roman" panose="02020603050405020304" pitchFamily="18" charset="0"/>
                 <a:cs typeface="Times New Roman" panose="02020603050405020304" pitchFamily="18" charset="0"/>
               </a:rPr>
-              <a:t> </a:t>
+              <a:t>LLaMA </a:t>
             </a:r>
           </a:p>
           <a:p>
@@ -33369,21 +35719,7 @@
                 <a:latin typeface="Times New Roman" panose="02020603050405020304" pitchFamily="18" charset="0"/>
                 <a:cs typeface="Times New Roman" panose="02020603050405020304" pitchFamily="18" charset="0"/>
               </a:rPr>
-              <a:t>Google </a:t>
-            </a:r>
-            <a:r>
-              <a:rPr lang="en-US" sz="2000" dirty="0" err="1">
-                <a:latin typeface="Times New Roman" panose="02020603050405020304" pitchFamily="18" charset="0"/>
-                <a:cs typeface="Times New Roman" panose="02020603050405020304" pitchFamily="18" charset="0"/>
-              </a:rPr>
-              <a:t>Colab</a:t>
-            </a:r>
-            <a:r>
-              <a:rPr lang="en-US" sz="2000" dirty="0">
-                <a:latin typeface="Times New Roman" panose="02020603050405020304" pitchFamily="18" charset="0"/>
-                <a:cs typeface="Times New Roman" panose="02020603050405020304" pitchFamily="18" charset="0"/>
-              </a:rPr>
-              <a:t> </a:t>
+              <a:t>Google Colab </a:t>
             </a:r>
           </a:p>
           <a:p>
@@ -33411,18 +35747,11 @@
               <a:buChar char="•"/>
             </a:pPr>
             <a:r>
-              <a:rPr lang="en-US" sz="2000" dirty="0" err="1">
-                <a:latin typeface="Times New Roman" panose="02020603050405020304" pitchFamily="18" charset="0"/>
-                <a:cs typeface="Times New Roman" panose="02020603050405020304" pitchFamily="18" charset="0"/>
-              </a:rPr>
-              <a:t>PySpark</a:t>
-            </a:r>
-            <a:r>
               <a:rPr lang="en-US" sz="2000" dirty="0">
                 <a:latin typeface="Times New Roman" panose="02020603050405020304" pitchFamily="18" charset="0"/>
                 <a:cs typeface="Times New Roman" panose="02020603050405020304" pitchFamily="18" charset="0"/>
               </a:rPr>
-              <a:t> </a:t>
+              <a:t>PySpark </a:t>
             </a:r>
           </a:p>
           <a:p>
@@ -33438,21 +35767,7 @@
                 <a:latin typeface="Times New Roman" panose="02020603050405020304" pitchFamily="18" charset="0"/>
                 <a:cs typeface="Times New Roman" panose="02020603050405020304" pitchFamily="18" charset="0"/>
               </a:rPr>
-              <a:t>Spark </a:t>
-            </a:r>
-            <a:r>
-              <a:rPr lang="en-US" sz="2000" dirty="0" err="1">
-                <a:latin typeface="Times New Roman" panose="02020603050405020304" pitchFamily="18" charset="0"/>
-                <a:cs typeface="Times New Roman" panose="02020603050405020304" pitchFamily="18" charset="0"/>
-              </a:rPr>
-              <a:t>MLlib</a:t>
-            </a:r>
-            <a:r>
-              <a:rPr lang="en-US" sz="2000" dirty="0">
-                <a:latin typeface="Times New Roman" panose="02020603050405020304" pitchFamily="18" charset="0"/>
-                <a:cs typeface="Times New Roman" panose="02020603050405020304" pitchFamily="18" charset="0"/>
-              </a:rPr>
-              <a:t> </a:t>
+              <a:t>Spark MLlib </a:t>
             </a:r>
           </a:p>
           <a:p>

--- a/reports/presentation/Arabic_AI_Text_Detection_Project.pptx
+++ b/reports/presentation/Arabic_AI_Text_Detection_Project.pptx
@@ -1,14 +1,14 @@
 
 <file path=ppt/presentation.xml><?xml version="1.0" encoding="utf-8"?>
-<p:presentation xmlns:a="http://schemas.openxmlformats.org/drawingml/2006/main" xmlns:r="http://schemas.openxmlformats.org/officeDocument/2006/relationships" xmlns:p="http://schemas.openxmlformats.org/presentationml/2006/main" showSpecialPlsOnTitleSld="0" removePersonalInfoOnSave="1" saveSubsetFonts="1" autoCompressPictures="0">
+<p:presentation xmlns:a="http://schemas.openxmlformats.org/drawingml/2006/main" xmlns:r="http://schemas.openxmlformats.org/officeDocument/2006/relationships" xmlns:p="http://schemas.openxmlformats.org/presentationml/2006/main" showSpecialPlsOnTitleSld="0" saveSubsetFonts="1" autoCompressPictures="0">
   <p:sldMasterIdLst>
     <p:sldMasterId id="2147483648" r:id="rId1"/>
   </p:sldMasterIdLst>
   <p:notesMasterIdLst>
-    <p:notesMasterId r:id="rId41"/>
+    <p:notesMasterId r:id="rId42"/>
   </p:notesMasterIdLst>
   <p:handoutMasterIdLst>
-    <p:handoutMasterId r:id="rId42"/>
+    <p:handoutMasterId r:id="rId43"/>
   </p:handoutMasterIdLst>
   <p:sldIdLst>
     <p:sldId id="313" r:id="rId2"/>
@@ -35,21 +35,22 @@
     <p:sldId id="392" r:id="rId23"/>
     <p:sldId id="394" r:id="rId24"/>
     <p:sldId id="395" r:id="rId25"/>
-    <p:sldId id="408" r:id="rId26"/>
-    <p:sldId id="409" r:id="rId27"/>
-    <p:sldId id="396" r:id="rId28"/>
-    <p:sldId id="398" r:id="rId29"/>
-    <p:sldId id="399" r:id="rId30"/>
-    <p:sldId id="401" r:id="rId31"/>
-    <p:sldId id="402" r:id="rId32"/>
-    <p:sldId id="403" r:id="rId33"/>
-    <p:sldId id="404" r:id="rId34"/>
-    <p:sldId id="405" r:id="rId35"/>
-    <p:sldId id="406" r:id="rId36"/>
-    <p:sldId id="407" r:id="rId37"/>
-    <p:sldId id="410" r:id="rId38"/>
-    <p:sldId id="411" r:id="rId39"/>
-    <p:sldId id="365" r:id="rId40"/>
+    <p:sldId id="412" r:id="rId26"/>
+    <p:sldId id="413" r:id="rId27"/>
+    <p:sldId id="414" r:id="rId28"/>
+    <p:sldId id="396" r:id="rId29"/>
+    <p:sldId id="398" r:id="rId30"/>
+    <p:sldId id="399" r:id="rId31"/>
+    <p:sldId id="401" r:id="rId32"/>
+    <p:sldId id="402" r:id="rId33"/>
+    <p:sldId id="403" r:id="rId34"/>
+    <p:sldId id="404" r:id="rId35"/>
+    <p:sldId id="405" r:id="rId36"/>
+    <p:sldId id="406" r:id="rId37"/>
+    <p:sldId id="407" r:id="rId38"/>
+    <p:sldId id="410" r:id="rId39"/>
+    <p:sldId id="411" r:id="rId40"/>
+    <p:sldId id="365" r:id="rId41"/>
   </p:sldIdLst>
   <p:sldSz cx="12192000" cy="6858000"/>
   <p:notesSz cx="6858000" cy="9144000"/>
@@ -185,6 +186,324 @@
 <p:cmAuthorLst xmlns:a="http://schemas.openxmlformats.org/drawingml/2006/main" xmlns:r="http://schemas.openxmlformats.org/officeDocument/2006/relationships" xmlns:p="http://schemas.openxmlformats.org/presentationml/2006/main">
   <p:cmAuthor id="2" name="Author" initials="A" lastIdx="0" clrIdx="1"/>
 </p:cmAuthorLst>
+</file>
+
+<file path=ppt/changesInfos/changesInfo1.xml><?xml version="1.0" encoding="utf-8"?>
+<pc:chgInfo xmlns:a="http://schemas.openxmlformats.org/drawingml/2006/main" xmlns:r="http://schemas.openxmlformats.org/officeDocument/2006/relationships" xmlns:ac="http://schemas.microsoft.com/office/drawing/2013/main/command" xmlns:pc="http://schemas.microsoft.com/office/powerpoint/2013/main/command">
+  <pc:docChgLst>
+    <pc:chgData name="Sami Almoadawi" userId="892e1c4cc8448f51" providerId="LiveId" clId="{5AE286DA-93F6-404A-8137-8746495C4F8B}"/>
+    <pc:docChg chg="undo redo custSel mod addSld delSld modSld sldOrd">
+      <pc:chgData name="Sami Almoadawi" userId="892e1c4cc8448f51" providerId="LiveId" clId="{5AE286DA-93F6-404A-8137-8746495C4F8B}" dt="2026-05-20T18:25:34.391" v="197" actId="14100"/>
+      <pc:docMkLst>
+        <pc:docMk/>
+      </pc:docMkLst>
+      <pc:sldChg chg="addSp delSp modSp mod">
+        <pc:chgData name="Sami Almoadawi" userId="892e1c4cc8448f51" providerId="LiveId" clId="{5AE286DA-93F6-404A-8137-8746495C4F8B}" dt="2026-05-20T18:25:34.391" v="197" actId="14100"/>
+        <pc:sldMkLst>
+          <pc:docMk/>
+          <pc:sldMk cId="657783824" sldId="313"/>
+        </pc:sldMkLst>
+        <pc:spChg chg="mod">
+          <ac:chgData name="Sami Almoadawi" userId="892e1c4cc8448f51" providerId="LiveId" clId="{5AE286DA-93F6-404A-8137-8746495C4F8B}" dt="2026-05-20T17:39:05.817" v="195" actId="404"/>
+          <ac:spMkLst>
+            <pc:docMk/>
+            <pc:sldMk cId="657783824" sldId="313"/>
+            <ac:spMk id="2" creationId="{CA264C7C-760E-8914-2F73-459EB4E737B5}"/>
+          </ac:spMkLst>
+        </pc:spChg>
+        <pc:spChg chg="mod">
+          <ac:chgData name="Sami Almoadawi" userId="892e1c4cc8448f51" providerId="LiveId" clId="{5AE286DA-93F6-404A-8137-8746495C4F8B}" dt="2026-05-20T17:38:55.818" v="193" actId="1076"/>
+          <ac:spMkLst>
+            <pc:docMk/>
+            <pc:sldMk cId="657783824" sldId="313"/>
+            <ac:spMk id="3" creationId="{025E281F-A142-3008-1081-8504F2E49EF7}"/>
+          </ac:spMkLst>
+        </pc:spChg>
+        <pc:spChg chg="mod">
+          <ac:chgData name="Sami Almoadawi" userId="892e1c4cc8448f51" providerId="LiveId" clId="{5AE286DA-93F6-404A-8137-8746495C4F8B}" dt="2026-05-20T18:25:34.391" v="197" actId="14100"/>
+          <ac:spMkLst>
+            <pc:docMk/>
+            <pc:sldMk cId="657783824" sldId="313"/>
+            <ac:spMk id="4" creationId="{0B784B38-C335-9122-2004-673D27B0749D}"/>
+          </ac:spMkLst>
+        </pc:spChg>
+        <pc:spChg chg="add del">
+          <ac:chgData name="Sami Almoadawi" userId="892e1c4cc8448f51" providerId="LiveId" clId="{5AE286DA-93F6-404A-8137-8746495C4F8B}" dt="2026-05-20T17:37:33.536" v="183" actId="11529"/>
+          <ac:spMkLst>
+            <pc:docMk/>
+            <pc:sldMk cId="657783824" sldId="313"/>
+            <ac:spMk id="5" creationId="{E2E84107-B26D-FCED-0CC8-6A147B2544DA}"/>
+          </ac:spMkLst>
+        </pc:spChg>
+      </pc:sldChg>
+      <pc:sldChg chg="addSp delSp modSp mod">
+        <pc:chgData name="Sami Almoadawi" userId="892e1c4cc8448f51" providerId="LiveId" clId="{5AE286DA-93F6-404A-8137-8746495C4F8B}" dt="2026-05-20T16:53:51.870" v="39" actId="14100"/>
+        <pc:sldMkLst>
+          <pc:docMk/>
+          <pc:sldMk cId="7277093" sldId="395"/>
+        </pc:sldMkLst>
+        <pc:spChg chg="del">
+          <ac:chgData name="Sami Almoadawi" userId="892e1c4cc8448f51" providerId="LiveId" clId="{5AE286DA-93F6-404A-8137-8746495C4F8B}" dt="2026-05-20T16:52:45.826" v="30" actId="478"/>
+          <ac:spMkLst>
+            <pc:docMk/>
+            <pc:sldMk cId="7277093" sldId="395"/>
+            <ac:spMk id="3" creationId="{E83AC41C-11B2-91DD-FA83-653FDC18A89C}"/>
+          </ac:spMkLst>
+        </pc:spChg>
+        <pc:picChg chg="mod">
+          <ac:chgData name="Sami Almoadawi" userId="892e1c4cc8448f51" providerId="LiveId" clId="{5AE286DA-93F6-404A-8137-8746495C4F8B}" dt="2026-05-20T16:53:02.326" v="33" actId="1076"/>
+          <ac:picMkLst>
+            <pc:docMk/>
+            <pc:sldMk cId="7277093" sldId="395"/>
+            <ac:picMk id="4" creationId="{1CF8C427-BE81-AA7F-B335-69C07F50B39B}"/>
+          </ac:picMkLst>
+        </pc:picChg>
+        <pc:picChg chg="add mod">
+          <ac:chgData name="Sami Almoadawi" userId="892e1c4cc8448f51" providerId="LiveId" clId="{5AE286DA-93F6-404A-8137-8746495C4F8B}" dt="2026-05-20T16:53:51.870" v="39" actId="14100"/>
+          <ac:picMkLst>
+            <pc:docMk/>
+            <pc:sldMk cId="7277093" sldId="395"/>
+            <ac:picMk id="5" creationId="{3D283E7F-5CD7-506D-254A-3657E8A2CF34}"/>
+          </ac:picMkLst>
+        </pc:picChg>
+      </pc:sldChg>
+      <pc:sldChg chg="delSp add del mod">
+        <pc:chgData name="Sami Almoadawi" userId="892e1c4cc8448f51" providerId="LiveId" clId="{5AE286DA-93F6-404A-8137-8746495C4F8B}" dt="2026-05-20T16:57:26.225" v="93" actId="47"/>
+        <pc:sldMkLst>
+          <pc:docMk/>
+          <pc:sldMk cId="4057666101" sldId="408"/>
+        </pc:sldMkLst>
+        <pc:picChg chg="del">
+          <ac:chgData name="Sami Almoadawi" userId="892e1c4cc8448f51" providerId="LiveId" clId="{5AE286DA-93F6-404A-8137-8746495C4F8B}" dt="2026-05-20T16:55:23.211" v="68" actId="21"/>
+          <ac:picMkLst>
+            <pc:docMk/>
+            <pc:sldMk cId="4057666101" sldId="408"/>
+            <ac:picMk id="4" creationId="{40172F71-3355-D51C-5F9B-EC06562FB656}"/>
+          </ac:picMkLst>
+        </pc:picChg>
+      </pc:sldChg>
+      <pc:sldChg chg="delSp add del mod">
+        <pc:chgData name="Sami Almoadawi" userId="892e1c4cc8448f51" providerId="LiveId" clId="{5AE286DA-93F6-404A-8137-8746495C4F8B}" dt="2026-05-20T16:57:31.768" v="95" actId="47"/>
+        <pc:sldMkLst>
+          <pc:docMk/>
+          <pc:sldMk cId="3415957113" sldId="409"/>
+        </pc:sldMkLst>
+        <pc:picChg chg="del">
+          <ac:chgData name="Sami Almoadawi" userId="892e1c4cc8448f51" providerId="LiveId" clId="{5AE286DA-93F6-404A-8137-8746495C4F8B}" dt="2026-05-20T16:57:29.870" v="94" actId="21"/>
+          <ac:picMkLst>
+            <pc:docMk/>
+            <pc:sldMk cId="3415957113" sldId="409"/>
+            <ac:picMk id="4" creationId="{CC3641EE-7485-E1FB-596E-0C292E0F88E9}"/>
+          </ac:picMkLst>
+        </pc:picChg>
+      </pc:sldChg>
+      <pc:sldChg chg="addSp delSp modSp add del mod ord">
+        <pc:chgData name="Sami Almoadawi" userId="892e1c4cc8448f51" providerId="LiveId" clId="{5AE286DA-93F6-404A-8137-8746495C4F8B}" dt="2026-05-20T16:52:38.749" v="28" actId="47"/>
+        <pc:sldMkLst>
+          <pc:docMk/>
+          <pc:sldMk cId="692940834" sldId="412"/>
+        </pc:sldMkLst>
+        <pc:spChg chg="del">
+          <ac:chgData name="Sami Almoadawi" userId="892e1c4cc8448f51" providerId="LiveId" clId="{5AE286DA-93F6-404A-8137-8746495C4F8B}" dt="2026-05-20T16:49:49.246" v="5" actId="478"/>
+          <ac:spMkLst>
+            <pc:docMk/>
+            <pc:sldMk cId="692940834" sldId="412"/>
+            <ac:spMk id="3" creationId="{9DC0F207-C67D-7BCC-39D1-28EB26653CBC}"/>
+          </ac:spMkLst>
+        </pc:spChg>
+        <pc:picChg chg="del">
+          <ac:chgData name="Sami Almoadawi" userId="892e1c4cc8448f51" providerId="LiveId" clId="{5AE286DA-93F6-404A-8137-8746495C4F8B}" dt="2026-05-20T16:49:46.866" v="4" actId="478"/>
+          <ac:picMkLst>
+            <pc:docMk/>
+            <pc:sldMk cId="692940834" sldId="412"/>
+            <ac:picMk id="4" creationId="{1A9FEE5C-8379-EDD6-DCBB-CBE7EDA6951F}"/>
+          </ac:picMkLst>
+        </pc:picChg>
+        <pc:picChg chg="add mod">
+          <ac:chgData name="Sami Almoadawi" userId="892e1c4cc8448f51" providerId="LiveId" clId="{5AE286DA-93F6-404A-8137-8746495C4F8B}" dt="2026-05-20T16:50:28.983" v="27" actId="1440"/>
+          <ac:picMkLst>
+            <pc:docMk/>
+            <pc:sldMk cId="692940834" sldId="412"/>
+            <ac:picMk id="7" creationId="{C4FBF797-62E8-E2A4-4A7D-DBEF8981CB06}"/>
+          </ac:picMkLst>
+        </pc:picChg>
+      </pc:sldChg>
+      <pc:sldChg chg="addSp delSp modSp add mod">
+        <pc:chgData name="Sami Almoadawi" userId="892e1c4cc8448f51" providerId="LiveId" clId="{5AE286DA-93F6-404A-8137-8746495C4F8B}" dt="2026-05-20T17:02:45.989" v="112" actId="14100"/>
+        <pc:sldMkLst>
+          <pc:docMk/>
+          <pc:sldMk cId="4244281817" sldId="412"/>
+        </pc:sldMkLst>
+        <pc:picChg chg="add del mod">
+          <ac:chgData name="Sami Almoadawi" userId="892e1c4cc8448f51" providerId="LiveId" clId="{5AE286DA-93F6-404A-8137-8746495C4F8B}" dt="2026-05-20T16:54:45.084" v="55" actId="22"/>
+          <ac:picMkLst>
+            <pc:docMk/>
+            <pc:sldMk cId="4244281817" sldId="412"/>
+            <ac:picMk id="3" creationId="{0542AFA6-E777-4DD2-4FF0-4C420555C17B}"/>
+          </ac:picMkLst>
+        </pc:picChg>
+        <pc:picChg chg="del">
+          <ac:chgData name="Sami Almoadawi" userId="892e1c4cc8448f51" providerId="LiveId" clId="{5AE286DA-93F6-404A-8137-8746495C4F8B}" dt="2026-05-20T16:55:53.497" v="77" actId="478"/>
+          <ac:picMkLst>
+            <pc:docMk/>
+            <pc:sldMk cId="4244281817" sldId="412"/>
+            <ac:picMk id="4" creationId="{0A8CBE2F-189B-49A9-CDE3-EF60AAB73B25}"/>
+          </ac:picMkLst>
+        </pc:picChg>
+        <pc:picChg chg="add del">
+          <ac:chgData name="Sami Almoadawi" userId="892e1c4cc8448f51" providerId="LiveId" clId="{5AE286DA-93F6-404A-8137-8746495C4F8B}" dt="2026-05-20T16:55:12.383" v="66" actId="478"/>
+          <ac:picMkLst>
+            <pc:docMk/>
+            <pc:sldMk cId="4244281817" sldId="412"/>
+            <ac:picMk id="5" creationId="{2D85F020-D59F-2D39-6698-4CB14D1E1EE7}"/>
+          </ac:picMkLst>
+        </pc:picChg>
+        <pc:picChg chg="add del mod">
+          <ac:chgData name="Sami Almoadawi" userId="892e1c4cc8448f51" providerId="LiveId" clId="{5AE286DA-93F6-404A-8137-8746495C4F8B}" dt="2026-05-20T16:55:59.961" v="79" actId="21"/>
+          <ac:picMkLst>
+            <pc:docMk/>
+            <pc:sldMk cId="4244281817" sldId="412"/>
+            <ac:picMk id="7" creationId="{B0FE41B2-72C4-1B5A-6656-7B5D2527C95C}"/>
+          </ac:picMkLst>
+        </pc:picChg>
+        <pc:picChg chg="add mod">
+          <ac:chgData name="Sami Almoadawi" userId="892e1c4cc8448f51" providerId="LiveId" clId="{5AE286DA-93F6-404A-8137-8746495C4F8B}" dt="2026-05-20T16:56:27.288" v="83" actId="14100"/>
+          <ac:picMkLst>
+            <pc:docMk/>
+            <pc:sldMk cId="4244281817" sldId="412"/>
+            <ac:picMk id="8" creationId="{40172F71-3355-D51C-5F9B-EC06562FB656}"/>
+          </ac:picMkLst>
+        </pc:picChg>
+        <pc:picChg chg="add mod">
+          <ac:chgData name="Sami Almoadawi" userId="892e1c4cc8448f51" providerId="LiveId" clId="{5AE286DA-93F6-404A-8137-8746495C4F8B}" dt="2026-05-20T17:02:45.989" v="112" actId="14100"/>
+          <ac:picMkLst>
+            <pc:docMk/>
+            <pc:sldMk cId="4244281817" sldId="412"/>
+            <ac:picMk id="9" creationId="{B0FE41B2-72C4-1B5A-6656-7B5D2527C95C}"/>
+          </ac:picMkLst>
+        </pc:picChg>
+      </pc:sldChg>
+      <pc:sldChg chg="addSp delSp modSp add mod">
+        <pc:chgData name="Sami Almoadawi" userId="892e1c4cc8448f51" providerId="LiveId" clId="{5AE286DA-93F6-404A-8137-8746495C4F8B}" dt="2026-05-20T17:02:57.988" v="114" actId="14100"/>
+        <pc:sldMkLst>
+          <pc:docMk/>
+          <pc:sldMk cId="1635307528" sldId="413"/>
+        </pc:sldMkLst>
+        <pc:picChg chg="add del mod">
+          <ac:chgData name="Sami Almoadawi" userId="892e1c4cc8448f51" providerId="LiveId" clId="{5AE286DA-93F6-404A-8137-8746495C4F8B}" dt="2026-05-20T16:57:17.789" v="90" actId="21"/>
+          <ac:picMkLst>
+            <pc:docMk/>
+            <pc:sldMk cId="1635307528" sldId="413"/>
+            <ac:picMk id="3" creationId="{9EFE2495-5B89-3715-96B5-91D560716CC8}"/>
+          </ac:picMkLst>
+        </pc:picChg>
+        <pc:picChg chg="del">
+          <ac:chgData name="Sami Almoadawi" userId="892e1c4cc8448f51" providerId="LiveId" clId="{5AE286DA-93F6-404A-8137-8746495C4F8B}" dt="2026-05-20T16:57:56.064" v="103" actId="478"/>
+          <ac:picMkLst>
+            <pc:docMk/>
+            <pc:sldMk cId="1635307528" sldId="413"/>
+            <ac:picMk id="4" creationId="{9EDA9834-850B-1E17-26A8-7E5206F7AA3C}"/>
+          </ac:picMkLst>
+        </pc:picChg>
+        <pc:picChg chg="del">
+          <ac:chgData name="Sami Almoadawi" userId="892e1c4cc8448f51" providerId="LiveId" clId="{5AE286DA-93F6-404A-8137-8746495C4F8B}" dt="2026-05-20T16:57:19.498" v="91" actId="478"/>
+          <ac:picMkLst>
+            <pc:docMk/>
+            <pc:sldMk cId="1635307528" sldId="413"/>
+            <ac:picMk id="5" creationId="{1217F06B-4442-A1FF-79F5-8604B1ABF641}"/>
+          </ac:picMkLst>
+        </pc:picChg>
+        <pc:picChg chg="add del mod">
+          <ac:chgData name="Sami Almoadawi" userId="892e1c4cc8448f51" providerId="LiveId" clId="{5AE286DA-93F6-404A-8137-8746495C4F8B}" dt="2026-05-20T16:58:02.385" v="105" actId="21"/>
+          <ac:picMkLst>
+            <pc:docMk/>
+            <pc:sldMk cId="1635307528" sldId="413"/>
+            <ac:picMk id="7" creationId="{9EFE2495-5B89-3715-96B5-91D560716CC8}"/>
+          </ac:picMkLst>
+        </pc:picChg>
+        <pc:picChg chg="add mod">
+          <ac:chgData name="Sami Almoadawi" userId="892e1c4cc8448f51" providerId="LiveId" clId="{5AE286DA-93F6-404A-8137-8746495C4F8B}" dt="2026-05-20T17:02:57.988" v="114" actId="14100"/>
+          <ac:picMkLst>
+            <pc:docMk/>
+            <pc:sldMk cId="1635307528" sldId="413"/>
+            <ac:picMk id="8" creationId="{CC3641EE-7485-E1FB-596E-0C292E0F88E9}"/>
+          </ac:picMkLst>
+        </pc:picChg>
+        <pc:picChg chg="add mod">
+          <ac:chgData name="Sami Almoadawi" userId="892e1c4cc8448f51" providerId="LiveId" clId="{5AE286DA-93F6-404A-8137-8746495C4F8B}" dt="2026-05-20T17:02:53.575" v="113" actId="14100"/>
+          <ac:picMkLst>
+            <pc:docMk/>
+            <pc:sldMk cId="1635307528" sldId="413"/>
+            <ac:picMk id="9" creationId="{9EFE2495-5B89-3715-96B5-91D560716CC8}"/>
+          </ac:picMkLst>
+        </pc:picChg>
+      </pc:sldChg>
+      <pc:sldChg chg="addSp delSp modSp add mod">
+        <pc:chgData name="Sami Almoadawi" userId="892e1c4cc8448f51" providerId="LiveId" clId="{5AE286DA-93F6-404A-8137-8746495C4F8B}" dt="2026-05-20T17:31:14.226" v="180" actId="1076"/>
+        <pc:sldMkLst>
+          <pc:docMk/>
+          <pc:sldMk cId="525151295" sldId="414"/>
+        </pc:sldMkLst>
+        <pc:spChg chg="mod">
+          <ac:chgData name="Sami Almoadawi" userId="892e1c4cc8448f51" providerId="LiveId" clId="{5AE286DA-93F6-404A-8137-8746495C4F8B}" dt="2026-05-20T17:20:09.397" v="122"/>
+          <ac:spMkLst>
+            <pc:docMk/>
+            <pc:sldMk cId="525151295" sldId="414"/>
+            <ac:spMk id="2" creationId="{6AA9463F-2BED-4C7A-48AC-9AB4BDB3AEEC}"/>
+          </ac:spMkLst>
+        </pc:spChg>
+        <pc:picChg chg="add del mod">
+          <ac:chgData name="Sami Almoadawi" userId="892e1c4cc8448f51" providerId="LiveId" clId="{5AE286DA-93F6-404A-8137-8746495C4F8B}" dt="2026-05-20T17:29:42.606" v="174" actId="478"/>
+          <ac:picMkLst>
+            <pc:docMk/>
+            <pc:sldMk cId="525151295" sldId="414"/>
+            <ac:picMk id="3" creationId="{029595AD-E002-019B-4FD9-2865A7C18644}"/>
+          </ac:picMkLst>
+        </pc:picChg>
+        <pc:picChg chg="add del mod">
+          <ac:chgData name="Sami Almoadawi" userId="892e1c4cc8448f51" providerId="LiveId" clId="{5AE286DA-93F6-404A-8137-8746495C4F8B}" dt="2026-05-20T17:24:45.018" v="163" actId="478"/>
+          <ac:picMkLst>
+            <pc:docMk/>
+            <pc:sldMk cId="525151295" sldId="414"/>
+            <ac:picMk id="4" creationId="{A77549F7-D08C-E234-0399-79DE02CBF89F}"/>
+          </ac:picMkLst>
+        </pc:picChg>
+        <pc:picChg chg="add del mod">
+          <ac:chgData name="Sami Almoadawi" userId="892e1c4cc8448f51" providerId="LiveId" clId="{5AE286DA-93F6-404A-8137-8746495C4F8B}" dt="2026-05-20T17:29:41.722" v="173" actId="478"/>
+          <ac:picMkLst>
+            <pc:docMk/>
+            <pc:sldMk cId="525151295" sldId="414"/>
+            <ac:picMk id="7" creationId="{8B105185-0EC0-7CAD-F9DD-36B0542EE55C}"/>
+          </ac:picMkLst>
+        </pc:picChg>
+        <pc:picChg chg="del">
+          <ac:chgData name="Sami Almoadawi" userId="892e1c4cc8448f51" providerId="LiveId" clId="{5AE286DA-93F6-404A-8137-8746495C4F8B}" dt="2026-05-20T17:17:58.481" v="117" actId="478"/>
+          <ac:picMkLst>
+            <pc:docMk/>
+            <pc:sldMk cId="525151295" sldId="414"/>
+            <ac:picMk id="8" creationId="{6E3503B5-EE00-BD26-A10E-AD188E31D408}"/>
+          </ac:picMkLst>
+        </pc:picChg>
+        <pc:picChg chg="del">
+          <ac:chgData name="Sami Almoadawi" userId="892e1c4cc8448f51" providerId="LiveId" clId="{5AE286DA-93F6-404A-8137-8746495C4F8B}" dt="2026-05-20T17:17:57.724" v="116" actId="478"/>
+          <ac:picMkLst>
+            <pc:docMk/>
+            <pc:sldMk cId="525151295" sldId="414"/>
+            <ac:picMk id="9" creationId="{CAD1A87D-ED00-D001-99A4-682496863533}"/>
+          </ac:picMkLst>
+        </pc:picChg>
+        <pc:picChg chg="add mod">
+          <ac:chgData name="Sami Almoadawi" userId="892e1c4cc8448f51" providerId="LiveId" clId="{5AE286DA-93F6-404A-8137-8746495C4F8B}" dt="2026-05-20T17:31:14.226" v="180" actId="1076"/>
+          <ac:picMkLst>
+            <pc:docMk/>
+            <pc:sldMk cId="525151295" sldId="414"/>
+            <ac:picMk id="10" creationId="{4EB9743A-DEE6-0E8D-7579-83BE2A0713F9}"/>
+          </ac:picMkLst>
+        </pc:picChg>
+      </pc:sldChg>
+    </pc:docChg>
+  </pc:docChgLst>
+</pc:chgInfo>
 </file>
 
 <file path=ppt/handoutMasters/handoutMaster1.xml><?xml version="1.0" encoding="utf-8"?>
@@ -2437,7 +2756,7 @@
         <p:cNvPr id="1" name="">
           <a:extLst>
             <a:ext uri="{FF2B5EF4-FFF2-40B4-BE49-F238E27FC236}">
-              <a16:creationId xmlns:a16="http://schemas.microsoft.com/office/drawing/2014/main" id="{67C0DC22-F8DF-8A79-12F5-279DE3E8ED9C}"/>
+              <a16:creationId xmlns:a16="http://schemas.microsoft.com/office/drawing/2014/main" id="{4FF6FC6C-346A-EE51-187F-0C00DBF12D9B}"/>
             </a:ext>
           </a:extLst>
         </p:cNvPr>
@@ -2457,7 +2776,7 @@
           <p:cNvPr id="2" name="Slide Image Placeholder 1">
             <a:extLst>
               <a:ext uri="{FF2B5EF4-FFF2-40B4-BE49-F238E27FC236}">
-                <a16:creationId xmlns:a16="http://schemas.microsoft.com/office/drawing/2014/main" id="{9E09AB02-2F37-8034-F97A-6CFBA307C669}"/>
+                <a16:creationId xmlns:a16="http://schemas.microsoft.com/office/drawing/2014/main" id="{5CF546A0-A786-4C38-C5BE-16385F35E341}"/>
               </a:ext>
             </a:extLst>
           </p:cNvPr>
@@ -2475,7 +2794,7 @@
           <p:cNvPr id="3" name="Notes Placeholder 2">
             <a:extLst>
               <a:ext uri="{FF2B5EF4-FFF2-40B4-BE49-F238E27FC236}">
-                <a16:creationId xmlns:a16="http://schemas.microsoft.com/office/drawing/2014/main" id="{5BA999D9-C670-9777-2F8B-E9BEFAC6D5EC}"/>
+                <a16:creationId xmlns:a16="http://schemas.microsoft.com/office/drawing/2014/main" id="{54201B5B-D358-DB4F-8DC8-3D7BCAADDDD5}"/>
               </a:ext>
             </a:extLst>
           </p:cNvPr>
@@ -2500,7 +2819,7 @@
           <p:cNvPr id="4" name="Slide Number Placeholder 3">
             <a:extLst>
               <a:ext uri="{FF2B5EF4-FFF2-40B4-BE49-F238E27FC236}">
-                <a16:creationId xmlns:a16="http://schemas.microsoft.com/office/drawing/2014/main" id="{A42C8DF7-D6B8-8978-1153-02FADD91F447}"/>
+                <a16:creationId xmlns:a16="http://schemas.microsoft.com/office/drawing/2014/main" id="{741BC151-9CB5-D852-15D9-CA10FF379FF2}"/>
               </a:ext>
             </a:extLst>
           </p:cNvPr>
@@ -2527,7 +2846,7 @@
     </p:spTree>
     <p:extLst>
       <p:ext uri="{BB962C8B-B14F-4D97-AF65-F5344CB8AC3E}">
-        <p14:creationId xmlns:p14="http://schemas.microsoft.com/office/powerpoint/2010/main" val="2604219419"/>
+        <p14:creationId xmlns:p14="http://schemas.microsoft.com/office/powerpoint/2010/main" val="1278100781"/>
       </p:ext>
     </p:extLst>
   </p:cSld>
@@ -2545,7 +2864,7 @@
         <p:cNvPr id="1" name="">
           <a:extLst>
             <a:ext uri="{FF2B5EF4-FFF2-40B4-BE49-F238E27FC236}">
-              <a16:creationId xmlns:a16="http://schemas.microsoft.com/office/drawing/2014/main" id="{CFA2FA27-6C8E-5FDB-8E9B-5E3F41905583}"/>
+              <a16:creationId xmlns:a16="http://schemas.microsoft.com/office/drawing/2014/main" id="{0612A7E6-AD2D-7E1E-C137-135A50F685A6}"/>
             </a:ext>
           </a:extLst>
         </p:cNvPr>
@@ -2565,7 +2884,7 @@
           <p:cNvPr id="2" name="Slide Image Placeholder 1">
             <a:extLst>
               <a:ext uri="{FF2B5EF4-FFF2-40B4-BE49-F238E27FC236}">
-                <a16:creationId xmlns:a16="http://schemas.microsoft.com/office/drawing/2014/main" id="{0CD0E029-20B3-A48C-E893-94D9E50E6812}"/>
+                <a16:creationId xmlns:a16="http://schemas.microsoft.com/office/drawing/2014/main" id="{0F29817B-3BEE-EBE2-60EE-C4190F47E643}"/>
               </a:ext>
             </a:extLst>
           </p:cNvPr>
@@ -2583,7 +2902,7 @@
           <p:cNvPr id="3" name="Notes Placeholder 2">
             <a:extLst>
               <a:ext uri="{FF2B5EF4-FFF2-40B4-BE49-F238E27FC236}">
-                <a16:creationId xmlns:a16="http://schemas.microsoft.com/office/drawing/2014/main" id="{2BCD3F92-EB3E-9FAB-B90A-B67120BB2E23}"/>
+                <a16:creationId xmlns:a16="http://schemas.microsoft.com/office/drawing/2014/main" id="{E13B0B70-CE5E-E410-1BF6-FB9D7E8634A4}"/>
               </a:ext>
             </a:extLst>
           </p:cNvPr>
@@ -2608,7 +2927,7 @@
           <p:cNvPr id="4" name="Slide Number Placeholder 3">
             <a:extLst>
               <a:ext uri="{FF2B5EF4-FFF2-40B4-BE49-F238E27FC236}">
-                <a16:creationId xmlns:a16="http://schemas.microsoft.com/office/drawing/2014/main" id="{53A0083A-5739-FBF7-9572-E40EC9557EFF}"/>
+                <a16:creationId xmlns:a16="http://schemas.microsoft.com/office/drawing/2014/main" id="{7F232B49-45C0-727D-7D15-C364140892FC}"/>
               </a:ext>
             </a:extLst>
           </p:cNvPr>
@@ -2635,7 +2954,7 @@
     </p:spTree>
     <p:extLst>
       <p:ext uri="{BB962C8B-B14F-4D97-AF65-F5344CB8AC3E}">
-        <p14:creationId xmlns:p14="http://schemas.microsoft.com/office/powerpoint/2010/main" val="2448322575"/>
+        <p14:creationId xmlns:p14="http://schemas.microsoft.com/office/powerpoint/2010/main" val="2592306237"/>
       </p:ext>
     </p:extLst>
   </p:cSld>
@@ -2646,6 +2965,114 @@
 </file>
 
 <file path=ppt/notesSlides/notesSlide26.xml><?xml version="1.0" encoding="utf-8"?>
+<p:notes xmlns:a="http://schemas.openxmlformats.org/drawingml/2006/main" xmlns:r="http://schemas.openxmlformats.org/officeDocument/2006/relationships" xmlns:p="http://schemas.openxmlformats.org/presentationml/2006/main">
+  <p:cSld>
+    <p:spTree>
+      <p:nvGrpSpPr>
+        <p:cNvPr id="1" name="">
+          <a:extLst>
+            <a:ext uri="{FF2B5EF4-FFF2-40B4-BE49-F238E27FC236}">
+              <a16:creationId xmlns:a16="http://schemas.microsoft.com/office/drawing/2014/main" id="{87F22E73-FAB3-7E81-29AF-D17C5A0DD5F9}"/>
+            </a:ext>
+          </a:extLst>
+        </p:cNvPr>
+        <p:cNvGrpSpPr/>
+        <p:nvPr/>
+      </p:nvGrpSpPr>
+      <p:grpSpPr>
+        <a:xfrm>
+          <a:off x="0" y="0"/>
+          <a:ext cx="0" cy="0"/>
+          <a:chOff x="0" y="0"/>
+          <a:chExt cx="0" cy="0"/>
+        </a:xfrm>
+      </p:grpSpPr>
+      <p:sp>
+        <p:nvSpPr>
+          <p:cNvPr id="2" name="Slide Image Placeholder 1">
+            <a:extLst>
+              <a:ext uri="{FF2B5EF4-FFF2-40B4-BE49-F238E27FC236}">
+                <a16:creationId xmlns:a16="http://schemas.microsoft.com/office/drawing/2014/main" id="{C20358B2-8E7E-B857-6290-219E566E41C0}"/>
+              </a:ext>
+            </a:extLst>
+          </p:cNvPr>
+          <p:cNvSpPr>
+            <a:spLocks noGrp="1" noRot="1" noChangeAspect="1"/>
+          </p:cNvSpPr>
+          <p:nvPr>
+            <p:ph type="sldImg"/>
+          </p:nvPr>
+        </p:nvSpPr>
+        <p:spPr/>
+      </p:sp>
+      <p:sp>
+        <p:nvSpPr>
+          <p:cNvPr id="3" name="Notes Placeholder 2">
+            <a:extLst>
+              <a:ext uri="{FF2B5EF4-FFF2-40B4-BE49-F238E27FC236}">
+                <a16:creationId xmlns:a16="http://schemas.microsoft.com/office/drawing/2014/main" id="{75863B0D-62D3-0F44-1508-41F81F9204BC}"/>
+              </a:ext>
+            </a:extLst>
+          </p:cNvPr>
+          <p:cNvSpPr>
+            <a:spLocks noGrp="1"/>
+          </p:cNvSpPr>
+          <p:nvPr>
+            <p:ph type="body" idx="1"/>
+          </p:nvPr>
+        </p:nvSpPr>
+        <p:spPr/>
+        <p:txBody>
+          <a:bodyPr/>
+          <a:lstStyle/>
+          <a:p>
+            <a:endParaRPr lang="en-US" dirty="0"/>
+          </a:p>
+        </p:txBody>
+      </p:sp>
+      <p:sp>
+        <p:nvSpPr>
+          <p:cNvPr id="4" name="Slide Number Placeholder 3">
+            <a:extLst>
+              <a:ext uri="{FF2B5EF4-FFF2-40B4-BE49-F238E27FC236}">
+                <a16:creationId xmlns:a16="http://schemas.microsoft.com/office/drawing/2014/main" id="{D6E5718A-D943-3A6E-C01E-EFA5370FF2DC}"/>
+              </a:ext>
+            </a:extLst>
+          </p:cNvPr>
+          <p:cNvSpPr>
+            <a:spLocks noGrp="1"/>
+          </p:cNvSpPr>
+          <p:nvPr>
+            <p:ph type="sldNum" sz="quarter" idx="5"/>
+          </p:nvPr>
+        </p:nvSpPr>
+        <p:spPr/>
+        <p:txBody>
+          <a:bodyPr/>
+          <a:lstStyle/>
+          <a:p>
+            <a:fld id="{10895658-EA1F-4910-80AB-4DA76E167475}" type="slidenum">
+              <a:rPr lang="en-US" smtClean="0"/>
+              <a:t>27</a:t>
+            </a:fld>
+            <a:endParaRPr lang="en-US" dirty="0"/>
+          </a:p>
+        </p:txBody>
+      </p:sp>
+    </p:spTree>
+    <p:extLst>
+      <p:ext uri="{BB962C8B-B14F-4D97-AF65-F5344CB8AC3E}">
+        <p14:creationId xmlns:p14="http://schemas.microsoft.com/office/powerpoint/2010/main" val="3082102931"/>
+      </p:ext>
+    </p:extLst>
+  </p:cSld>
+  <p:clrMapOvr>
+    <a:masterClrMapping/>
+  </p:clrMapOvr>
+</p:notes>
+</file>
+
+<file path=ppt/notesSlides/notesSlide27.xml><?xml version="1.0" encoding="utf-8"?>
 <p:notes xmlns:a="http://schemas.openxmlformats.org/drawingml/2006/main" xmlns:r="http://schemas.openxmlformats.org/officeDocument/2006/relationships" xmlns:p="http://schemas.openxmlformats.org/presentationml/2006/main">
   <p:cSld>
     <p:spTree>
@@ -2734,7 +3161,7 @@
           <a:p>
             <a:fld id="{10895658-EA1F-4910-80AB-4DA76E167475}" type="slidenum">
               <a:rPr lang="en-US" smtClean="0"/>
-              <a:t>27</a:t>
+              <a:t>28</a:t>
             </a:fld>
             <a:endParaRPr lang="en-US" dirty="0"/>
           </a:p>
@@ -2753,7 +3180,7 @@
 </p:notes>
 </file>
 
-<file path=ppt/notesSlides/notesSlide27.xml><?xml version="1.0" encoding="utf-8"?>
+<file path=ppt/notesSlides/notesSlide28.xml><?xml version="1.0" encoding="utf-8"?>
 <p:notes xmlns:a="http://schemas.openxmlformats.org/drawingml/2006/main" xmlns:r="http://schemas.openxmlformats.org/officeDocument/2006/relationships" xmlns:p="http://schemas.openxmlformats.org/presentationml/2006/main">
   <p:cSld>
     <p:spTree>
@@ -2842,7 +3269,7 @@
           <a:p>
             <a:fld id="{10895658-EA1F-4910-80AB-4DA76E167475}" type="slidenum">
               <a:rPr lang="en-US" smtClean="0"/>
-              <a:t>28</a:t>
+              <a:t>29</a:t>
             </a:fld>
             <a:endParaRPr lang="en-US" dirty="0"/>
           </a:p>
@@ -2861,7 +3288,7 @@
 </p:notes>
 </file>
 
-<file path=ppt/notesSlides/notesSlide28.xml><?xml version="1.0" encoding="utf-8"?>
+<file path=ppt/notesSlides/notesSlide29.xml><?xml version="1.0" encoding="utf-8"?>
 <p:notes xmlns:a="http://schemas.openxmlformats.org/drawingml/2006/main" xmlns:r="http://schemas.openxmlformats.org/officeDocument/2006/relationships" xmlns:p="http://schemas.openxmlformats.org/presentationml/2006/main">
   <p:cSld>
     <p:spTree>
@@ -2950,7 +3377,7 @@
           <a:p>
             <a:fld id="{10895658-EA1F-4910-80AB-4DA76E167475}" type="slidenum">
               <a:rPr lang="en-US" smtClean="0"/>
-              <a:t>29</a:t>
+              <a:t>30</a:t>
             </a:fld>
             <a:endParaRPr lang="en-US" dirty="0"/>
           </a:p>
@@ -2960,114 +3387,6 @@
     <p:extLst>
       <p:ext uri="{BB962C8B-B14F-4D97-AF65-F5344CB8AC3E}">
         <p14:creationId xmlns:p14="http://schemas.microsoft.com/office/powerpoint/2010/main" val="3327442655"/>
-      </p:ext>
-    </p:extLst>
-  </p:cSld>
-  <p:clrMapOvr>
-    <a:masterClrMapping/>
-  </p:clrMapOvr>
-</p:notes>
-</file>
-
-<file path=ppt/notesSlides/notesSlide29.xml><?xml version="1.0" encoding="utf-8"?>
-<p:notes xmlns:a="http://schemas.openxmlformats.org/drawingml/2006/main" xmlns:r="http://schemas.openxmlformats.org/officeDocument/2006/relationships" xmlns:p="http://schemas.openxmlformats.org/presentationml/2006/main">
-  <p:cSld>
-    <p:spTree>
-      <p:nvGrpSpPr>
-        <p:cNvPr id="1" name="">
-          <a:extLst>
-            <a:ext uri="{FF2B5EF4-FFF2-40B4-BE49-F238E27FC236}">
-              <a16:creationId xmlns:a16="http://schemas.microsoft.com/office/drawing/2014/main" id="{35286F1E-5ED9-618C-11C6-BAEA34616EC0}"/>
-            </a:ext>
-          </a:extLst>
-        </p:cNvPr>
-        <p:cNvGrpSpPr/>
-        <p:nvPr/>
-      </p:nvGrpSpPr>
-      <p:grpSpPr>
-        <a:xfrm>
-          <a:off x="0" y="0"/>
-          <a:ext cx="0" cy="0"/>
-          <a:chOff x="0" y="0"/>
-          <a:chExt cx="0" cy="0"/>
-        </a:xfrm>
-      </p:grpSpPr>
-      <p:sp>
-        <p:nvSpPr>
-          <p:cNvPr id="2" name="Slide Image Placeholder 1">
-            <a:extLst>
-              <a:ext uri="{FF2B5EF4-FFF2-40B4-BE49-F238E27FC236}">
-                <a16:creationId xmlns:a16="http://schemas.microsoft.com/office/drawing/2014/main" id="{4D72A68D-0FB7-A1C4-DFA7-EB2E29E3FD53}"/>
-              </a:ext>
-            </a:extLst>
-          </p:cNvPr>
-          <p:cNvSpPr>
-            <a:spLocks noGrp="1" noRot="1" noChangeAspect="1"/>
-          </p:cNvSpPr>
-          <p:nvPr>
-            <p:ph type="sldImg"/>
-          </p:nvPr>
-        </p:nvSpPr>
-        <p:spPr/>
-      </p:sp>
-      <p:sp>
-        <p:nvSpPr>
-          <p:cNvPr id="3" name="Notes Placeholder 2">
-            <a:extLst>
-              <a:ext uri="{FF2B5EF4-FFF2-40B4-BE49-F238E27FC236}">
-                <a16:creationId xmlns:a16="http://schemas.microsoft.com/office/drawing/2014/main" id="{6606F1E3-BD6E-4F1E-8C4E-31A0A1079B63}"/>
-              </a:ext>
-            </a:extLst>
-          </p:cNvPr>
-          <p:cNvSpPr>
-            <a:spLocks noGrp="1"/>
-          </p:cNvSpPr>
-          <p:nvPr>
-            <p:ph type="body" idx="1"/>
-          </p:nvPr>
-        </p:nvSpPr>
-        <p:spPr/>
-        <p:txBody>
-          <a:bodyPr/>
-          <a:lstStyle/>
-          <a:p>
-            <a:endParaRPr lang="en-US" dirty="0"/>
-          </a:p>
-        </p:txBody>
-      </p:sp>
-      <p:sp>
-        <p:nvSpPr>
-          <p:cNvPr id="4" name="Slide Number Placeholder 3">
-            <a:extLst>
-              <a:ext uri="{FF2B5EF4-FFF2-40B4-BE49-F238E27FC236}">
-                <a16:creationId xmlns:a16="http://schemas.microsoft.com/office/drawing/2014/main" id="{81090C2F-093D-DEDD-1338-24BBF7F06425}"/>
-              </a:ext>
-            </a:extLst>
-          </p:cNvPr>
-          <p:cNvSpPr>
-            <a:spLocks noGrp="1"/>
-          </p:cNvSpPr>
-          <p:nvPr>
-            <p:ph type="sldNum" sz="quarter" idx="5"/>
-          </p:nvPr>
-        </p:nvSpPr>
-        <p:spPr/>
-        <p:txBody>
-          <a:bodyPr/>
-          <a:lstStyle/>
-          <a:p>
-            <a:fld id="{10895658-EA1F-4910-80AB-4DA76E167475}" type="slidenum">
-              <a:rPr lang="en-US" smtClean="0"/>
-              <a:t>30</a:t>
-            </a:fld>
-            <a:endParaRPr lang="en-US" dirty="0"/>
-          </a:p>
-        </p:txBody>
-      </p:sp>
-    </p:spTree>
-    <p:extLst>
-      <p:ext uri="{BB962C8B-B14F-4D97-AF65-F5344CB8AC3E}">
-        <p14:creationId xmlns:p14="http://schemas.microsoft.com/office/powerpoint/2010/main" val="1800209257"/>
       </p:ext>
     </p:extLst>
   </p:cSld>
@@ -3193,6 +3512,114 @@
         <p:cNvPr id="1" name="">
           <a:extLst>
             <a:ext uri="{FF2B5EF4-FFF2-40B4-BE49-F238E27FC236}">
+              <a16:creationId xmlns:a16="http://schemas.microsoft.com/office/drawing/2014/main" id="{35286F1E-5ED9-618C-11C6-BAEA34616EC0}"/>
+            </a:ext>
+          </a:extLst>
+        </p:cNvPr>
+        <p:cNvGrpSpPr/>
+        <p:nvPr/>
+      </p:nvGrpSpPr>
+      <p:grpSpPr>
+        <a:xfrm>
+          <a:off x="0" y="0"/>
+          <a:ext cx="0" cy="0"/>
+          <a:chOff x="0" y="0"/>
+          <a:chExt cx="0" cy="0"/>
+        </a:xfrm>
+      </p:grpSpPr>
+      <p:sp>
+        <p:nvSpPr>
+          <p:cNvPr id="2" name="Slide Image Placeholder 1">
+            <a:extLst>
+              <a:ext uri="{FF2B5EF4-FFF2-40B4-BE49-F238E27FC236}">
+                <a16:creationId xmlns:a16="http://schemas.microsoft.com/office/drawing/2014/main" id="{4D72A68D-0FB7-A1C4-DFA7-EB2E29E3FD53}"/>
+              </a:ext>
+            </a:extLst>
+          </p:cNvPr>
+          <p:cNvSpPr>
+            <a:spLocks noGrp="1" noRot="1" noChangeAspect="1"/>
+          </p:cNvSpPr>
+          <p:nvPr>
+            <p:ph type="sldImg"/>
+          </p:nvPr>
+        </p:nvSpPr>
+        <p:spPr/>
+      </p:sp>
+      <p:sp>
+        <p:nvSpPr>
+          <p:cNvPr id="3" name="Notes Placeholder 2">
+            <a:extLst>
+              <a:ext uri="{FF2B5EF4-FFF2-40B4-BE49-F238E27FC236}">
+                <a16:creationId xmlns:a16="http://schemas.microsoft.com/office/drawing/2014/main" id="{6606F1E3-BD6E-4F1E-8C4E-31A0A1079B63}"/>
+              </a:ext>
+            </a:extLst>
+          </p:cNvPr>
+          <p:cNvSpPr>
+            <a:spLocks noGrp="1"/>
+          </p:cNvSpPr>
+          <p:nvPr>
+            <p:ph type="body" idx="1"/>
+          </p:nvPr>
+        </p:nvSpPr>
+        <p:spPr/>
+        <p:txBody>
+          <a:bodyPr/>
+          <a:lstStyle/>
+          <a:p>
+            <a:endParaRPr lang="en-US" dirty="0"/>
+          </a:p>
+        </p:txBody>
+      </p:sp>
+      <p:sp>
+        <p:nvSpPr>
+          <p:cNvPr id="4" name="Slide Number Placeholder 3">
+            <a:extLst>
+              <a:ext uri="{FF2B5EF4-FFF2-40B4-BE49-F238E27FC236}">
+                <a16:creationId xmlns:a16="http://schemas.microsoft.com/office/drawing/2014/main" id="{81090C2F-093D-DEDD-1338-24BBF7F06425}"/>
+              </a:ext>
+            </a:extLst>
+          </p:cNvPr>
+          <p:cNvSpPr>
+            <a:spLocks noGrp="1"/>
+          </p:cNvSpPr>
+          <p:nvPr>
+            <p:ph type="sldNum" sz="quarter" idx="5"/>
+          </p:nvPr>
+        </p:nvSpPr>
+        <p:spPr/>
+        <p:txBody>
+          <a:bodyPr/>
+          <a:lstStyle/>
+          <a:p>
+            <a:fld id="{10895658-EA1F-4910-80AB-4DA76E167475}" type="slidenum">
+              <a:rPr lang="en-US" smtClean="0"/>
+              <a:t>31</a:t>
+            </a:fld>
+            <a:endParaRPr lang="en-US" dirty="0"/>
+          </a:p>
+        </p:txBody>
+      </p:sp>
+    </p:spTree>
+    <p:extLst>
+      <p:ext uri="{BB962C8B-B14F-4D97-AF65-F5344CB8AC3E}">
+        <p14:creationId xmlns:p14="http://schemas.microsoft.com/office/powerpoint/2010/main" val="1800209257"/>
+      </p:ext>
+    </p:extLst>
+  </p:cSld>
+  <p:clrMapOvr>
+    <a:masterClrMapping/>
+  </p:clrMapOvr>
+</p:notes>
+</file>
+
+<file path=ppt/notesSlides/notesSlide31.xml><?xml version="1.0" encoding="utf-8"?>
+<p:notes xmlns:a="http://schemas.openxmlformats.org/drawingml/2006/main" xmlns:r="http://schemas.openxmlformats.org/officeDocument/2006/relationships" xmlns:p="http://schemas.openxmlformats.org/presentationml/2006/main">
+  <p:cSld>
+    <p:spTree>
+      <p:nvGrpSpPr>
+        <p:cNvPr id="1" name="">
+          <a:extLst>
+            <a:ext uri="{FF2B5EF4-FFF2-40B4-BE49-F238E27FC236}">
               <a16:creationId xmlns:a16="http://schemas.microsoft.com/office/drawing/2014/main" id="{B874591D-197C-90A5-B07E-94DEE1D01F5D}"/>
             </a:ext>
           </a:extLst>
@@ -3274,7 +3701,7 @@
           <a:p>
             <a:fld id="{10895658-EA1F-4910-80AB-4DA76E167475}" type="slidenum">
               <a:rPr lang="en-US" smtClean="0"/>
-              <a:t>31</a:t>
+              <a:t>32</a:t>
             </a:fld>
             <a:endParaRPr lang="en-US" dirty="0"/>
           </a:p>
@@ -3293,7 +3720,7 @@
 </p:notes>
 </file>
 
-<file path=ppt/notesSlides/notesSlide31.xml><?xml version="1.0" encoding="utf-8"?>
+<file path=ppt/notesSlides/notesSlide32.xml><?xml version="1.0" encoding="utf-8"?>
 <p:notes xmlns:a="http://schemas.openxmlformats.org/drawingml/2006/main" xmlns:r="http://schemas.openxmlformats.org/officeDocument/2006/relationships" xmlns:p="http://schemas.openxmlformats.org/presentationml/2006/main">
   <p:cSld>
     <p:spTree>
@@ -3382,7 +3809,7 @@
           <a:p>
             <a:fld id="{10895658-EA1F-4910-80AB-4DA76E167475}" type="slidenum">
               <a:rPr lang="en-US" smtClean="0"/>
-              <a:t>32</a:t>
+              <a:t>33</a:t>
             </a:fld>
             <a:endParaRPr lang="en-US" dirty="0"/>
           </a:p>
@@ -3401,7 +3828,7 @@
 </p:notes>
 </file>
 
-<file path=ppt/notesSlides/notesSlide32.xml><?xml version="1.0" encoding="utf-8"?>
+<file path=ppt/notesSlides/notesSlide33.xml><?xml version="1.0" encoding="utf-8"?>
 <p:notes xmlns:a="http://schemas.openxmlformats.org/drawingml/2006/main" xmlns:r="http://schemas.openxmlformats.org/officeDocument/2006/relationships" xmlns:p="http://schemas.openxmlformats.org/presentationml/2006/main">
   <p:cSld>
     <p:spTree>
@@ -3490,7 +3917,7 @@
           <a:p>
             <a:fld id="{10895658-EA1F-4910-80AB-4DA76E167475}" type="slidenum">
               <a:rPr lang="en-US" smtClean="0"/>
-              <a:t>33</a:t>
+              <a:t>34</a:t>
             </a:fld>
             <a:endParaRPr lang="en-US" dirty="0"/>
           </a:p>
@@ -3509,7 +3936,7 @@
 </p:notes>
 </file>
 
-<file path=ppt/notesSlides/notesSlide33.xml><?xml version="1.0" encoding="utf-8"?>
+<file path=ppt/notesSlides/notesSlide34.xml><?xml version="1.0" encoding="utf-8"?>
 <p:notes xmlns:a="http://schemas.openxmlformats.org/drawingml/2006/main" xmlns:r="http://schemas.openxmlformats.org/officeDocument/2006/relationships" xmlns:p="http://schemas.openxmlformats.org/presentationml/2006/main">
   <p:cSld>
     <p:spTree>
@@ -3598,7 +4025,7 @@
           <a:p>
             <a:fld id="{10895658-EA1F-4910-80AB-4DA76E167475}" type="slidenum">
               <a:rPr lang="en-US" smtClean="0"/>
-              <a:t>34</a:t>
+              <a:t>35</a:t>
             </a:fld>
             <a:endParaRPr lang="en-US" dirty="0"/>
           </a:p>
@@ -3617,7 +4044,7 @@
 </p:notes>
 </file>
 
-<file path=ppt/notesSlides/notesSlide34.xml><?xml version="1.0" encoding="utf-8"?>
+<file path=ppt/notesSlides/notesSlide35.xml><?xml version="1.0" encoding="utf-8"?>
 <p:notes xmlns:a="http://schemas.openxmlformats.org/drawingml/2006/main" xmlns:r="http://schemas.openxmlformats.org/officeDocument/2006/relationships" xmlns:p="http://schemas.openxmlformats.org/presentationml/2006/main">
   <p:cSld>
     <p:spTree>
@@ -3706,7 +4133,7 @@
           <a:p>
             <a:fld id="{10895658-EA1F-4910-80AB-4DA76E167475}" type="slidenum">
               <a:rPr lang="en-US" smtClean="0"/>
-              <a:t>35</a:t>
+              <a:t>36</a:t>
             </a:fld>
             <a:endParaRPr lang="en-US" dirty="0"/>
           </a:p>
@@ -3725,7 +4152,7 @@
 </p:notes>
 </file>
 
-<file path=ppt/notesSlides/notesSlide35.xml><?xml version="1.0" encoding="utf-8"?>
+<file path=ppt/notesSlides/notesSlide36.xml><?xml version="1.0" encoding="utf-8"?>
 <p:notes xmlns:a="http://schemas.openxmlformats.org/drawingml/2006/main" xmlns:r="http://schemas.openxmlformats.org/officeDocument/2006/relationships" xmlns:p="http://schemas.openxmlformats.org/presentationml/2006/main">
   <p:cSld>
     <p:spTree>
@@ -3814,7 +4241,7 @@
           <a:p>
             <a:fld id="{10895658-EA1F-4910-80AB-4DA76E167475}" type="slidenum">
               <a:rPr lang="en-US" smtClean="0"/>
-              <a:t>36</a:t>
+              <a:t>37</a:t>
             </a:fld>
             <a:endParaRPr lang="en-US" dirty="0"/>
           </a:p>
@@ -3833,7 +4260,7 @@
 </p:notes>
 </file>
 
-<file path=ppt/notesSlides/notesSlide36.xml><?xml version="1.0" encoding="utf-8"?>
+<file path=ppt/notesSlides/notesSlide37.xml><?xml version="1.0" encoding="utf-8"?>
 <p:notes xmlns:a="http://schemas.openxmlformats.org/drawingml/2006/main" xmlns:r="http://schemas.openxmlformats.org/officeDocument/2006/relationships" xmlns:p="http://schemas.openxmlformats.org/presentationml/2006/main">
   <p:cSld>
     <p:spTree>
@@ -3929,7 +4356,7 @@
           <a:p>
             <a:fld id="{10895658-EA1F-4910-80AB-4DA76E167475}" type="slidenum">
               <a:rPr lang="en-US" smtClean="0"/>
-              <a:t>37</a:t>
+              <a:t>38</a:t>
             </a:fld>
             <a:endParaRPr lang="en-US" dirty="0"/>
           </a:p>
@@ -3948,7 +4375,7 @@
 </p:notes>
 </file>
 
-<file path=ppt/notesSlides/notesSlide37.xml><?xml version="1.0" encoding="utf-8"?>
+<file path=ppt/notesSlides/notesSlide38.xml><?xml version="1.0" encoding="utf-8"?>
 <p:notes xmlns:a="http://schemas.openxmlformats.org/drawingml/2006/main" xmlns:r="http://schemas.openxmlformats.org/officeDocument/2006/relationships" xmlns:p="http://schemas.openxmlformats.org/presentationml/2006/main">
   <p:cSld>
     <p:spTree>
@@ -4044,7 +4471,7 @@
           <a:p>
             <a:fld id="{10895658-EA1F-4910-80AB-4DA76E167475}" type="slidenum">
               <a:rPr lang="en-US" smtClean="0"/>
-              <a:t>38</a:t>
+              <a:t>39</a:t>
             </a:fld>
             <a:endParaRPr lang="en-US" dirty="0"/>
           </a:p>
@@ -4063,7 +4490,7 @@
 </p:notes>
 </file>
 
-<file path=ppt/notesSlides/notesSlide38.xml><?xml version="1.0" encoding="utf-8"?>
+<file path=ppt/notesSlides/notesSlide39.xml><?xml version="1.0" encoding="utf-8"?>
 <p:notes xmlns:a="http://schemas.openxmlformats.org/drawingml/2006/main" xmlns:r="http://schemas.openxmlformats.org/officeDocument/2006/relationships" xmlns:p="http://schemas.openxmlformats.org/presentationml/2006/main">
   <p:cSld>
     <p:spTree>
@@ -4159,7 +4586,7 @@
           <a:p>
             <a:fld id="{10895658-EA1F-4910-80AB-4DA76E167475}" type="slidenum">
               <a:rPr lang="en-US" smtClean="0"/>
-              <a:t>39</a:t>
+              <a:t>40</a:t>
             </a:fld>
             <a:endParaRPr lang="en-US" dirty="0"/>
           </a:p>
@@ -24045,8 +24472,8 @@
         </p:nvSpPr>
         <p:spPr>
           <a:xfrm>
-            <a:off x="5571066" y="2317139"/>
-            <a:ext cx="6094907" cy="3316240"/>
+            <a:off x="5302786" y="2537476"/>
+            <a:ext cx="6727634" cy="1571815"/>
           </a:xfrm>
         </p:spPr>
         <p:txBody>
@@ -24061,7 +24488,7 @@
               </a:lnSpc>
             </a:pPr>
             <a:r>
-              <a:rPr lang="en-US" sz="2000" b="1" dirty="0">
+              <a:rPr lang="en-US" b="1" dirty="0">
                 <a:latin typeface="Times New Roman" panose="02020603050405020304" pitchFamily="18" charset="0"/>
                 <a:cs typeface="Times New Roman" panose="02020603050405020304" pitchFamily="18" charset="0"/>
               </a:rPr>
@@ -24075,7 +24502,7 @@
               </a:lnSpc>
             </a:pPr>
             <a:r>
-              <a:rPr lang="en-US" sz="2000" b="1" dirty="0">
+              <a:rPr lang="en-US" b="1" dirty="0">
                 <a:latin typeface="Times New Roman" panose="02020603050405020304" pitchFamily="18" charset="0"/>
                 <a:cs typeface="Times New Roman" panose="02020603050405020304" pitchFamily="18" charset="0"/>
               </a:rPr>
@@ -24089,7 +24516,7 @@
               </a:lnSpc>
             </a:pPr>
             <a:r>
-              <a:rPr lang="en-US" sz="2000" b="1" dirty="0">
+              <a:rPr lang="en-US" b="1" dirty="0">
                 <a:latin typeface="Times New Roman" panose="02020603050405020304" pitchFamily="18" charset="0"/>
                 <a:cs typeface="Times New Roman" panose="02020603050405020304" pitchFamily="18" charset="0"/>
               </a:rPr>
@@ -24112,14 +24539,14 @@
         </p:nvSpPr>
         <p:spPr>
           <a:xfrm>
-            <a:off x="6566054" y="4232297"/>
-            <a:ext cx="5464366" cy="2317610"/>
+            <a:off x="6677890" y="4232297"/>
+            <a:ext cx="5352529" cy="2279339"/>
           </a:xfrm>
           <a:prstGeom prst="rect">
             <a:avLst/>
           </a:prstGeom>
           <a:solidFill>
-            <a:schemeClr val="accent1">
+            <a:schemeClr val="accent2">
               <a:lumMod val="60000"/>
               <a:lumOff val="40000"/>
               <a:alpha val="40000"/>
@@ -24127,11 +24554,11 @@
           </a:solidFill>
           <a:ln w="12700">
             <a:solidFill>
-              <a:schemeClr val="accent1">
-                <a:lumMod val="50000"/>
+              <a:schemeClr val="accent2">
+                <a:lumMod val="75000"/>
               </a:schemeClr>
             </a:solidFill>
-            <a:prstDash val="solid"/>
+            <a:prstDash val="sysDot"/>
           </a:ln>
         </p:spPr>
         <p:txBody>
@@ -24141,9 +24568,7 @@
             <a:r>
               <a:rPr lang="en-US" sz="2400" dirty="0">
                 <a:solidFill>
-                  <a:schemeClr val="accent1">
-                    <a:lumMod val="50000"/>
-                  </a:schemeClr>
+                  <a:schemeClr val="bg1"/>
                 </a:solidFill>
                 <a:effectLst>
                   <a:outerShdw blurRad="38100" dist="38100" dir="2700000" algn="tl">
@@ -24170,9 +24595,7 @@
             <a:r>
               <a:rPr lang="en-US" b="1" dirty="0">
                 <a:solidFill>
-                  <a:schemeClr val="accent1">
-                    <a:lumMod val="50000"/>
-                  </a:schemeClr>
+                  <a:schemeClr val="bg1"/>
                 </a:solidFill>
                 <a:latin typeface="Times New Roman" panose="02020603050405020304" pitchFamily="18" charset="0"/>
                 <a:cs typeface="Times New Roman" panose="02020603050405020304" pitchFamily="18" charset="0"/>
@@ -24192,9 +24615,7 @@
             <a:r>
               <a:rPr lang="en-US" b="1" dirty="0">
                 <a:solidFill>
-                  <a:schemeClr val="accent1">
-                    <a:lumMod val="50000"/>
-                  </a:schemeClr>
+                  <a:schemeClr val="bg1"/>
                 </a:solidFill>
                 <a:latin typeface="Times New Roman" panose="02020603050405020304" pitchFamily="18" charset="0"/>
                 <a:cs typeface="Times New Roman" panose="02020603050405020304" pitchFamily="18" charset="0"/>
@@ -24207,9 +24628,7 @@
             <a:r>
               <a:rPr lang="en-US" sz="2400" dirty="0">
                 <a:solidFill>
-                  <a:schemeClr val="accent1">
-                    <a:lumMod val="50000"/>
-                  </a:schemeClr>
+                  <a:schemeClr val="bg1"/>
                 </a:solidFill>
                 <a:effectLst>
                   <a:outerShdw blurRad="38100" dist="38100" dir="2700000" algn="tl">
@@ -24229,9 +24648,7 @@
             <a:r>
               <a:rPr lang="en-US" b="1" dirty="0">
                 <a:solidFill>
-                  <a:schemeClr val="accent1">
-                    <a:lumMod val="50000"/>
-                  </a:schemeClr>
+                  <a:schemeClr val="bg1"/>
                 </a:solidFill>
                 <a:latin typeface="Times New Roman" panose="02020603050405020304" pitchFamily="18" charset="0"/>
                 <a:cs typeface="Times New Roman" panose="02020603050405020304" pitchFamily="18" charset="0"/>
@@ -24240,9 +24657,7 @@
             </a:r>
             <a:endParaRPr lang="en-US" dirty="0">
               <a:solidFill>
-                <a:schemeClr val="accent1">
-                  <a:lumMod val="50000"/>
-                </a:schemeClr>
+                <a:schemeClr val="bg1"/>
               </a:solidFill>
               <a:latin typeface="Times New Roman" panose="02020603050405020304" pitchFamily="18" charset="0"/>
               <a:cs typeface="Times New Roman" panose="02020603050405020304" pitchFamily="18" charset="0"/>
@@ -29385,89 +29800,6 @@
           </a:p>
         </p:txBody>
       </p:sp>
-      <p:sp>
-        <p:nvSpPr>
-          <p:cNvPr id="3" name="Rectangle 1">
-            <a:extLst>
-              <a:ext uri="{FF2B5EF4-FFF2-40B4-BE49-F238E27FC236}">
-                <a16:creationId xmlns:a16="http://schemas.microsoft.com/office/drawing/2014/main" id="{E83AC41C-11B2-91DD-FA83-653FDC18A89C}"/>
-              </a:ext>
-            </a:extLst>
-          </p:cNvPr>
-          <p:cNvSpPr>
-            <a:spLocks noGrp="1" noChangeArrowheads="1"/>
-          </p:cNvSpPr>
-          <p:nvPr>
-            <p:ph sz="half" idx="14"/>
-          </p:nvPr>
-        </p:nvSpPr>
-        <p:spPr bwMode="auto">
-          <a:xfrm>
-            <a:off x="682459" y="3179670"/>
-            <a:ext cx="6370072" cy="498663"/>
-          </a:xfrm>
-          <a:prstGeom prst="rect">
-            <a:avLst/>
-          </a:prstGeom>
-          <a:noFill/>
-          <a:ln>
-            <a:noFill/>
-          </a:ln>
-          <a:effectLst/>
-          <a:extLst>
-            <a:ext uri="{909E8E84-426E-40DD-AFC4-6F175D3DCCD1}">
-              <a14:hiddenFill xmlns:a14="http://schemas.microsoft.com/office/drawing/2010/main">
-                <a:solidFill>
-                  <a:schemeClr val="accent1"/>
-                </a:solidFill>
-              </a14:hiddenFill>
-            </a:ext>
-            <a:ext uri="{91240B29-F687-4F45-9708-019B960494DF}">
-              <a14:hiddenLine xmlns:a14="http://schemas.microsoft.com/office/drawing/2010/main" w="9525">
-                <a:solidFill>
-                  <a:schemeClr val="tx1"/>
-                </a:solidFill>
-                <a:miter lim="800000"/>
-                <a:headEnd/>
-                <a:tailEnd/>
-              </a14:hiddenLine>
-            </a:ext>
-            <a:ext uri="{AF507438-7753-43E0-B8FC-AC1667EBCBE1}">
-              <a14:hiddenEffects xmlns:a14="http://schemas.microsoft.com/office/drawing/2010/main">
-                <a:effectLst>
-                  <a:outerShdw dist="35921" dir="2700000" algn="ctr" rotWithShape="0">
-                    <a:schemeClr val="bg2"/>
-                  </a:outerShdw>
-                </a:effectLst>
-              </a14:hiddenEffects>
-            </a:ext>
-          </a:extLst>
-        </p:spPr>
-        <p:txBody>
-          <a:bodyPr vert="horz" wrap="square" lIns="91440" tIns="45720" rIns="91440" bIns="45720" numCol="1" anchor="ctr" anchorCtr="0" compatLnSpc="1">
-            <a:prstTxWarp prst="textNoShape">
-              <a:avLst/>
-            </a:prstTxWarp>
-            <a:spAutoFit/>
-          </a:bodyPr>
-          <a:lstStyle/>
-          <a:p>
-            <a:pPr>
-              <a:lnSpc>
-                <a:spcPct val="150000"/>
-              </a:lnSpc>
-            </a:pPr>
-            <a:endParaRPr kumimoji="0" lang="en-US" altLang="en-US" sz="2000" b="0" i="0" u="none" strike="noStrike" cap="none" normalizeH="0" baseline="0" dirty="0">
-              <a:ln>
-                <a:noFill/>
-              </a:ln>
-              <a:effectLst/>
-              <a:latin typeface="Times New Roman" panose="02020603050405020304" pitchFamily="18" charset="0"/>
-              <a:cs typeface="Times New Roman" panose="02020603050405020304" pitchFamily="18" charset="0"/>
-            </a:endParaRPr>
-          </a:p>
-        </p:txBody>
-      </p:sp>
       <p:pic>
         <p:nvPicPr>
           <p:cNvPr id="4" name="Picture 3">
@@ -29490,8 +29822,8 @@
         </p:blipFill>
         <p:spPr>
           <a:xfrm>
-            <a:off x="559366" y="2049558"/>
-            <a:ext cx="7037188" cy="3577519"/>
+            <a:off x="96658" y="1161543"/>
+            <a:ext cx="4983461" cy="2533459"/>
           </a:xfrm>
           <a:prstGeom prst="rect">
             <a:avLst/>
@@ -29502,6 +29834,36 @@
           <a:effectLst>
             <a:softEdge rad="112500"/>
           </a:effectLst>
+        </p:spPr>
+      </p:pic>
+      <p:pic>
+        <p:nvPicPr>
+          <p:cNvPr id="5" name="Picture 4" descr="Logistic Regression Confusion Matrix">
+            <a:extLst>
+              <a:ext uri="{FF2B5EF4-FFF2-40B4-BE49-F238E27FC236}">
+                <a16:creationId xmlns:a16="http://schemas.microsoft.com/office/drawing/2014/main" id="{3D283E7F-5CD7-506D-254A-3657E8A2CF34}"/>
+              </a:ext>
+            </a:extLst>
+          </p:cNvPr>
+          <p:cNvPicPr>
+            <a:picLocks noChangeAspect="1"/>
+          </p:cNvPicPr>
+          <p:nvPr/>
+        </p:nvPicPr>
+        <p:blipFill>
+          <a:blip r:embed="rId4"/>
+          <a:stretch>
+            <a:fillRect/>
+          </a:stretch>
+        </p:blipFill>
+        <p:spPr>
+          <a:xfrm>
+            <a:off x="2891821" y="2437441"/>
+            <a:ext cx="5013928" cy="4160494"/>
+          </a:xfrm>
+          <a:prstGeom prst="rect">
+            <a:avLst/>
+          </a:prstGeom>
         </p:spPr>
       </p:pic>
     </p:spTree>
@@ -29525,7 +29887,7 @@
         <p:cNvPr id="1" name="">
           <a:extLst>
             <a:ext uri="{FF2B5EF4-FFF2-40B4-BE49-F238E27FC236}">
-              <a16:creationId xmlns:a16="http://schemas.microsoft.com/office/drawing/2014/main" id="{8F063675-014B-A005-D65C-9517FB44C82B}"/>
+              <a16:creationId xmlns:a16="http://schemas.microsoft.com/office/drawing/2014/main" id="{71593BEA-5AB9-10FC-A5AE-A2D024CF06AD}"/>
             </a:ext>
           </a:extLst>
         </p:cNvPr>
@@ -29545,7 +29907,7 @@
           <p:cNvPr id="2" name="Title 1">
             <a:extLst>
               <a:ext uri="{FF2B5EF4-FFF2-40B4-BE49-F238E27FC236}">
-                <a16:creationId xmlns:a16="http://schemas.microsoft.com/office/drawing/2014/main" id="{AF6E2E6B-2C0E-58B7-F780-2DAEE408ED9D}"/>
+                <a16:creationId xmlns:a16="http://schemas.microsoft.com/office/drawing/2014/main" id="{A9B00CE7-0796-2E2F-3541-679FBB03FB68}"/>
               </a:ext>
             </a:extLst>
           </p:cNvPr>
@@ -29583,7 +29945,7 @@
           <p:cNvPr id="6" name="Slide Number Placeholder 5">
             <a:extLst>
               <a:ext uri="{FF2B5EF4-FFF2-40B4-BE49-F238E27FC236}">
-                <a16:creationId xmlns:a16="http://schemas.microsoft.com/office/drawing/2014/main" id="{BD2EE5B8-3AD2-A35A-AB94-C345AEA384B1}"/>
+                <a16:creationId xmlns:a16="http://schemas.microsoft.com/office/drawing/2014/main" id="{E63F7E43-CA83-5662-D4D6-A6572FB397FD}"/>
               </a:ext>
             </a:extLst>
           </p:cNvPr>
@@ -29608,92 +29970,9 @@
           </a:p>
         </p:txBody>
       </p:sp>
-      <p:sp>
-        <p:nvSpPr>
-          <p:cNvPr id="3" name="Rectangle 1">
-            <a:extLst>
-              <a:ext uri="{FF2B5EF4-FFF2-40B4-BE49-F238E27FC236}">
-                <a16:creationId xmlns:a16="http://schemas.microsoft.com/office/drawing/2014/main" id="{7FFD93B0-881C-2FDE-9172-641A0CB1BB70}"/>
-              </a:ext>
-            </a:extLst>
-          </p:cNvPr>
-          <p:cNvSpPr>
-            <a:spLocks noGrp="1" noChangeArrowheads="1"/>
-          </p:cNvSpPr>
-          <p:nvPr>
-            <p:ph sz="half" idx="14"/>
-          </p:nvPr>
-        </p:nvSpPr>
-        <p:spPr bwMode="auto">
-          <a:xfrm>
-            <a:off x="682459" y="3179670"/>
-            <a:ext cx="6370072" cy="498663"/>
-          </a:xfrm>
-          <a:prstGeom prst="rect">
-            <a:avLst/>
-          </a:prstGeom>
-          <a:noFill/>
-          <a:ln>
-            <a:noFill/>
-          </a:ln>
-          <a:effectLst/>
-          <a:extLst>
-            <a:ext uri="{909E8E84-426E-40DD-AFC4-6F175D3DCCD1}">
-              <a14:hiddenFill xmlns:a14="http://schemas.microsoft.com/office/drawing/2010/main">
-                <a:solidFill>
-                  <a:schemeClr val="accent1"/>
-                </a:solidFill>
-              </a14:hiddenFill>
-            </a:ext>
-            <a:ext uri="{91240B29-F687-4F45-9708-019B960494DF}">
-              <a14:hiddenLine xmlns:a14="http://schemas.microsoft.com/office/drawing/2010/main" w="9525">
-                <a:solidFill>
-                  <a:schemeClr val="tx1"/>
-                </a:solidFill>
-                <a:miter lim="800000"/>
-                <a:headEnd/>
-                <a:tailEnd/>
-              </a14:hiddenLine>
-            </a:ext>
-            <a:ext uri="{AF507438-7753-43E0-B8FC-AC1667EBCBE1}">
-              <a14:hiddenEffects xmlns:a14="http://schemas.microsoft.com/office/drawing/2010/main">
-                <a:effectLst>
-                  <a:outerShdw dist="35921" dir="2700000" algn="ctr" rotWithShape="0">
-                    <a:schemeClr val="bg2"/>
-                  </a:outerShdw>
-                </a:effectLst>
-              </a14:hiddenEffects>
-            </a:ext>
-          </a:extLst>
-        </p:spPr>
-        <p:txBody>
-          <a:bodyPr vert="horz" wrap="square" lIns="91440" tIns="45720" rIns="91440" bIns="45720" numCol="1" anchor="ctr" anchorCtr="0" compatLnSpc="1">
-            <a:prstTxWarp prst="textNoShape">
-              <a:avLst/>
-            </a:prstTxWarp>
-            <a:spAutoFit/>
-          </a:bodyPr>
-          <a:lstStyle/>
-          <a:p>
-            <a:pPr>
-              <a:lnSpc>
-                <a:spcPct val="150000"/>
-              </a:lnSpc>
-            </a:pPr>
-            <a:endParaRPr kumimoji="0" lang="en-US" altLang="en-US" sz="2000" b="0" i="0" u="none" strike="noStrike" cap="none" normalizeH="0" baseline="0" dirty="0">
-              <a:ln>
-                <a:noFill/>
-              </a:ln>
-              <a:effectLst/>
-              <a:latin typeface="Times New Roman" panose="02020603050405020304" pitchFamily="18" charset="0"/>
-              <a:cs typeface="Times New Roman" panose="02020603050405020304" pitchFamily="18" charset="0"/>
-            </a:endParaRPr>
-          </a:p>
-        </p:txBody>
-      </p:sp>
       <p:pic>
         <p:nvPicPr>
-          <p:cNvPr id="4" name="Picture 3">
+          <p:cNvPr id="8" name="Picture 7">
             <a:extLst>
               <a:ext uri="{FF2B5EF4-FFF2-40B4-BE49-F238E27FC236}">
                 <a16:creationId xmlns:a16="http://schemas.microsoft.com/office/drawing/2014/main" id="{40172F71-3355-D51C-5F9B-EC06562FB656}"/>
@@ -29713,8 +29992,8 @@
         </p:blipFill>
         <p:spPr>
           <a:xfrm>
-            <a:off x="559366" y="1855910"/>
-            <a:ext cx="7107526" cy="3683244"/>
+            <a:off x="99151" y="1161542"/>
+            <a:ext cx="4991809" cy="2474023"/>
           </a:xfrm>
           <a:prstGeom prst="rect">
             <a:avLst/>
@@ -29727,10 +30006,40 @@
           </a:effectLst>
         </p:spPr>
       </p:pic>
+      <p:pic>
+        <p:nvPicPr>
+          <p:cNvPr id="9" name="Picture 8" descr="Random Forest Confusion Matrix">
+            <a:extLst>
+              <a:ext uri="{FF2B5EF4-FFF2-40B4-BE49-F238E27FC236}">
+                <a16:creationId xmlns:a16="http://schemas.microsoft.com/office/drawing/2014/main" id="{B0FE41B2-72C4-1B5A-6656-7B5D2527C95C}"/>
+              </a:ext>
+            </a:extLst>
+          </p:cNvPr>
+          <p:cNvPicPr>
+            <a:picLocks noChangeAspect="1"/>
+          </p:cNvPicPr>
+          <p:nvPr/>
+        </p:nvPicPr>
+        <p:blipFill>
+          <a:blip r:embed="rId4"/>
+          <a:stretch>
+            <a:fillRect/>
+          </a:stretch>
+        </p:blipFill>
+        <p:spPr>
+          <a:xfrm>
+            <a:off x="2913939" y="2437441"/>
+            <a:ext cx="4991809" cy="4160494"/>
+          </a:xfrm>
+          <a:prstGeom prst="rect">
+            <a:avLst/>
+          </a:prstGeom>
+        </p:spPr>
+      </p:pic>
     </p:spTree>
     <p:extLst>
       <p:ext uri="{BB962C8B-B14F-4D97-AF65-F5344CB8AC3E}">
-        <p14:creationId xmlns:p14="http://schemas.microsoft.com/office/powerpoint/2010/main" val="4057666101"/>
+        <p14:creationId xmlns:p14="http://schemas.microsoft.com/office/powerpoint/2010/main" val="4244281817"/>
       </p:ext>
     </p:extLst>
   </p:cSld>
@@ -29748,7 +30057,7 @@
         <p:cNvPr id="1" name="">
           <a:extLst>
             <a:ext uri="{FF2B5EF4-FFF2-40B4-BE49-F238E27FC236}">
-              <a16:creationId xmlns:a16="http://schemas.microsoft.com/office/drawing/2014/main" id="{C9BD85FC-CE16-6DA9-D266-D7B633184A17}"/>
+              <a16:creationId xmlns:a16="http://schemas.microsoft.com/office/drawing/2014/main" id="{6267AE58-07CB-CC49-E7F2-A02A66D86E76}"/>
             </a:ext>
           </a:extLst>
         </p:cNvPr>
@@ -29768,7 +30077,7 @@
           <p:cNvPr id="2" name="Title 1">
             <a:extLst>
               <a:ext uri="{FF2B5EF4-FFF2-40B4-BE49-F238E27FC236}">
-                <a16:creationId xmlns:a16="http://schemas.microsoft.com/office/drawing/2014/main" id="{DCC205B5-7986-A901-F498-5C823496D3F3}"/>
+                <a16:creationId xmlns:a16="http://schemas.microsoft.com/office/drawing/2014/main" id="{310EE8B2-F188-F4C8-9F02-770C423F5449}"/>
               </a:ext>
             </a:extLst>
           </p:cNvPr>
@@ -29806,7 +30115,7 @@
           <p:cNvPr id="6" name="Slide Number Placeholder 5">
             <a:extLst>
               <a:ext uri="{FF2B5EF4-FFF2-40B4-BE49-F238E27FC236}">
-                <a16:creationId xmlns:a16="http://schemas.microsoft.com/office/drawing/2014/main" id="{4064E15C-A5B1-8BAA-B310-AC3DF29BCFDF}"/>
+                <a16:creationId xmlns:a16="http://schemas.microsoft.com/office/drawing/2014/main" id="{0EFA3E4D-58ED-9213-7BAD-5B617484D58E}"/>
               </a:ext>
             </a:extLst>
           </p:cNvPr>
@@ -29831,92 +30140,9 @@
           </a:p>
         </p:txBody>
       </p:sp>
-      <p:sp>
-        <p:nvSpPr>
-          <p:cNvPr id="3" name="Rectangle 1">
-            <a:extLst>
-              <a:ext uri="{FF2B5EF4-FFF2-40B4-BE49-F238E27FC236}">
-                <a16:creationId xmlns:a16="http://schemas.microsoft.com/office/drawing/2014/main" id="{A498A1FA-7C23-6B75-084B-F70F0F54DA16}"/>
-              </a:ext>
-            </a:extLst>
-          </p:cNvPr>
-          <p:cNvSpPr>
-            <a:spLocks noGrp="1" noChangeArrowheads="1"/>
-          </p:cNvSpPr>
-          <p:nvPr>
-            <p:ph sz="half" idx="14"/>
-          </p:nvPr>
-        </p:nvSpPr>
-        <p:spPr bwMode="auto">
-          <a:xfrm>
-            <a:off x="682459" y="3179670"/>
-            <a:ext cx="6370072" cy="498663"/>
-          </a:xfrm>
-          <a:prstGeom prst="rect">
-            <a:avLst/>
-          </a:prstGeom>
-          <a:noFill/>
-          <a:ln>
-            <a:noFill/>
-          </a:ln>
-          <a:effectLst/>
-          <a:extLst>
-            <a:ext uri="{909E8E84-426E-40DD-AFC4-6F175D3DCCD1}">
-              <a14:hiddenFill xmlns:a14="http://schemas.microsoft.com/office/drawing/2010/main">
-                <a:solidFill>
-                  <a:schemeClr val="accent1"/>
-                </a:solidFill>
-              </a14:hiddenFill>
-            </a:ext>
-            <a:ext uri="{91240B29-F687-4F45-9708-019B960494DF}">
-              <a14:hiddenLine xmlns:a14="http://schemas.microsoft.com/office/drawing/2010/main" w="9525">
-                <a:solidFill>
-                  <a:schemeClr val="tx1"/>
-                </a:solidFill>
-                <a:miter lim="800000"/>
-                <a:headEnd/>
-                <a:tailEnd/>
-              </a14:hiddenLine>
-            </a:ext>
-            <a:ext uri="{AF507438-7753-43E0-B8FC-AC1667EBCBE1}">
-              <a14:hiddenEffects xmlns:a14="http://schemas.microsoft.com/office/drawing/2010/main">
-                <a:effectLst>
-                  <a:outerShdw dist="35921" dir="2700000" algn="ctr" rotWithShape="0">
-                    <a:schemeClr val="bg2"/>
-                  </a:outerShdw>
-                </a:effectLst>
-              </a14:hiddenEffects>
-            </a:ext>
-          </a:extLst>
-        </p:spPr>
-        <p:txBody>
-          <a:bodyPr vert="horz" wrap="square" lIns="91440" tIns="45720" rIns="91440" bIns="45720" numCol="1" anchor="ctr" anchorCtr="0" compatLnSpc="1">
-            <a:prstTxWarp prst="textNoShape">
-              <a:avLst/>
-            </a:prstTxWarp>
-            <a:spAutoFit/>
-          </a:bodyPr>
-          <a:lstStyle/>
-          <a:p>
-            <a:pPr>
-              <a:lnSpc>
-                <a:spcPct val="150000"/>
-              </a:lnSpc>
-            </a:pPr>
-            <a:endParaRPr kumimoji="0" lang="en-US" altLang="en-US" sz="2000" b="0" i="0" u="none" strike="noStrike" cap="none" normalizeH="0" baseline="0" dirty="0">
-              <a:ln>
-                <a:noFill/>
-              </a:ln>
-              <a:effectLst/>
-              <a:latin typeface="Times New Roman" panose="02020603050405020304" pitchFamily="18" charset="0"/>
-              <a:cs typeface="Times New Roman" panose="02020603050405020304" pitchFamily="18" charset="0"/>
-            </a:endParaRPr>
-          </a:p>
-        </p:txBody>
-      </p:sp>
       <p:pic>
         <p:nvPicPr>
-          <p:cNvPr id="4" name="Picture 3">
+          <p:cNvPr id="8" name="Picture 7">
             <a:extLst>
               <a:ext uri="{FF2B5EF4-FFF2-40B4-BE49-F238E27FC236}">
                 <a16:creationId xmlns:a16="http://schemas.microsoft.com/office/drawing/2014/main" id="{CC3641EE-7485-E1FB-596E-0C292E0F88E9}"/>
@@ -29936,8 +30162,178 @@
         </p:blipFill>
         <p:spPr>
           <a:xfrm>
-            <a:off x="559365" y="1799492"/>
-            <a:ext cx="7019603" cy="4073770"/>
+            <a:off x="96658" y="1170709"/>
+            <a:ext cx="4012634" cy="2533459"/>
+          </a:xfrm>
+          <a:prstGeom prst="rect">
+            <a:avLst/>
+          </a:prstGeom>
+          <a:ln>
+            <a:noFill/>
+          </a:ln>
+          <a:effectLst>
+            <a:softEdge rad="112500"/>
+          </a:effectLst>
+        </p:spPr>
+      </p:pic>
+      <p:pic>
+        <p:nvPicPr>
+          <p:cNvPr id="9" name="Picture 8" descr="Svm Confusion Matrix">
+            <a:extLst>
+              <a:ext uri="{FF2B5EF4-FFF2-40B4-BE49-F238E27FC236}">
+                <a16:creationId xmlns:a16="http://schemas.microsoft.com/office/drawing/2014/main" id="{9EFE2495-5B89-3715-96B5-91D560716CC8}"/>
+              </a:ext>
+            </a:extLst>
+          </p:cNvPr>
+          <p:cNvPicPr>
+            <a:picLocks noChangeAspect="1"/>
+          </p:cNvPicPr>
+          <p:nvPr/>
+        </p:nvPicPr>
+        <p:blipFill>
+          <a:blip r:embed="rId4"/>
+          <a:stretch>
+            <a:fillRect/>
+          </a:stretch>
+        </p:blipFill>
+        <p:spPr>
+          <a:xfrm>
+            <a:off x="2875402" y="2446607"/>
+            <a:ext cx="5030347" cy="4151327"/>
+          </a:xfrm>
+          <a:prstGeom prst="rect">
+            <a:avLst/>
+          </a:prstGeom>
+        </p:spPr>
+      </p:pic>
+    </p:spTree>
+    <p:extLst>
+      <p:ext uri="{BB962C8B-B14F-4D97-AF65-F5344CB8AC3E}">
+        <p14:creationId xmlns:p14="http://schemas.microsoft.com/office/powerpoint/2010/main" val="1635307528"/>
+      </p:ext>
+    </p:extLst>
+  </p:cSld>
+  <p:clrMapOvr>
+    <a:masterClrMapping/>
+  </p:clrMapOvr>
+</p:sld>
+</file>
+
+<file path=ppt/slides/slide27.xml><?xml version="1.0" encoding="utf-8"?>
+<p:sld xmlns:a="http://schemas.openxmlformats.org/drawingml/2006/main" xmlns:r="http://schemas.openxmlformats.org/officeDocument/2006/relationships" xmlns:p="http://schemas.openxmlformats.org/presentationml/2006/main">
+  <p:cSld>
+    <p:spTree>
+      <p:nvGrpSpPr>
+        <p:cNvPr id="1" name="">
+          <a:extLst>
+            <a:ext uri="{FF2B5EF4-FFF2-40B4-BE49-F238E27FC236}">
+              <a16:creationId xmlns:a16="http://schemas.microsoft.com/office/drawing/2014/main" id="{7A260F8A-240D-97E0-1059-8744EF5D7A80}"/>
+            </a:ext>
+          </a:extLst>
+        </p:cNvPr>
+        <p:cNvGrpSpPr/>
+        <p:nvPr/>
+      </p:nvGrpSpPr>
+      <p:grpSpPr>
+        <a:xfrm>
+          <a:off x="0" y="0"/>
+          <a:ext cx="0" cy="0"/>
+          <a:chOff x="0" y="0"/>
+          <a:chExt cx="0" cy="0"/>
+        </a:xfrm>
+      </p:grpSpPr>
+      <p:sp>
+        <p:nvSpPr>
+          <p:cNvPr id="2" name="Title 1">
+            <a:extLst>
+              <a:ext uri="{FF2B5EF4-FFF2-40B4-BE49-F238E27FC236}">
+                <a16:creationId xmlns:a16="http://schemas.microsoft.com/office/drawing/2014/main" id="{6AA9463F-2BED-4C7A-48AC-9AB4BDB3AEEC}"/>
+              </a:ext>
+            </a:extLst>
+          </p:cNvPr>
+          <p:cNvSpPr>
+            <a:spLocks noGrp="1"/>
+          </p:cNvSpPr>
+          <p:nvPr>
+            <p:ph type="title"/>
+          </p:nvPr>
+        </p:nvSpPr>
+        <p:spPr>
+          <a:xfrm>
+            <a:off x="559366" y="523594"/>
+            <a:ext cx="7346383" cy="1275898"/>
+          </a:xfrm>
+        </p:spPr>
+        <p:txBody>
+          <a:bodyPr>
+            <a:normAutofit/>
+          </a:bodyPr>
+          <a:lstStyle/>
+          <a:p>
+            <a:r>
+              <a:rPr lang="en-US" sz="3600" dirty="0">
+                <a:latin typeface="Times New Roman" panose="02020603050405020304" pitchFamily="18" charset="0"/>
+                <a:cs typeface="Times New Roman" panose="02020603050405020304" pitchFamily="18" charset="0"/>
+              </a:rPr>
+              <a:t>ROC curve</a:t>
+            </a:r>
+          </a:p>
+        </p:txBody>
+      </p:sp>
+      <p:sp>
+        <p:nvSpPr>
+          <p:cNvPr id="6" name="Slide Number Placeholder 5">
+            <a:extLst>
+              <a:ext uri="{FF2B5EF4-FFF2-40B4-BE49-F238E27FC236}">
+                <a16:creationId xmlns:a16="http://schemas.microsoft.com/office/drawing/2014/main" id="{08C58E5A-3880-0531-CFC7-B9BA3EAB9E82}"/>
+              </a:ext>
+            </a:extLst>
+          </p:cNvPr>
+          <p:cNvSpPr>
+            <a:spLocks noGrp="1"/>
+          </p:cNvSpPr>
+          <p:nvPr>
+            <p:ph type="sldNum" sz="quarter" idx="12"/>
+          </p:nvPr>
+        </p:nvSpPr>
+        <p:spPr/>
+        <p:txBody>
+          <a:bodyPr/>
+          <a:lstStyle/>
+          <a:p>
+            <a:fld id="{B5CEABB6-07DC-46E8-9B57-56EC44A396E5}" type="slidenum">
+              <a:rPr lang="en-US" smtClean="0"/>
+              <a:pPr/>
+              <a:t>27</a:t>
+            </a:fld>
+            <a:endParaRPr lang="en-US" dirty="0"/>
+          </a:p>
+        </p:txBody>
+      </p:sp>
+      <p:pic>
+        <p:nvPicPr>
+          <p:cNvPr id="10" name="Picture 9">
+            <a:extLst>
+              <a:ext uri="{FF2B5EF4-FFF2-40B4-BE49-F238E27FC236}">
+                <a16:creationId xmlns:a16="http://schemas.microsoft.com/office/drawing/2014/main" id="{4EB9743A-DEE6-0E8D-7579-83BE2A0713F9}"/>
+              </a:ext>
+            </a:extLst>
+          </p:cNvPr>
+          <p:cNvPicPr>
+            <a:picLocks noChangeAspect="1"/>
+          </p:cNvPicPr>
+          <p:nvPr/>
+        </p:nvPicPr>
+        <p:blipFill>
+          <a:blip r:embed="rId3"/>
+          <a:stretch>
+            <a:fillRect/>
+          </a:stretch>
+        </p:blipFill>
+        <p:spPr>
+          <a:xfrm>
+            <a:off x="559366" y="1145670"/>
+            <a:ext cx="7190343" cy="5574535"/>
           </a:xfrm>
           <a:prstGeom prst="rect">
             <a:avLst/>
@@ -29953,7 +30349,7 @@
     </p:spTree>
     <p:extLst>
       <p:ext uri="{BB962C8B-B14F-4D97-AF65-F5344CB8AC3E}">
-        <p14:creationId xmlns:p14="http://schemas.microsoft.com/office/powerpoint/2010/main" val="3415957113"/>
+        <p14:creationId xmlns:p14="http://schemas.microsoft.com/office/powerpoint/2010/main" val="525151295"/>
       </p:ext>
     </p:extLst>
   </p:cSld>
@@ -29963,7 +30359,7 @@
 </p:sld>
 </file>
 
-<file path=ppt/slides/slide27.xml><?xml version="1.0" encoding="utf-8"?>
+<file path=ppt/slides/slide28.xml><?xml version="1.0" encoding="utf-8"?>
 <p:sld xmlns:a="http://schemas.openxmlformats.org/drawingml/2006/main" xmlns:r="http://schemas.openxmlformats.org/officeDocument/2006/relationships" xmlns:p="http://schemas.openxmlformats.org/presentationml/2006/main">
   <p:cSld>
     <p:spTree>
@@ -30048,7 +30444,7 @@
             <a:fld id="{B5CEABB6-07DC-46E8-9B57-56EC44A396E5}" type="slidenum">
               <a:rPr lang="en-US" smtClean="0"/>
               <a:pPr/>
-              <a:t>27</a:t>
+              <a:t>28</a:t>
             </a:fld>
             <a:endParaRPr lang="en-US" dirty="0"/>
           </a:p>
@@ -30268,7 +30664,7 @@
 </p:sld>
 </file>
 
-<file path=ppt/slides/slide28.xml><?xml version="1.0" encoding="utf-8"?>
+<file path=ppt/slides/slide29.xml><?xml version="1.0" encoding="utf-8"?>
 <p:sld xmlns:a="http://schemas.openxmlformats.org/drawingml/2006/main" xmlns:r="http://schemas.openxmlformats.org/officeDocument/2006/relationships" xmlns:p="http://schemas.openxmlformats.org/presentationml/2006/main">
   <p:cSld>
     <p:spTree>
@@ -30358,7 +30754,7 @@
             <a:fld id="{B5CEABB6-07DC-46E8-9B57-56EC44A396E5}" type="slidenum">
               <a:rPr lang="en-US" smtClean="0"/>
               <a:pPr/>
-              <a:t>28</a:t>
+              <a:t>29</a:t>
             </a:fld>
             <a:endParaRPr lang="en-US" dirty="0"/>
           </a:p>
@@ -30578,7 +30974,268 @@
 </p:sld>
 </file>
 
-<file path=ppt/slides/slide29.xml><?xml version="1.0" encoding="utf-8"?>
+<file path=ppt/slides/slide3.xml><?xml version="1.0" encoding="utf-8"?>
+<p:sld xmlns:a="http://schemas.openxmlformats.org/drawingml/2006/main" xmlns:r="http://schemas.openxmlformats.org/officeDocument/2006/relationships" xmlns:p="http://schemas.openxmlformats.org/presentationml/2006/main">
+  <p:cSld>
+    <p:spTree>
+      <p:nvGrpSpPr>
+        <p:cNvPr id="1" name="">
+          <a:extLst>
+            <a:ext uri="{FF2B5EF4-FFF2-40B4-BE49-F238E27FC236}">
+              <a16:creationId xmlns:a16="http://schemas.microsoft.com/office/drawing/2014/main" id="{D0E87960-187F-76C9-E048-C15ED44FA70C}"/>
+            </a:ext>
+          </a:extLst>
+        </p:cNvPr>
+        <p:cNvGrpSpPr/>
+        <p:nvPr/>
+      </p:nvGrpSpPr>
+      <p:grpSpPr>
+        <a:xfrm>
+          <a:off x="0" y="0"/>
+          <a:ext cx="0" cy="0"/>
+          <a:chOff x="0" y="0"/>
+          <a:chExt cx="0" cy="0"/>
+        </a:xfrm>
+      </p:grpSpPr>
+      <p:sp>
+        <p:nvSpPr>
+          <p:cNvPr id="2" name="Title 1">
+            <a:extLst>
+              <a:ext uri="{FF2B5EF4-FFF2-40B4-BE49-F238E27FC236}">
+                <a16:creationId xmlns:a16="http://schemas.microsoft.com/office/drawing/2014/main" id="{A04A23ED-D41B-7606-A57D-CC1AF851B352}"/>
+              </a:ext>
+            </a:extLst>
+          </p:cNvPr>
+          <p:cNvSpPr>
+            <a:spLocks noGrp="1"/>
+          </p:cNvSpPr>
+          <p:nvPr>
+            <p:ph type="title"/>
+          </p:nvPr>
+        </p:nvSpPr>
+        <p:spPr>
+          <a:xfrm>
+            <a:off x="787966" y="400502"/>
+            <a:ext cx="7346383" cy="1275898"/>
+          </a:xfrm>
+        </p:spPr>
+        <p:txBody>
+          <a:bodyPr>
+            <a:normAutofit/>
+          </a:bodyPr>
+          <a:lstStyle/>
+          <a:p>
+            <a:r>
+              <a:rPr lang="en-US" sz="3600" dirty="0">
+                <a:latin typeface="Times New Roman" panose="02020603050405020304" pitchFamily="18" charset="0"/>
+                <a:cs typeface="Times New Roman" panose="02020603050405020304" pitchFamily="18" charset="0"/>
+              </a:rPr>
+              <a:t>Problem Statement</a:t>
+            </a:r>
+          </a:p>
+        </p:txBody>
+      </p:sp>
+      <p:sp>
+        <p:nvSpPr>
+          <p:cNvPr id="6" name="Slide Number Placeholder 5">
+            <a:extLst>
+              <a:ext uri="{FF2B5EF4-FFF2-40B4-BE49-F238E27FC236}">
+                <a16:creationId xmlns:a16="http://schemas.microsoft.com/office/drawing/2014/main" id="{1F78F9E9-40F3-B852-A68B-DDE45D5725DE}"/>
+              </a:ext>
+            </a:extLst>
+          </p:cNvPr>
+          <p:cNvSpPr>
+            <a:spLocks noGrp="1"/>
+          </p:cNvSpPr>
+          <p:nvPr>
+            <p:ph type="sldNum" sz="quarter" idx="12"/>
+          </p:nvPr>
+        </p:nvSpPr>
+        <p:spPr/>
+        <p:txBody>
+          <a:bodyPr/>
+          <a:lstStyle/>
+          <a:p>
+            <a:fld id="{B5CEABB6-07DC-46E8-9B57-56EC44A396E5}" type="slidenum">
+              <a:rPr lang="en-US" smtClean="0"/>
+              <a:pPr/>
+              <a:t>3</a:t>
+            </a:fld>
+            <a:endParaRPr lang="en-US" dirty="0"/>
+          </a:p>
+        </p:txBody>
+      </p:sp>
+      <p:sp>
+        <p:nvSpPr>
+          <p:cNvPr id="3" name="Rectangle 1">
+            <a:extLst>
+              <a:ext uri="{FF2B5EF4-FFF2-40B4-BE49-F238E27FC236}">
+                <a16:creationId xmlns:a16="http://schemas.microsoft.com/office/drawing/2014/main" id="{3732B2BF-1F0D-2A78-D9C3-F10B22E3EC9D}"/>
+              </a:ext>
+            </a:extLst>
+          </p:cNvPr>
+          <p:cNvSpPr>
+            <a:spLocks noGrp="1" noChangeArrowheads="1"/>
+          </p:cNvSpPr>
+          <p:nvPr>
+            <p:ph sz="half" idx="14"/>
+          </p:nvPr>
+        </p:nvSpPr>
+        <p:spPr bwMode="auto">
+          <a:xfrm>
+            <a:off x="787966" y="1676400"/>
+            <a:ext cx="6370072" cy="2899320"/>
+          </a:xfrm>
+          <a:prstGeom prst="rect">
+            <a:avLst/>
+          </a:prstGeom>
+          <a:noFill/>
+          <a:ln>
+            <a:noFill/>
+          </a:ln>
+          <a:effectLst/>
+          <a:extLst>
+            <a:ext uri="{909E8E84-426E-40DD-AFC4-6F175D3DCCD1}">
+              <a14:hiddenFill xmlns:a14="http://schemas.microsoft.com/office/drawing/2010/main">
+                <a:solidFill>
+                  <a:schemeClr val="accent1"/>
+                </a:solidFill>
+              </a14:hiddenFill>
+            </a:ext>
+            <a:ext uri="{91240B29-F687-4F45-9708-019B960494DF}">
+              <a14:hiddenLine xmlns:a14="http://schemas.microsoft.com/office/drawing/2010/main" w="9525">
+                <a:solidFill>
+                  <a:schemeClr val="tx1"/>
+                </a:solidFill>
+                <a:miter lim="800000"/>
+                <a:headEnd/>
+                <a:tailEnd/>
+              </a14:hiddenLine>
+            </a:ext>
+            <a:ext uri="{AF507438-7753-43E0-B8FC-AC1667EBCBE1}">
+              <a14:hiddenEffects xmlns:a14="http://schemas.microsoft.com/office/drawing/2010/main">
+                <a:effectLst>
+                  <a:outerShdw dist="35921" dir="2700000" algn="ctr" rotWithShape="0">
+                    <a:schemeClr val="bg2"/>
+                  </a:outerShdw>
+                </a:effectLst>
+              </a14:hiddenEffects>
+            </a:ext>
+          </a:extLst>
+        </p:spPr>
+        <p:txBody>
+          <a:bodyPr vert="horz" wrap="square" lIns="91440" tIns="45720" rIns="91440" bIns="45720" numCol="1" anchor="ctr" anchorCtr="0" compatLnSpc="1">
+            <a:prstTxWarp prst="textNoShape">
+              <a:avLst/>
+            </a:prstTxWarp>
+            <a:spAutoFit/>
+          </a:bodyPr>
+          <a:lstStyle/>
+          <a:p>
+            <a:pPr algn="just" eaLnBrk="0" fontAlgn="base" hangingPunct="0">
+              <a:lnSpc>
+                <a:spcPct val="150000"/>
+              </a:lnSpc>
+              <a:spcBef>
+                <a:spcPct val="0"/>
+              </a:spcBef>
+              <a:spcAft>
+                <a:spcPct val="0"/>
+              </a:spcAft>
+            </a:pPr>
+            <a:r>
+              <a:rPr lang="en-US" sz="2400" b="1" dirty="0">
+                <a:latin typeface="Times New Roman" panose="02020603050405020304" pitchFamily="18" charset="0"/>
+                <a:cs typeface="Times New Roman" panose="02020603050405020304" pitchFamily="18" charset="0"/>
+              </a:rPr>
+              <a:t>Objective</a:t>
+            </a:r>
+            <a:endParaRPr lang="en-US" sz="2400" dirty="0">
+              <a:latin typeface="Times New Roman" panose="02020603050405020304" pitchFamily="18" charset="0"/>
+              <a:cs typeface="Times New Roman" panose="02020603050405020304" pitchFamily="18" charset="0"/>
+            </a:endParaRPr>
+          </a:p>
+          <a:p>
+            <a:pPr algn="just" eaLnBrk="0" fontAlgn="base" hangingPunct="0">
+              <a:lnSpc>
+                <a:spcPct val="150000"/>
+              </a:lnSpc>
+              <a:spcBef>
+                <a:spcPct val="0"/>
+              </a:spcBef>
+              <a:spcAft>
+                <a:spcPct val="0"/>
+              </a:spcAft>
+            </a:pPr>
+            <a:endParaRPr lang="en-US" sz="2000" dirty="0">
+              <a:latin typeface="Times New Roman" panose="02020603050405020304" pitchFamily="18" charset="0"/>
+              <a:cs typeface="Times New Roman" panose="02020603050405020304" pitchFamily="18" charset="0"/>
+            </a:endParaRPr>
+          </a:p>
+          <a:p>
+            <a:pPr marL="342900" indent="-342900" algn="just" eaLnBrk="0" fontAlgn="base" hangingPunct="0">
+              <a:lnSpc>
+                <a:spcPct val="150000"/>
+              </a:lnSpc>
+              <a:spcBef>
+                <a:spcPct val="0"/>
+              </a:spcBef>
+              <a:spcAft>
+                <a:spcPct val="0"/>
+              </a:spcAft>
+              <a:buFont typeface="Arial" panose="020B0604020202020204" pitchFamily="34" charset="0"/>
+              <a:buChar char="•"/>
+            </a:pPr>
+            <a:r>
+              <a:rPr lang="en-US" sz="2000" dirty="0">
+                <a:latin typeface="Times New Roman" panose="02020603050405020304" pitchFamily="18" charset="0"/>
+                <a:cs typeface="Times New Roman" panose="02020603050405020304" pitchFamily="18" charset="0"/>
+              </a:rPr>
+              <a:t>Develop a scalable distributed pipeline capable of detecting AI-generated Arabic abstracts using Big Data technologies.</a:t>
+            </a:r>
+          </a:p>
+          <a:p>
+            <a:pPr marL="342900" marR="0" lvl="0" indent="-342900" algn="just" defTabSz="914400" rtl="0" eaLnBrk="0" fontAlgn="base" latinLnBrk="0" hangingPunct="0">
+              <a:lnSpc>
+                <a:spcPct val="150000"/>
+              </a:lnSpc>
+              <a:spcBef>
+                <a:spcPct val="0"/>
+              </a:spcBef>
+              <a:spcAft>
+                <a:spcPct val="0"/>
+              </a:spcAft>
+              <a:buClrTx/>
+              <a:buSzTx/>
+              <a:buFont typeface="Arial" panose="020B0604020202020204" pitchFamily="34" charset="0"/>
+              <a:buChar char="•"/>
+              <a:tabLst/>
+            </a:pPr>
+            <a:endParaRPr kumimoji="0" lang="en-US" altLang="en-US" sz="2000" b="0" i="0" u="none" strike="noStrike" cap="none" normalizeH="0" baseline="0" dirty="0">
+              <a:ln>
+                <a:noFill/>
+              </a:ln>
+              <a:effectLst/>
+              <a:latin typeface="Times New Roman" panose="02020603050405020304" pitchFamily="18" charset="0"/>
+              <a:cs typeface="Times New Roman" panose="02020603050405020304" pitchFamily="18" charset="0"/>
+            </a:endParaRPr>
+          </a:p>
+        </p:txBody>
+      </p:sp>
+    </p:spTree>
+    <p:extLst>
+      <p:ext uri="{BB962C8B-B14F-4D97-AF65-F5344CB8AC3E}">
+        <p14:creationId xmlns:p14="http://schemas.microsoft.com/office/powerpoint/2010/main" val="3947326416"/>
+      </p:ext>
+    </p:extLst>
+  </p:cSld>
+  <p:clrMapOvr>
+    <a:masterClrMapping/>
+  </p:clrMapOvr>
+</p:sld>
+</file>
+
+<file path=ppt/slides/slide30.xml><?xml version="1.0" encoding="utf-8"?>
 <p:sld xmlns:a="http://schemas.openxmlformats.org/drawingml/2006/main" xmlns:r="http://schemas.openxmlformats.org/officeDocument/2006/relationships" xmlns:p="http://schemas.openxmlformats.org/presentationml/2006/main">
   <p:cSld>
     <p:spTree>
@@ -30668,7 +31325,7 @@
             <a:fld id="{B5CEABB6-07DC-46E8-9B57-56EC44A396E5}" type="slidenum">
               <a:rPr lang="en-US" smtClean="0"/>
               <a:pPr/>
-              <a:t>29</a:t>
+              <a:t>30</a:t>
             </a:fld>
             <a:endParaRPr lang="en-US" dirty="0"/>
           </a:p>
@@ -31128,268 +31785,7 @@
 </p:sld>
 </file>
 
-<file path=ppt/slides/slide3.xml><?xml version="1.0" encoding="utf-8"?>
-<p:sld xmlns:a="http://schemas.openxmlformats.org/drawingml/2006/main" xmlns:r="http://schemas.openxmlformats.org/officeDocument/2006/relationships" xmlns:p="http://schemas.openxmlformats.org/presentationml/2006/main">
-  <p:cSld>
-    <p:spTree>
-      <p:nvGrpSpPr>
-        <p:cNvPr id="1" name="">
-          <a:extLst>
-            <a:ext uri="{FF2B5EF4-FFF2-40B4-BE49-F238E27FC236}">
-              <a16:creationId xmlns:a16="http://schemas.microsoft.com/office/drawing/2014/main" id="{D0E87960-187F-76C9-E048-C15ED44FA70C}"/>
-            </a:ext>
-          </a:extLst>
-        </p:cNvPr>
-        <p:cNvGrpSpPr/>
-        <p:nvPr/>
-      </p:nvGrpSpPr>
-      <p:grpSpPr>
-        <a:xfrm>
-          <a:off x="0" y="0"/>
-          <a:ext cx="0" cy="0"/>
-          <a:chOff x="0" y="0"/>
-          <a:chExt cx="0" cy="0"/>
-        </a:xfrm>
-      </p:grpSpPr>
-      <p:sp>
-        <p:nvSpPr>
-          <p:cNvPr id="2" name="Title 1">
-            <a:extLst>
-              <a:ext uri="{FF2B5EF4-FFF2-40B4-BE49-F238E27FC236}">
-                <a16:creationId xmlns:a16="http://schemas.microsoft.com/office/drawing/2014/main" id="{A04A23ED-D41B-7606-A57D-CC1AF851B352}"/>
-              </a:ext>
-            </a:extLst>
-          </p:cNvPr>
-          <p:cNvSpPr>
-            <a:spLocks noGrp="1"/>
-          </p:cNvSpPr>
-          <p:nvPr>
-            <p:ph type="title"/>
-          </p:nvPr>
-        </p:nvSpPr>
-        <p:spPr>
-          <a:xfrm>
-            <a:off x="787966" y="400502"/>
-            <a:ext cx="7346383" cy="1275898"/>
-          </a:xfrm>
-        </p:spPr>
-        <p:txBody>
-          <a:bodyPr>
-            <a:normAutofit/>
-          </a:bodyPr>
-          <a:lstStyle/>
-          <a:p>
-            <a:r>
-              <a:rPr lang="en-US" sz="3600" dirty="0">
-                <a:latin typeface="Times New Roman" panose="02020603050405020304" pitchFamily="18" charset="0"/>
-                <a:cs typeface="Times New Roman" panose="02020603050405020304" pitchFamily="18" charset="0"/>
-              </a:rPr>
-              <a:t>Problem Statement</a:t>
-            </a:r>
-          </a:p>
-        </p:txBody>
-      </p:sp>
-      <p:sp>
-        <p:nvSpPr>
-          <p:cNvPr id="6" name="Slide Number Placeholder 5">
-            <a:extLst>
-              <a:ext uri="{FF2B5EF4-FFF2-40B4-BE49-F238E27FC236}">
-                <a16:creationId xmlns:a16="http://schemas.microsoft.com/office/drawing/2014/main" id="{1F78F9E9-40F3-B852-A68B-DDE45D5725DE}"/>
-              </a:ext>
-            </a:extLst>
-          </p:cNvPr>
-          <p:cNvSpPr>
-            <a:spLocks noGrp="1"/>
-          </p:cNvSpPr>
-          <p:nvPr>
-            <p:ph type="sldNum" sz="quarter" idx="12"/>
-          </p:nvPr>
-        </p:nvSpPr>
-        <p:spPr/>
-        <p:txBody>
-          <a:bodyPr/>
-          <a:lstStyle/>
-          <a:p>
-            <a:fld id="{B5CEABB6-07DC-46E8-9B57-56EC44A396E5}" type="slidenum">
-              <a:rPr lang="en-US" smtClean="0"/>
-              <a:pPr/>
-              <a:t>3</a:t>
-            </a:fld>
-            <a:endParaRPr lang="en-US" dirty="0"/>
-          </a:p>
-        </p:txBody>
-      </p:sp>
-      <p:sp>
-        <p:nvSpPr>
-          <p:cNvPr id="3" name="Rectangle 1">
-            <a:extLst>
-              <a:ext uri="{FF2B5EF4-FFF2-40B4-BE49-F238E27FC236}">
-                <a16:creationId xmlns:a16="http://schemas.microsoft.com/office/drawing/2014/main" id="{3732B2BF-1F0D-2A78-D9C3-F10B22E3EC9D}"/>
-              </a:ext>
-            </a:extLst>
-          </p:cNvPr>
-          <p:cNvSpPr>
-            <a:spLocks noGrp="1" noChangeArrowheads="1"/>
-          </p:cNvSpPr>
-          <p:nvPr>
-            <p:ph sz="half" idx="14"/>
-          </p:nvPr>
-        </p:nvSpPr>
-        <p:spPr bwMode="auto">
-          <a:xfrm>
-            <a:off x="787966" y="1676400"/>
-            <a:ext cx="6370072" cy="2899320"/>
-          </a:xfrm>
-          <a:prstGeom prst="rect">
-            <a:avLst/>
-          </a:prstGeom>
-          <a:noFill/>
-          <a:ln>
-            <a:noFill/>
-          </a:ln>
-          <a:effectLst/>
-          <a:extLst>
-            <a:ext uri="{909E8E84-426E-40DD-AFC4-6F175D3DCCD1}">
-              <a14:hiddenFill xmlns:a14="http://schemas.microsoft.com/office/drawing/2010/main">
-                <a:solidFill>
-                  <a:schemeClr val="accent1"/>
-                </a:solidFill>
-              </a14:hiddenFill>
-            </a:ext>
-            <a:ext uri="{91240B29-F687-4F45-9708-019B960494DF}">
-              <a14:hiddenLine xmlns:a14="http://schemas.microsoft.com/office/drawing/2010/main" w="9525">
-                <a:solidFill>
-                  <a:schemeClr val="tx1"/>
-                </a:solidFill>
-                <a:miter lim="800000"/>
-                <a:headEnd/>
-                <a:tailEnd/>
-              </a14:hiddenLine>
-            </a:ext>
-            <a:ext uri="{AF507438-7753-43E0-B8FC-AC1667EBCBE1}">
-              <a14:hiddenEffects xmlns:a14="http://schemas.microsoft.com/office/drawing/2010/main">
-                <a:effectLst>
-                  <a:outerShdw dist="35921" dir="2700000" algn="ctr" rotWithShape="0">
-                    <a:schemeClr val="bg2"/>
-                  </a:outerShdw>
-                </a:effectLst>
-              </a14:hiddenEffects>
-            </a:ext>
-          </a:extLst>
-        </p:spPr>
-        <p:txBody>
-          <a:bodyPr vert="horz" wrap="square" lIns="91440" tIns="45720" rIns="91440" bIns="45720" numCol="1" anchor="ctr" anchorCtr="0" compatLnSpc="1">
-            <a:prstTxWarp prst="textNoShape">
-              <a:avLst/>
-            </a:prstTxWarp>
-            <a:spAutoFit/>
-          </a:bodyPr>
-          <a:lstStyle/>
-          <a:p>
-            <a:pPr algn="just" eaLnBrk="0" fontAlgn="base" hangingPunct="0">
-              <a:lnSpc>
-                <a:spcPct val="150000"/>
-              </a:lnSpc>
-              <a:spcBef>
-                <a:spcPct val="0"/>
-              </a:spcBef>
-              <a:spcAft>
-                <a:spcPct val="0"/>
-              </a:spcAft>
-            </a:pPr>
-            <a:r>
-              <a:rPr lang="en-US" sz="2400" b="1" dirty="0">
-                <a:latin typeface="Times New Roman" panose="02020603050405020304" pitchFamily="18" charset="0"/>
-                <a:cs typeface="Times New Roman" panose="02020603050405020304" pitchFamily="18" charset="0"/>
-              </a:rPr>
-              <a:t>Objective</a:t>
-            </a:r>
-            <a:endParaRPr lang="en-US" sz="2400" dirty="0">
-              <a:latin typeface="Times New Roman" panose="02020603050405020304" pitchFamily="18" charset="0"/>
-              <a:cs typeface="Times New Roman" panose="02020603050405020304" pitchFamily="18" charset="0"/>
-            </a:endParaRPr>
-          </a:p>
-          <a:p>
-            <a:pPr algn="just" eaLnBrk="0" fontAlgn="base" hangingPunct="0">
-              <a:lnSpc>
-                <a:spcPct val="150000"/>
-              </a:lnSpc>
-              <a:spcBef>
-                <a:spcPct val="0"/>
-              </a:spcBef>
-              <a:spcAft>
-                <a:spcPct val="0"/>
-              </a:spcAft>
-            </a:pPr>
-            <a:endParaRPr lang="en-US" sz="2000" dirty="0">
-              <a:latin typeface="Times New Roman" panose="02020603050405020304" pitchFamily="18" charset="0"/>
-              <a:cs typeface="Times New Roman" panose="02020603050405020304" pitchFamily="18" charset="0"/>
-            </a:endParaRPr>
-          </a:p>
-          <a:p>
-            <a:pPr marL="342900" indent="-342900" algn="just" eaLnBrk="0" fontAlgn="base" hangingPunct="0">
-              <a:lnSpc>
-                <a:spcPct val="150000"/>
-              </a:lnSpc>
-              <a:spcBef>
-                <a:spcPct val="0"/>
-              </a:spcBef>
-              <a:spcAft>
-                <a:spcPct val="0"/>
-              </a:spcAft>
-              <a:buFont typeface="Arial" panose="020B0604020202020204" pitchFamily="34" charset="0"/>
-              <a:buChar char="•"/>
-            </a:pPr>
-            <a:r>
-              <a:rPr lang="en-US" sz="2000" dirty="0">
-                <a:latin typeface="Times New Roman" panose="02020603050405020304" pitchFamily="18" charset="0"/>
-                <a:cs typeface="Times New Roman" panose="02020603050405020304" pitchFamily="18" charset="0"/>
-              </a:rPr>
-              <a:t>Develop a scalable distributed pipeline capable of detecting AI-generated Arabic abstracts using Big Data technologies.</a:t>
-            </a:r>
-          </a:p>
-          <a:p>
-            <a:pPr marL="342900" marR="0" lvl="0" indent="-342900" algn="just" defTabSz="914400" rtl="0" eaLnBrk="0" fontAlgn="base" latinLnBrk="0" hangingPunct="0">
-              <a:lnSpc>
-                <a:spcPct val="150000"/>
-              </a:lnSpc>
-              <a:spcBef>
-                <a:spcPct val="0"/>
-              </a:spcBef>
-              <a:spcAft>
-                <a:spcPct val="0"/>
-              </a:spcAft>
-              <a:buClrTx/>
-              <a:buSzTx/>
-              <a:buFont typeface="Arial" panose="020B0604020202020204" pitchFamily="34" charset="0"/>
-              <a:buChar char="•"/>
-              <a:tabLst/>
-            </a:pPr>
-            <a:endParaRPr kumimoji="0" lang="en-US" altLang="en-US" sz="2000" b="0" i="0" u="none" strike="noStrike" cap="none" normalizeH="0" baseline="0" dirty="0">
-              <a:ln>
-                <a:noFill/>
-              </a:ln>
-              <a:effectLst/>
-              <a:latin typeface="Times New Roman" panose="02020603050405020304" pitchFamily="18" charset="0"/>
-              <a:cs typeface="Times New Roman" panose="02020603050405020304" pitchFamily="18" charset="0"/>
-            </a:endParaRPr>
-          </a:p>
-        </p:txBody>
-      </p:sp>
-    </p:spTree>
-    <p:extLst>
-      <p:ext uri="{BB962C8B-B14F-4D97-AF65-F5344CB8AC3E}">
-        <p14:creationId xmlns:p14="http://schemas.microsoft.com/office/powerpoint/2010/main" val="3947326416"/>
-      </p:ext>
-    </p:extLst>
-  </p:cSld>
-  <p:clrMapOvr>
-    <a:masterClrMapping/>
-  </p:clrMapOvr>
-</p:sld>
-</file>
-
-<file path=ppt/slides/slide30.xml><?xml version="1.0" encoding="utf-8"?>
+<file path=ppt/slides/slide31.xml><?xml version="1.0" encoding="utf-8"?>
 <p:sld xmlns:a="http://schemas.openxmlformats.org/drawingml/2006/main" xmlns:r="http://schemas.openxmlformats.org/officeDocument/2006/relationships" xmlns:p="http://schemas.openxmlformats.org/presentationml/2006/main">
   <p:cSld>
     <p:spTree>
@@ -31479,7 +31875,7 @@
             <a:fld id="{B5CEABB6-07DC-46E8-9B57-56EC44A396E5}" type="slidenum">
               <a:rPr lang="en-US" smtClean="0"/>
               <a:pPr/>
-              <a:t>30</a:t>
+              <a:t>31</a:t>
             </a:fld>
             <a:endParaRPr lang="en-US" dirty="0"/>
           </a:p>
@@ -31658,7 +32054,7 @@
 </p:sld>
 </file>
 
-<file path=ppt/slides/slide31.xml><?xml version="1.0" encoding="utf-8"?>
+<file path=ppt/slides/slide32.xml><?xml version="1.0" encoding="utf-8"?>
 <p:sld xmlns:a="http://schemas.openxmlformats.org/drawingml/2006/main" xmlns:r="http://schemas.openxmlformats.org/officeDocument/2006/relationships" xmlns:p="http://schemas.openxmlformats.org/presentationml/2006/main">
   <p:cSld>
     <p:spTree>
@@ -31748,7 +32144,7 @@
             <a:fld id="{B5CEABB6-07DC-46E8-9B57-56EC44A396E5}" type="slidenum">
               <a:rPr lang="en-US" smtClean="0"/>
               <a:pPr/>
-              <a:t>31</a:t>
+              <a:t>32</a:t>
             </a:fld>
             <a:endParaRPr lang="en-US" dirty="0"/>
           </a:p>
@@ -31799,7 +32195,7 @@
 </p:sld>
 </file>
 
-<file path=ppt/slides/slide32.xml><?xml version="1.0" encoding="utf-8"?>
+<file path=ppt/slides/slide33.xml><?xml version="1.0" encoding="utf-8"?>
 <p:sld xmlns:a="http://schemas.openxmlformats.org/drawingml/2006/main" xmlns:r="http://schemas.openxmlformats.org/officeDocument/2006/relationships" xmlns:p="http://schemas.openxmlformats.org/presentationml/2006/main">
   <p:cSld>
     <p:spTree>
@@ -31889,7 +32285,7 @@
             <a:fld id="{B5CEABB6-07DC-46E8-9B57-56EC44A396E5}" type="slidenum">
               <a:rPr lang="en-US" smtClean="0"/>
               <a:pPr/>
-              <a:t>32</a:t>
+              <a:t>33</a:t>
             </a:fld>
             <a:endParaRPr lang="en-US" dirty="0"/>
           </a:p>
@@ -32091,7 +32487,7 @@
 </p:sld>
 </file>
 
-<file path=ppt/slides/slide33.xml><?xml version="1.0" encoding="utf-8"?>
+<file path=ppt/slides/slide34.xml><?xml version="1.0" encoding="utf-8"?>
 <p:sld xmlns:a="http://schemas.openxmlformats.org/drawingml/2006/main" xmlns:r="http://schemas.openxmlformats.org/officeDocument/2006/relationships" xmlns:p="http://schemas.openxmlformats.org/presentationml/2006/main">
   <p:cSld>
     <p:spTree>
@@ -32181,7 +32577,7 @@
             <a:fld id="{B5CEABB6-07DC-46E8-9B57-56EC44A396E5}" type="slidenum">
               <a:rPr lang="en-US" smtClean="0"/>
               <a:pPr/>
-              <a:t>33</a:t>
+              <a:t>34</a:t>
             </a:fld>
             <a:endParaRPr lang="en-US" dirty="0"/>
           </a:p>
@@ -32349,7 +32745,7 @@
 </p:sld>
 </file>
 
-<file path=ppt/slides/slide34.xml><?xml version="1.0" encoding="utf-8"?>
+<file path=ppt/slides/slide35.xml><?xml version="1.0" encoding="utf-8"?>
 <p:sld xmlns:a="http://schemas.openxmlformats.org/drawingml/2006/main" xmlns:r="http://schemas.openxmlformats.org/officeDocument/2006/relationships" xmlns:p="http://schemas.openxmlformats.org/presentationml/2006/main">
   <p:cSld>
     <p:spTree>
@@ -32439,7 +32835,7 @@
             <a:fld id="{B5CEABB6-07DC-46E8-9B57-56EC44A396E5}" type="slidenum">
               <a:rPr lang="en-US" smtClean="0"/>
               <a:pPr/>
-              <a:t>34</a:t>
+              <a:t>35</a:t>
             </a:fld>
             <a:endParaRPr lang="en-US" dirty="0"/>
           </a:p>
@@ -32605,7 +33001,7 @@
 </p:sld>
 </file>
 
-<file path=ppt/slides/slide35.xml><?xml version="1.0" encoding="utf-8"?>
+<file path=ppt/slides/slide36.xml><?xml version="1.0" encoding="utf-8"?>
 <p:sld xmlns:a="http://schemas.openxmlformats.org/drawingml/2006/main" xmlns:r="http://schemas.openxmlformats.org/officeDocument/2006/relationships" xmlns:p="http://schemas.openxmlformats.org/presentationml/2006/main">
   <p:cSld>
     <p:spTree>
@@ -32695,7 +33091,7 @@
             <a:fld id="{B5CEABB6-07DC-46E8-9B57-56EC44A396E5}" type="slidenum">
               <a:rPr lang="en-US" smtClean="0"/>
               <a:pPr/>
-              <a:t>35</a:t>
+              <a:t>36</a:t>
             </a:fld>
             <a:endParaRPr lang="en-US" dirty="0"/>
           </a:p>
@@ -32863,7 +33259,7 @@
 </p:sld>
 </file>
 
-<file path=ppt/slides/slide36.xml><?xml version="1.0" encoding="utf-8"?>
+<file path=ppt/slides/slide37.xml><?xml version="1.0" encoding="utf-8"?>
 <p:sld xmlns:a="http://schemas.openxmlformats.org/drawingml/2006/main" xmlns:r="http://schemas.openxmlformats.org/officeDocument/2006/relationships" xmlns:p="http://schemas.openxmlformats.org/presentationml/2006/main">
   <p:cSld>
     <p:spTree>
@@ -32953,7 +33349,7 @@
             <a:fld id="{B5CEABB6-07DC-46E8-9B57-56EC44A396E5}" type="slidenum">
               <a:rPr lang="en-US" smtClean="0"/>
               <a:pPr/>
-              <a:t>36</a:t>
+              <a:t>37</a:t>
             </a:fld>
             <a:endParaRPr lang="en-US" dirty="0"/>
           </a:p>
@@ -33137,7 +33533,7 @@
 </p:sld>
 </file>
 
-<file path=ppt/slides/slide37.xml><?xml version="1.0" encoding="utf-8"?>
+<file path=ppt/slides/slide38.xml><?xml version="1.0" encoding="utf-8"?>
 <p:sld xmlns:a="http://schemas.openxmlformats.org/drawingml/2006/main" xmlns:r="http://schemas.openxmlformats.org/officeDocument/2006/relationships" xmlns:p="http://schemas.openxmlformats.org/presentationml/2006/main">
   <p:cSld>
     <p:spTree>
@@ -33222,7 +33618,7 @@
             <a:fld id="{B5CEABB6-07DC-46E8-9B57-56EC44A396E5}" type="slidenum">
               <a:rPr lang="en-US" smtClean="0"/>
               <a:pPr/>
-              <a:t>37</a:t>
+              <a:t>38</a:t>
             </a:fld>
             <a:endParaRPr lang="en-US" dirty="0"/>
           </a:p>
@@ -33721,7 +34117,7 @@
 </p:sld>
 </file>
 
-<file path=ppt/slides/slide38.xml><?xml version="1.0" encoding="utf-8"?>
+<file path=ppt/slides/slide39.xml><?xml version="1.0" encoding="utf-8"?>
 <p:sld xmlns:a="http://schemas.openxmlformats.org/drawingml/2006/main" xmlns:r="http://schemas.openxmlformats.org/officeDocument/2006/relationships" xmlns:p="http://schemas.openxmlformats.org/presentationml/2006/main">
   <p:cSld>
     <p:spTree>
@@ -33806,7 +34202,7 @@
             <a:fld id="{B5CEABB6-07DC-46E8-9B57-56EC44A396E5}" type="slidenum">
               <a:rPr lang="en-US" smtClean="0"/>
               <a:pPr/>
-              <a:t>38</a:t>
+              <a:t>39</a:t>
             </a:fld>
             <a:endParaRPr lang="en-US" dirty="0"/>
           </a:p>
@@ -34279,154 +34675,6 @@
 </p:sld>
 </file>
 
-<file path=ppt/slides/slide39.xml><?xml version="1.0" encoding="utf-8"?>
-<p:sld xmlns:a="http://schemas.openxmlformats.org/drawingml/2006/main" xmlns:r="http://schemas.openxmlformats.org/officeDocument/2006/relationships" xmlns:p="http://schemas.openxmlformats.org/presentationml/2006/main">
-  <p:cSld>
-    <p:spTree>
-      <p:nvGrpSpPr>
-        <p:cNvPr id="1" name="">
-          <a:extLst>
-            <a:ext uri="{FF2B5EF4-FFF2-40B4-BE49-F238E27FC236}">
-              <a16:creationId xmlns:a16="http://schemas.microsoft.com/office/drawing/2014/main" id="{766ADD25-4AF5-2C11-35F4-420BD63DFA08}"/>
-            </a:ext>
-          </a:extLst>
-        </p:cNvPr>
-        <p:cNvGrpSpPr/>
-        <p:nvPr/>
-      </p:nvGrpSpPr>
-      <p:grpSpPr>
-        <a:xfrm>
-          <a:off x="0" y="0"/>
-          <a:ext cx="0" cy="0"/>
-          <a:chOff x="0" y="0"/>
-          <a:chExt cx="0" cy="0"/>
-        </a:xfrm>
-      </p:grpSpPr>
-      <p:sp>
-        <p:nvSpPr>
-          <p:cNvPr id="6" name="Slide Number Placeholder 5">
-            <a:extLst>
-              <a:ext uri="{FF2B5EF4-FFF2-40B4-BE49-F238E27FC236}">
-                <a16:creationId xmlns:a16="http://schemas.microsoft.com/office/drawing/2014/main" id="{942D928B-D8DD-4019-6D78-8B2C7C247646}"/>
-              </a:ext>
-            </a:extLst>
-          </p:cNvPr>
-          <p:cNvSpPr>
-            <a:spLocks noGrp="1"/>
-          </p:cNvSpPr>
-          <p:nvPr>
-            <p:ph type="sldNum" sz="quarter" idx="12"/>
-          </p:nvPr>
-        </p:nvSpPr>
-        <p:spPr/>
-        <p:txBody>
-          <a:bodyPr/>
-          <a:lstStyle/>
-          <a:p>
-            <a:fld id="{B5CEABB6-07DC-46E8-9B57-56EC44A396E5}" type="slidenum">
-              <a:rPr lang="en-US" smtClean="0"/>
-              <a:pPr/>
-              <a:t>39</a:t>
-            </a:fld>
-            <a:endParaRPr lang="en-US" dirty="0"/>
-          </a:p>
-        </p:txBody>
-      </p:sp>
-      <p:sp>
-        <p:nvSpPr>
-          <p:cNvPr id="5" name="TextBox 4">
-            <a:extLst>
-              <a:ext uri="{FF2B5EF4-FFF2-40B4-BE49-F238E27FC236}">
-                <a16:creationId xmlns:a16="http://schemas.microsoft.com/office/drawing/2014/main" id="{F79E4432-72BF-5A6E-022F-86BB04770448}"/>
-              </a:ext>
-            </a:extLst>
-          </p:cNvPr>
-          <p:cNvSpPr txBox="1"/>
-          <p:nvPr/>
-        </p:nvSpPr>
-        <p:spPr>
-          <a:xfrm>
-            <a:off x="765109" y="2470746"/>
-            <a:ext cx="5505061" cy="1077218"/>
-          </a:xfrm>
-          <a:prstGeom prst="rect">
-            <a:avLst/>
-          </a:prstGeom>
-          <a:noFill/>
-        </p:spPr>
-        <p:txBody>
-          <a:bodyPr wrap="square">
-            <a:spAutoFit/>
-          </a:bodyPr>
-          <a:lstStyle/>
-          <a:p>
-            <a:pPr algn="ctr"/>
-            <a:r>
-              <a:rPr sz="6400" b="1" dirty="0">
-                <a:solidFill>
-                  <a:srgbClr val="FFFFFF"/>
-                </a:solidFill>
-                <a:latin typeface="Calibri"/>
-              </a:rPr>
-              <a:t>Thank You</a:t>
-            </a:r>
-          </a:p>
-        </p:txBody>
-      </p:sp>
-      <p:sp>
-        <p:nvSpPr>
-          <p:cNvPr id="9" name="TextBox 8">
-            <a:extLst>
-              <a:ext uri="{FF2B5EF4-FFF2-40B4-BE49-F238E27FC236}">
-                <a16:creationId xmlns:a16="http://schemas.microsoft.com/office/drawing/2014/main" id="{381CAB59-54C3-CFDE-025F-9696EA90A977}"/>
-              </a:ext>
-            </a:extLst>
-          </p:cNvPr>
-          <p:cNvSpPr txBox="1"/>
-          <p:nvPr/>
-        </p:nvSpPr>
-        <p:spPr>
-          <a:xfrm>
-            <a:off x="1219200" y="3779521"/>
-            <a:ext cx="4621763" cy="543675"/>
-          </a:xfrm>
-          <a:prstGeom prst="rect">
-            <a:avLst/>
-          </a:prstGeom>
-          <a:noFill/>
-        </p:spPr>
-        <p:txBody>
-          <a:bodyPr wrap="square">
-            <a:spAutoFit/>
-          </a:bodyPr>
-          <a:lstStyle/>
-          <a:p>
-            <a:pPr algn="ctr"/>
-            <a:r>
-              <a:rPr sz="2933">
-                <a:solidFill>
-                  <a:srgbClr val="FFFFFF"/>
-                </a:solidFill>
-                <a:latin typeface="Calibri"/>
-              </a:rPr>
-              <a:t>Questions &amp; Discussion</a:t>
-            </a:r>
-          </a:p>
-        </p:txBody>
-      </p:sp>
-    </p:spTree>
-    <p:extLst>
-      <p:ext uri="{BB962C8B-B14F-4D97-AF65-F5344CB8AC3E}">
-        <p14:creationId xmlns:p14="http://schemas.microsoft.com/office/powerpoint/2010/main" val="1390334377"/>
-      </p:ext>
-    </p:extLst>
-  </p:cSld>
-  <p:clrMapOvr>
-    <a:masterClrMapping/>
-  </p:clrMapOvr>
-</p:sld>
-</file>
-
 <file path=ppt/slides/slide4.xml><?xml version="1.0" encoding="utf-8"?>
 <p:sld xmlns:a="http://schemas.openxmlformats.org/drawingml/2006/main" xmlns:r="http://schemas.openxmlformats.org/officeDocument/2006/relationships" xmlns:p="http://schemas.openxmlformats.org/presentationml/2006/main">
   <p:cSld>
@@ -34738,6 +34986,154 @@
     <p:extLst>
       <p:ext uri="{BB962C8B-B14F-4D97-AF65-F5344CB8AC3E}">
         <p14:creationId xmlns:p14="http://schemas.microsoft.com/office/powerpoint/2010/main" val="1286570767"/>
+      </p:ext>
+    </p:extLst>
+  </p:cSld>
+  <p:clrMapOvr>
+    <a:masterClrMapping/>
+  </p:clrMapOvr>
+</p:sld>
+</file>
+
+<file path=ppt/slides/slide40.xml><?xml version="1.0" encoding="utf-8"?>
+<p:sld xmlns:a="http://schemas.openxmlformats.org/drawingml/2006/main" xmlns:r="http://schemas.openxmlformats.org/officeDocument/2006/relationships" xmlns:p="http://schemas.openxmlformats.org/presentationml/2006/main">
+  <p:cSld>
+    <p:spTree>
+      <p:nvGrpSpPr>
+        <p:cNvPr id="1" name="">
+          <a:extLst>
+            <a:ext uri="{FF2B5EF4-FFF2-40B4-BE49-F238E27FC236}">
+              <a16:creationId xmlns:a16="http://schemas.microsoft.com/office/drawing/2014/main" id="{766ADD25-4AF5-2C11-35F4-420BD63DFA08}"/>
+            </a:ext>
+          </a:extLst>
+        </p:cNvPr>
+        <p:cNvGrpSpPr/>
+        <p:nvPr/>
+      </p:nvGrpSpPr>
+      <p:grpSpPr>
+        <a:xfrm>
+          <a:off x="0" y="0"/>
+          <a:ext cx="0" cy="0"/>
+          <a:chOff x="0" y="0"/>
+          <a:chExt cx="0" cy="0"/>
+        </a:xfrm>
+      </p:grpSpPr>
+      <p:sp>
+        <p:nvSpPr>
+          <p:cNvPr id="6" name="Slide Number Placeholder 5">
+            <a:extLst>
+              <a:ext uri="{FF2B5EF4-FFF2-40B4-BE49-F238E27FC236}">
+                <a16:creationId xmlns:a16="http://schemas.microsoft.com/office/drawing/2014/main" id="{942D928B-D8DD-4019-6D78-8B2C7C247646}"/>
+              </a:ext>
+            </a:extLst>
+          </p:cNvPr>
+          <p:cNvSpPr>
+            <a:spLocks noGrp="1"/>
+          </p:cNvSpPr>
+          <p:nvPr>
+            <p:ph type="sldNum" sz="quarter" idx="12"/>
+          </p:nvPr>
+        </p:nvSpPr>
+        <p:spPr/>
+        <p:txBody>
+          <a:bodyPr/>
+          <a:lstStyle/>
+          <a:p>
+            <a:fld id="{B5CEABB6-07DC-46E8-9B57-56EC44A396E5}" type="slidenum">
+              <a:rPr lang="en-US" smtClean="0"/>
+              <a:pPr/>
+              <a:t>40</a:t>
+            </a:fld>
+            <a:endParaRPr lang="en-US" dirty="0"/>
+          </a:p>
+        </p:txBody>
+      </p:sp>
+      <p:sp>
+        <p:nvSpPr>
+          <p:cNvPr id="5" name="TextBox 4">
+            <a:extLst>
+              <a:ext uri="{FF2B5EF4-FFF2-40B4-BE49-F238E27FC236}">
+                <a16:creationId xmlns:a16="http://schemas.microsoft.com/office/drawing/2014/main" id="{F79E4432-72BF-5A6E-022F-86BB04770448}"/>
+              </a:ext>
+            </a:extLst>
+          </p:cNvPr>
+          <p:cNvSpPr txBox="1"/>
+          <p:nvPr/>
+        </p:nvSpPr>
+        <p:spPr>
+          <a:xfrm>
+            <a:off x="765109" y="2470746"/>
+            <a:ext cx="5505061" cy="1077218"/>
+          </a:xfrm>
+          <a:prstGeom prst="rect">
+            <a:avLst/>
+          </a:prstGeom>
+          <a:noFill/>
+        </p:spPr>
+        <p:txBody>
+          <a:bodyPr wrap="square">
+            <a:spAutoFit/>
+          </a:bodyPr>
+          <a:lstStyle/>
+          <a:p>
+            <a:pPr algn="ctr"/>
+            <a:r>
+              <a:rPr sz="6400" b="1" dirty="0">
+                <a:solidFill>
+                  <a:srgbClr val="FFFFFF"/>
+                </a:solidFill>
+                <a:latin typeface="Calibri"/>
+              </a:rPr>
+              <a:t>Thank You</a:t>
+            </a:r>
+          </a:p>
+        </p:txBody>
+      </p:sp>
+      <p:sp>
+        <p:nvSpPr>
+          <p:cNvPr id="9" name="TextBox 8">
+            <a:extLst>
+              <a:ext uri="{FF2B5EF4-FFF2-40B4-BE49-F238E27FC236}">
+                <a16:creationId xmlns:a16="http://schemas.microsoft.com/office/drawing/2014/main" id="{381CAB59-54C3-CFDE-025F-9696EA90A977}"/>
+              </a:ext>
+            </a:extLst>
+          </p:cNvPr>
+          <p:cNvSpPr txBox="1"/>
+          <p:nvPr/>
+        </p:nvSpPr>
+        <p:spPr>
+          <a:xfrm>
+            <a:off x="1219200" y="3779521"/>
+            <a:ext cx="4621763" cy="543675"/>
+          </a:xfrm>
+          <a:prstGeom prst="rect">
+            <a:avLst/>
+          </a:prstGeom>
+          <a:noFill/>
+        </p:spPr>
+        <p:txBody>
+          <a:bodyPr wrap="square">
+            <a:spAutoFit/>
+          </a:bodyPr>
+          <a:lstStyle/>
+          <a:p>
+            <a:pPr algn="ctr"/>
+            <a:r>
+              <a:rPr sz="2933">
+                <a:solidFill>
+                  <a:srgbClr val="FFFFFF"/>
+                </a:solidFill>
+                <a:latin typeface="Calibri"/>
+              </a:rPr>
+              <a:t>Questions &amp; Discussion</a:t>
+            </a:r>
+          </a:p>
+        </p:txBody>
+      </p:sp>
+    </p:spTree>
+    <p:extLst>
+      <p:ext uri="{BB962C8B-B14F-4D97-AF65-F5344CB8AC3E}">
+        <p14:creationId xmlns:p14="http://schemas.microsoft.com/office/powerpoint/2010/main" val="1390334377"/>
       </p:ext>
     </p:extLst>
   </p:cSld>
